--- a/7. Oportunidades_Soluciones.pptx
+++ b/7. Oportunidades_Soluciones.pptx
@@ -26,9 +26,12 @@
     <p:sldId id="274" r:id="rId20"/>
     <p:sldId id="275" r:id="rId21"/>
     <p:sldId id="276" r:id="rId22"/>
+    <p:sldId id="277" r:id="rId23"/>
+    <p:sldId id="278" r:id="rId24"/>
+    <p:sldId id="279" r:id="rId25"/>
   </p:sldIdLst>
   <p:notesMasterIdLst>
-    <p:notesMasterId r:id="rId23"/>
+    <p:notesMasterId r:id="rId26"/>
   </p:notesMasterIdLst>
   <p:sldSz cx="9144000" cy="5143500"/>
   <p:notesSz cx="5143500" cy="9144000"/>
@@ -2145,7 +2148,7 @@
           <a:p>
             <a:r>
               <a:rPr lang="en-US" dirty="0"/>
-              <a:t>Una decisión sin fecha ni disparador de revisión se vuelve dogma. Y una ADR buena lleva las alternativas descartadas con su razón y también las consecuencias negativas.</a:t>
+              <a:t>La IA es muy buena ampliando opciones y generando la pregunta incómoda; es poco confiable dando cifras. Por eso cada afirmación suya se verifica o se recalcula.</a:t>
             </a:r>
             <a:endParaRPr lang="en-US" dirty="0"/>
           </a:p>
@@ -2233,7 +2236,7 @@
           <a:p>
             <a:r>
               <a:rPr lang="en-US" dirty="0"/>
-              <a:t>Las capacidades salen de los procesos clave de la ficha del cliente (Taller 0), nombradas con verbo + objeto y sin tecnología. Cada paquete de trabajo se convierte en una fase del roadmap del Taller 9.</a:t>
+              <a:t>Resto del peso repartido en partes iguales entre los otros tres criterios. Comprobación: con 62,5 % ambos suman 3,875.</a:t>
             </a:r>
             <a:endParaRPr lang="en-US" dirty="0"/>
           </a:p>
@@ -2321,7 +2324,7 @@
           <a:p>
             <a:r>
               <a:rPr lang="en-US" dirty="0"/>
-              <a:t>Nunca documentar solo beneficios: sin los riesgos, el comité aprueba sin conocer las dependencias reales y las descubre tarde.</a:t>
+              <a:t>Las reglas 3 y 4 son las que más se incumplen. La tríada letal y el patrón agéntico ya se vieron en el Taller 5 y en la guía de ArchiMate.</a:t>
             </a:r>
             <a:endParaRPr lang="en-US" dirty="0"/>
           </a:p>
@@ -2497,7 +2500,7 @@
           <a:p>
             <a:r>
               <a:rPr lang="en-US" dirty="0"/>
-              <a:t>Propuesta de tiempos (45 minutos); ajústelos a la sesión. Plantillas en el repo del Taller 7: plantilla_matriz_decision.md y plantilla_mejora_arquitectura.md.</a:t>
+              <a:t>Una decisión sin fecha ni disparador de revisión se vuelve dogma. Y una ADR buena lleva las alternativas descartadas con su razón y también las consecuencias negativas.</a:t>
             </a:r>
             <a:endParaRPr lang="en-US" dirty="0"/>
           </a:p>
@@ -2585,7 +2588,7 @@
           <a:p>
             <a:r>
               <a:rPr lang="en-US" dirty="0"/>
-              <a:t/>
+              <a:t>Las capacidades salen de los procesos clave de la ficha del cliente (Taller 0), nombradas con verbo + objeto y sin tecnología. Cada paquete de trabajo se convierte en una fase del roadmap del Taller 9.</a:t>
             </a:r>
             <a:endParaRPr lang="en-US" dirty="0"/>
           </a:p>
@@ -2609,6 +2612,270 @@
             <a:fld id="{F7021451-1387-4CA6-816F-3879F97B5CBC}" type="slidenum">
               <a:rPr lang="en-US"/>
               <a:t>21</a:t>
+            </a:fld>
+            <a:endParaRPr lang="en-US"/>
+          </a:p>
+        </p:txBody>
+      </p:sp>
+    </p:spTree>
+    <p:extLst>
+      <p:ext uri="{BB962C8B-B14F-4D97-AF65-F5344CB8AC3E}">
+        <p14:creationId xmlns:p14="http://schemas.microsoft.com/office/powerpoint/2010/main" val="1024086991"/>
+      </p:ext>
+    </p:extLst>
+  </p:cSld>
+  <p:clrMapOvr>
+    <a:masterClrMapping/>
+  </p:clrMapOvr>
+</p:notes>
+</file>
+
+<file path=ppt/notesSlides/notesSlide22.xml><?xml version="1.0" encoding="utf-8"?>
+<p:notes xmlns:a="http://schemas.openxmlformats.org/drawingml/2006/main" xmlns:r="http://schemas.openxmlformats.org/officeDocument/2006/relationships" xmlns:p="http://schemas.openxmlformats.org/presentationml/2006/main">
+  <p:cSld>
+    <p:spTree>
+      <p:nvGrpSpPr>
+        <p:cNvPr id="1" name=""/>
+        <p:cNvGrpSpPr/>
+        <p:nvPr/>
+      </p:nvGrpSpPr>
+      <p:grpSpPr>
+        <a:xfrm>
+          <a:off x="0" y="0"/>
+          <a:ext cx="0" cy="0"/>
+          <a:chOff x="0" y="0"/>
+          <a:chExt cx="0" cy="0"/>
+        </a:xfrm>
+      </p:grpSpPr>
+      <p:sp>
+        <p:nvSpPr>
+          <p:cNvPr id="2" name="Slide Image Placeholder 1"/>
+          <p:cNvSpPr>
+            <a:spLocks noGrp="1" noRot="1" noChangeAspect="1"/>
+          </p:cNvSpPr>
+          <p:nvPr>
+            <p:ph type="sldImg"/>
+          </p:nvPr>
+        </p:nvSpPr>
+        <p:spPr/>
+      </p:sp>
+      <p:sp>
+        <p:nvSpPr>
+          <p:cNvPr id="3" name="Notes Placeholder 2"/>
+          <p:cNvSpPr>
+            <a:spLocks noGrp="1"/>
+          </p:cNvSpPr>
+          <p:nvPr>
+            <p:ph type="body" idx="1"/>
+          </p:nvPr>
+        </p:nvSpPr>
+        <p:spPr/>
+        <p:txBody>
+          <a:bodyPr/>
+          <a:lstStyle/>
+          <a:p>
+            <a:r>
+              <a:rPr lang="en-US" dirty="0"/>
+              <a:t>Nunca documentar solo beneficios: sin los riesgos, el comité aprueba sin conocer las dependencias reales y las descubre tarde.</a:t>
+            </a:r>
+            <a:endParaRPr lang="en-US" dirty="0"/>
+          </a:p>
+        </p:txBody>
+      </p:sp>
+      <p:sp>
+        <p:nvSpPr>
+          <p:cNvPr id="4" name="Slide Number Placeholder 3"/>
+          <p:cNvSpPr>
+            <a:spLocks noGrp="1"/>
+          </p:cNvSpPr>
+          <p:nvPr>
+            <p:ph type="sldNum" sz="quarter" idx="10"/>
+          </p:nvPr>
+        </p:nvSpPr>
+        <p:spPr/>
+        <p:txBody>
+          <a:bodyPr/>
+          <a:lstStyle/>
+          <a:p>
+            <a:fld id="{F7021451-1387-4CA6-816F-3879F97B5CBC}" type="slidenum">
+              <a:rPr lang="en-US"/>
+              <a:t>22</a:t>
+            </a:fld>
+            <a:endParaRPr lang="en-US"/>
+          </a:p>
+        </p:txBody>
+      </p:sp>
+    </p:spTree>
+    <p:extLst>
+      <p:ext uri="{BB962C8B-B14F-4D97-AF65-F5344CB8AC3E}">
+        <p14:creationId xmlns:p14="http://schemas.microsoft.com/office/powerpoint/2010/main" val="1024086991"/>
+      </p:ext>
+    </p:extLst>
+  </p:cSld>
+  <p:clrMapOvr>
+    <a:masterClrMapping/>
+  </p:clrMapOvr>
+</p:notes>
+</file>
+
+<file path=ppt/notesSlides/notesSlide23.xml><?xml version="1.0" encoding="utf-8"?>
+<p:notes xmlns:a="http://schemas.openxmlformats.org/drawingml/2006/main" xmlns:r="http://schemas.openxmlformats.org/officeDocument/2006/relationships" xmlns:p="http://schemas.openxmlformats.org/presentationml/2006/main">
+  <p:cSld>
+    <p:spTree>
+      <p:nvGrpSpPr>
+        <p:cNvPr id="1" name=""/>
+        <p:cNvGrpSpPr/>
+        <p:nvPr/>
+      </p:nvGrpSpPr>
+      <p:grpSpPr>
+        <a:xfrm>
+          <a:off x="0" y="0"/>
+          <a:ext cx="0" cy="0"/>
+          <a:chOff x="0" y="0"/>
+          <a:chExt cx="0" cy="0"/>
+        </a:xfrm>
+      </p:grpSpPr>
+      <p:sp>
+        <p:nvSpPr>
+          <p:cNvPr id="2" name="Slide Image Placeholder 1"/>
+          <p:cNvSpPr>
+            <a:spLocks noGrp="1" noRot="1" noChangeAspect="1"/>
+          </p:cNvSpPr>
+          <p:nvPr>
+            <p:ph type="sldImg"/>
+          </p:nvPr>
+        </p:nvSpPr>
+        <p:spPr/>
+      </p:sp>
+      <p:sp>
+        <p:nvSpPr>
+          <p:cNvPr id="3" name="Notes Placeholder 2"/>
+          <p:cNvSpPr>
+            <a:spLocks noGrp="1"/>
+          </p:cNvSpPr>
+          <p:nvPr>
+            <p:ph type="body" idx="1"/>
+          </p:nvPr>
+        </p:nvSpPr>
+        <p:spPr/>
+        <p:txBody>
+          <a:bodyPr/>
+          <a:lstStyle/>
+          <a:p>
+            <a:r>
+              <a:rPr lang="en-US" dirty="0"/>
+              <a:t>Propuesta de tiempos (45 minutos); ajústelos a la sesión. Plantillas en el repo del Taller 7: plantilla_matriz_decision.md y plantilla_mejora_arquitectura.md.</a:t>
+            </a:r>
+            <a:endParaRPr lang="en-US" dirty="0"/>
+          </a:p>
+        </p:txBody>
+      </p:sp>
+      <p:sp>
+        <p:nvSpPr>
+          <p:cNvPr id="4" name="Slide Number Placeholder 3"/>
+          <p:cNvSpPr>
+            <a:spLocks noGrp="1"/>
+          </p:cNvSpPr>
+          <p:nvPr>
+            <p:ph type="sldNum" sz="quarter" idx="10"/>
+          </p:nvPr>
+        </p:nvSpPr>
+        <p:spPr/>
+        <p:txBody>
+          <a:bodyPr/>
+          <a:lstStyle/>
+          <a:p>
+            <a:fld id="{F7021451-1387-4CA6-816F-3879F97B5CBC}" type="slidenum">
+              <a:rPr lang="en-US"/>
+              <a:t>23</a:t>
+            </a:fld>
+            <a:endParaRPr lang="en-US"/>
+          </a:p>
+        </p:txBody>
+      </p:sp>
+    </p:spTree>
+    <p:extLst>
+      <p:ext uri="{BB962C8B-B14F-4D97-AF65-F5344CB8AC3E}">
+        <p14:creationId xmlns:p14="http://schemas.microsoft.com/office/powerpoint/2010/main" val="1024086991"/>
+      </p:ext>
+    </p:extLst>
+  </p:cSld>
+  <p:clrMapOvr>
+    <a:masterClrMapping/>
+  </p:clrMapOvr>
+</p:notes>
+</file>
+
+<file path=ppt/notesSlides/notesSlide24.xml><?xml version="1.0" encoding="utf-8"?>
+<p:notes xmlns:a="http://schemas.openxmlformats.org/drawingml/2006/main" xmlns:r="http://schemas.openxmlformats.org/officeDocument/2006/relationships" xmlns:p="http://schemas.openxmlformats.org/presentationml/2006/main">
+  <p:cSld>
+    <p:spTree>
+      <p:nvGrpSpPr>
+        <p:cNvPr id="1" name=""/>
+        <p:cNvGrpSpPr/>
+        <p:nvPr/>
+      </p:nvGrpSpPr>
+      <p:grpSpPr>
+        <a:xfrm>
+          <a:off x="0" y="0"/>
+          <a:ext cx="0" cy="0"/>
+          <a:chOff x="0" y="0"/>
+          <a:chExt cx="0" cy="0"/>
+        </a:xfrm>
+      </p:grpSpPr>
+      <p:sp>
+        <p:nvSpPr>
+          <p:cNvPr id="2" name="Slide Image Placeholder 1"/>
+          <p:cNvSpPr>
+            <a:spLocks noGrp="1" noRot="1" noChangeAspect="1"/>
+          </p:cNvSpPr>
+          <p:nvPr>
+            <p:ph type="sldImg"/>
+          </p:nvPr>
+        </p:nvSpPr>
+        <p:spPr/>
+      </p:sp>
+      <p:sp>
+        <p:nvSpPr>
+          <p:cNvPr id="3" name="Notes Placeholder 2"/>
+          <p:cNvSpPr>
+            <a:spLocks noGrp="1"/>
+          </p:cNvSpPr>
+          <p:nvPr>
+            <p:ph type="body" idx="1"/>
+          </p:nvPr>
+        </p:nvSpPr>
+        <p:spPr/>
+        <p:txBody>
+          <a:bodyPr/>
+          <a:lstStyle/>
+          <a:p>
+            <a:r>
+              <a:rPr lang="en-US" dirty="0"/>
+              <a:t/>
+            </a:r>
+            <a:endParaRPr lang="en-US" dirty="0"/>
+          </a:p>
+        </p:txBody>
+      </p:sp>
+      <p:sp>
+        <p:nvSpPr>
+          <p:cNvPr id="4" name="Slide Number Placeholder 3"/>
+          <p:cNvSpPr>
+            <a:spLocks noGrp="1"/>
+          </p:cNvSpPr>
+          <p:nvPr>
+            <p:ph type="sldNum" sz="quarter" idx="10"/>
+          </p:nvPr>
+        </p:nvSpPr>
+        <p:spPr/>
+        <p:txBody>
+          <a:bodyPr/>
+          <a:lstStyle/>
+          <a:p>
+            <a:fld id="{F7021451-1387-4CA6-816F-3879F97B5CBC}" type="slidenum">
+              <a:rPr lang="en-US"/>
+              <a:t>24</a:t>
             </a:fld>
             <a:endParaRPr lang="en-US"/>
           </a:p>
@@ -12285,7 +12552,7 @@
                 <a:ea typeface="Courier New" pitchFamily="34" charset="-122"/>
                 <a:cs typeface="Courier New" pitchFamily="34" charset="-120"/>
               </a:rPr>
-              <a:t>PARTE 3 · PASOS 7 Y 8 · EJEMPLO</a:t>
+              <a:t>PARTE 3 · CO-INTELIGENCIA</a:t>
             </a:r>
             <a:endParaRPr lang="en-US" sz="1000" dirty="0"/>
           </a:p>
@@ -12324,7 +12591,7 @@
                 <a:ea typeface="Calibri" pitchFamily="34" charset="-122"/>
                 <a:cs typeface="Calibri" pitchFamily="34" charset="-120"/>
               </a:rPr>
-              <a:t>Decidir, comunicar y fijar cuándo revisar</a:t>
+              <a:t>La IA propone; el equipo justifica y decide</a:t>
             </a:r>
             <a:endParaRPr lang="en-US" sz="2800" dirty="0"/>
           </a:p>
@@ -12408,246 +12675,1077 @@
           </a:p>
         </p:txBody>
       </p:sp>
-      <p:sp>
-        <p:nvSpPr>
-          <p:cNvPr id="6" name="Shape 4"/>
+      <p:graphicFrame>
+        <p:nvGraphicFramePr>
+          <p:cNvPr id="18" name="Table 0"/>
+          <p:cNvGraphicFramePr>
+            <a:graphicFrameLocks noGrp="1"/>
+          </p:cNvGraphicFramePr>
+          <p:nvPr>
+            <p:extLst>
+              <p:ext uri="{D42A27DB-BD31-4B8C-83A1-F6EECF244321}">
+                <p14:modId xmlns:p14="http://schemas.microsoft.com/office/powerpoint/2010/main" val="1579011935"/>
+              </p:ext>
+            </p:extLst>
+          </p:nvPr>
+        </p:nvGraphicFramePr>
+        <p:xfrm>
+          <a:off x="457200" y="1325880"/>
+          <a:ext cx="8229600" cy="914400"/>
+        </p:xfrm>
+        <a:graphic>
+          <a:graphicData uri="http://schemas.openxmlformats.org/drawingml/2006/table">
+            <a:tbl>
+              <a:tblPr/>
+              <a:tblGrid>
+                <a:gridCol w="1280160"/>
+                <a:gridCol w="3017520"/>
+                <a:gridCol w="3931920"/>
+              </a:tblGrid>
+              <a:tr h="365760">
+                <a:tc>
+                  <a:txBody>
+                    <a:bodyPr/>
+                    <a:lstStyle/>
+                    <a:p>
+                      <a:pPr algn="l" indent="0" marL="0">
+                        <a:buNone/>
+                      </a:pPr>
+                      <a:r>
+                        <a:rPr lang="en-US" sz="1100" b="1" dirty="0">
+                          <a:solidFill>
+                            <a:srgbClr val="FFFFFF"/>
+                          </a:solidFill>
+                          <a:latin typeface="Calibri" pitchFamily="34" charset="0"/>
+                          <a:ea typeface="Calibri" pitchFamily="34" charset="-122"/>
+                          <a:cs typeface="Calibri" pitchFamily="34" charset="-120"/>
+                        </a:rPr>
+                        <a:t>Paso</a:t>
+                      </a:r>
+                      <a:endParaRPr lang="en-US" sz="1100" dirty="0">
+                        <a:latin typeface="Calibri" charset="0"/>
+                        <a:ea typeface="Calibri" charset="0"/>
+                        <a:cs typeface="Calibri" charset="0"/>
+                      </a:endParaRPr>
+                    </a:p>
+                  </a:txBody>
+                  <a:tcPr marL="91440" marR="91440" marT="45720" marB="45720" anchor="ctr">
+                    <a:lnL w="9525" cap="flat" cmpd="sng" algn="ctr">
+                      <a:solidFill>
+                        <a:srgbClr val="C6C4B8"/>
+                      </a:solidFill>
+                      <a:prstDash val="solid"/>
+                      <a:round/>
+                      <a:headEnd type="none" w="med" len="med"/>
+                      <a:tailEnd type="none" w="med" len="med"/>
+                    </a:lnL>
+                    <a:lnR w="9525" cap="flat" cmpd="sng" algn="ctr">
+                      <a:solidFill>
+                        <a:srgbClr val="C6C4B8"/>
+                      </a:solidFill>
+                      <a:prstDash val="solid"/>
+                      <a:round/>
+                      <a:headEnd type="none" w="med" len="med"/>
+                      <a:tailEnd type="none" w="med" len="med"/>
+                    </a:lnR>
+                    <a:lnT w="9525" cap="flat" cmpd="sng" algn="ctr">
+                      <a:solidFill>
+                        <a:srgbClr val="C6C4B8"/>
+                      </a:solidFill>
+                      <a:prstDash val="solid"/>
+                      <a:round/>
+                      <a:headEnd type="none" w="med" len="med"/>
+                      <a:tailEnd type="none" w="med" len="med"/>
+                    </a:lnT>
+                    <a:lnB w="9525" cap="flat" cmpd="sng" algn="ctr">
+                      <a:solidFill>
+                        <a:srgbClr val="C6C4B8"/>
+                      </a:solidFill>
+                      <a:prstDash val="solid"/>
+                      <a:round/>
+                      <a:headEnd type="none" w="med" len="med"/>
+                      <a:tailEnd type="none" w="med" len="med"/>
+                    </a:lnB>
+                    <a:solidFill>
+                      <a:srgbClr val="16273F"/>
+                    </a:solidFill>
+                  </a:tcPr>
+                </a:tc>
+                <a:tc>
+                  <a:txBody>
+                    <a:bodyPr/>
+                    <a:lstStyle/>
+                    <a:p>
+                      <a:pPr algn="l" indent="0" marL="0">
+                        <a:buNone/>
+                      </a:pPr>
+                      <a:r>
+                        <a:rPr lang="en-US" sz="1100" b="1" dirty="0">
+                          <a:solidFill>
+                            <a:srgbClr val="FFFFFF"/>
+                          </a:solidFill>
+                          <a:latin typeface="Calibri" pitchFamily="34" charset="0"/>
+                          <a:ea typeface="Calibri" pitchFamily="34" charset="-122"/>
+                          <a:cs typeface="Calibri" pitchFamily="34" charset="-120"/>
+                        </a:rPr>
+                        <a:t>Se le pide a la IA</a:t>
+                      </a:r>
+                      <a:endParaRPr lang="en-US" sz="1100" dirty="0">
+                        <a:latin typeface="Calibri" charset="0"/>
+                        <a:ea typeface="Calibri" charset="0"/>
+                        <a:cs typeface="Calibri" charset="0"/>
+                      </a:endParaRPr>
+                    </a:p>
+                  </a:txBody>
+                  <a:tcPr marL="91440" marR="91440" marT="45720" marB="45720" anchor="ctr">
+                    <a:lnL w="9525" cap="flat" cmpd="sng" algn="ctr">
+                      <a:solidFill>
+                        <a:srgbClr val="C6C4B8"/>
+                      </a:solidFill>
+                      <a:prstDash val="solid"/>
+                      <a:round/>
+                      <a:headEnd type="none" w="med" len="med"/>
+                      <a:tailEnd type="none" w="med" len="med"/>
+                    </a:lnL>
+                    <a:lnR w="9525" cap="flat" cmpd="sng" algn="ctr">
+                      <a:solidFill>
+                        <a:srgbClr val="C6C4B8"/>
+                      </a:solidFill>
+                      <a:prstDash val="solid"/>
+                      <a:round/>
+                      <a:headEnd type="none" w="med" len="med"/>
+                      <a:tailEnd type="none" w="med" len="med"/>
+                    </a:lnR>
+                    <a:lnT w="9525" cap="flat" cmpd="sng" algn="ctr">
+                      <a:solidFill>
+                        <a:srgbClr val="C6C4B8"/>
+                      </a:solidFill>
+                      <a:prstDash val="solid"/>
+                      <a:round/>
+                      <a:headEnd type="none" w="med" len="med"/>
+                      <a:tailEnd type="none" w="med" len="med"/>
+                    </a:lnT>
+                    <a:lnB w="9525" cap="flat" cmpd="sng" algn="ctr">
+                      <a:solidFill>
+                        <a:srgbClr val="C6C4B8"/>
+                      </a:solidFill>
+                      <a:prstDash val="solid"/>
+                      <a:round/>
+                      <a:headEnd type="none" w="med" len="med"/>
+                      <a:tailEnd type="none" w="med" len="med"/>
+                    </a:lnB>
+                    <a:solidFill>
+                      <a:srgbClr val="16273F"/>
+                    </a:solidFill>
+                  </a:tcPr>
+                </a:tc>
+                <a:tc>
+                  <a:txBody>
+                    <a:bodyPr/>
+                    <a:lstStyle/>
+                    <a:p>
+                      <a:pPr algn="l" indent="0" marL="0">
+                        <a:buNone/>
+                      </a:pPr>
+                      <a:r>
+                        <a:rPr lang="en-US" sz="1100" b="1" dirty="0">
+                          <a:solidFill>
+                            <a:srgbClr val="FFFFFF"/>
+                          </a:solidFill>
+                          <a:latin typeface="Calibri" pitchFamily="34" charset="0"/>
+                          <a:ea typeface="Calibri" pitchFamily="34" charset="-122"/>
+                          <a:cs typeface="Calibri" pitchFamily="34" charset="-120"/>
+                        </a:rPr>
+                        <a:t>Lo que revisa el equipo</a:t>
+                      </a:r>
+                      <a:endParaRPr lang="en-US" sz="1100" dirty="0">
+                        <a:latin typeface="Calibri" charset="0"/>
+                        <a:ea typeface="Calibri" charset="0"/>
+                        <a:cs typeface="Calibri" charset="0"/>
+                      </a:endParaRPr>
+                    </a:p>
+                  </a:txBody>
+                  <a:tcPr marL="91440" marR="91440" marT="45720" marB="45720" anchor="ctr">
+                    <a:lnL w="9525" cap="flat" cmpd="sng" algn="ctr">
+                      <a:solidFill>
+                        <a:srgbClr val="C6C4B8"/>
+                      </a:solidFill>
+                      <a:prstDash val="solid"/>
+                      <a:round/>
+                      <a:headEnd type="none" w="med" len="med"/>
+                      <a:tailEnd type="none" w="med" len="med"/>
+                    </a:lnL>
+                    <a:lnR w="9525" cap="flat" cmpd="sng" algn="ctr">
+                      <a:solidFill>
+                        <a:srgbClr val="C6C4B8"/>
+                      </a:solidFill>
+                      <a:prstDash val="solid"/>
+                      <a:round/>
+                      <a:headEnd type="none" w="med" len="med"/>
+                      <a:tailEnd type="none" w="med" len="med"/>
+                    </a:lnR>
+                    <a:lnT w="9525" cap="flat" cmpd="sng" algn="ctr">
+                      <a:solidFill>
+                        <a:srgbClr val="C6C4B8"/>
+                      </a:solidFill>
+                      <a:prstDash val="solid"/>
+                      <a:round/>
+                      <a:headEnd type="none" w="med" len="med"/>
+                      <a:tailEnd type="none" w="med" len="med"/>
+                    </a:lnT>
+                    <a:lnB w="9525" cap="flat" cmpd="sng" algn="ctr">
+                      <a:solidFill>
+                        <a:srgbClr val="C6C4B8"/>
+                      </a:solidFill>
+                      <a:prstDash val="solid"/>
+                      <a:round/>
+                      <a:headEnd type="none" w="med" len="med"/>
+                      <a:tailEnd type="none" w="med" len="med"/>
+                    </a:lnB>
+                    <a:solidFill>
+                      <a:srgbClr val="16273F"/>
+                    </a:solidFill>
+                  </a:tcPr>
+                </a:tc>
+              </a:tr>
+              <a:tr h="594360">
+                <a:tc>
+                  <a:txBody>
+                    <a:bodyPr/>
+                    <a:lstStyle/>
+                    <a:p>
+                      <a:pPr algn="l" indent="0" marL="0">
+                        <a:buNone/>
+                      </a:pPr>
+                      <a:r>
+                        <a:rPr lang="en-US" sz="1050" b="1" dirty="0">
+                          <a:solidFill>
+                            <a:srgbClr val="3B4C5E"/>
+                          </a:solidFill>
+                          <a:latin typeface="Calibri" pitchFamily="34" charset="0"/>
+                          <a:ea typeface="Calibri" pitchFamily="34" charset="-122"/>
+                          <a:cs typeface="Calibri" pitchFamily="34" charset="-120"/>
+                        </a:rPr>
+                        <a:t>4 · Opciones</a:t>
+                      </a:r>
+                      <a:endParaRPr lang="en-US" sz="1050" dirty="0">
+                        <a:latin typeface="Calibri" charset="0"/>
+                        <a:ea typeface="Calibri" charset="0"/>
+                        <a:cs typeface="Calibri" charset="0"/>
+                      </a:endParaRPr>
+                    </a:p>
+                  </a:txBody>
+                  <a:tcPr marL="91440" marR="91440" marT="45720" marB="45720" anchor="ctr">
+                    <a:lnL w="9525" cap="flat" cmpd="sng" algn="ctr">
+                      <a:solidFill>
+                        <a:srgbClr val="C6C4B8"/>
+                      </a:solidFill>
+                      <a:prstDash val="solid"/>
+                      <a:round/>
+                      <a:headEnd type="none" w="med" len="med"/>
+                      <a:tailEnd type="none" w="med" len="med"/>
+                    </a:lnL>
+                    <a:lnR w="9525" cap="flat" cmpd="sng" algn="ctr">
+                      <a:solidFill>
+                        <a:srgbClr val="C6C4B8"/>
+                      </a:solidFill>
+                      <a:prstDash val="solid"/>
+                      <a:round/>
+                      <a:headEnd type="none" w="med" len="med"/>
+                      <a:tailEnd type="none" w="med" len="med"/>
+                    </a:lnR>
+                    <a:lnT w="9525" cap="flat" cmpd="sng" algn="ctr">
+                      <a:solidFill>
+                        <a:srgbClr val="C6C4B8"/>
+                      </a:solidFill>
+                      <a:prstDash val="solid"/>
+                      <a:round/>
+                      <a:headEnd type="none" w="med" len="med"/>
+                      <a:tailEnd type="none" w="med" len="med"/>
+                    </a:lnT>
+                    <a:lnB w="9525" cap="flat" cmpd="sng" algn="ctr">
+                      <a:solidFill>
+                        <a:srgbClr val="C6C4B8"/>
+                      </a:solidFill>
+                      <a:prstDash val="solid"/>
+                      <a:round/>
+                      <a:headEnd type="none" w="med" len="med"/>
+                      <a:tailEnd type="none" w="med" len="med"/>
+                    </a:lnB>
+                    <a:solidFill>
+                      <a:srgbClr val="FFFFFF"/>
+                    </a:solidFill>
+                  </a:tcPr>
+                </a:tc>
+                <a:tc>
+                  <a:txBody>
+                    <a:bodyPr/>
+                    <a:lstStyle/>
+                    <a:p>
+                      <a:pPr algn="l" indent="0" marL="0">
+                        <a:buNone/>
+                      </a:pPr>
+                      <a:r>
+                        <a:rPr lang="en-US" sz="1050" dirty="0">
+                          <a:solidFill>
+                            <a:srgbClr val="3B4C5E"/>
+                          </a:solidFill>
+                          <a:latin typeface="Calibri" pitchFamily="34" charset="0"/>
+                          <a:ea typeface="Calibri" pitchFamily="34" charset="-122"/>
+                          <a:cs typeface="Calibri" pitchFamily="34" charset="-120"/>
+                        </a:rPr>
+                        <a:t>Opciones adicionales, en especial una radicalmente distinta</a:t>
+                      </a:r>
+                      <a:endParaRPr lang="en-US" sz="1050" dirty="0">
+                        <a:latin typeface="Calibri" charset="0"/>
+                        <a:ea typeface="Calibri" charset="0"/>
+                        <a:cs typeface="Calibri" charset="0"/>
+                      </a:endParaRPr>
+                    </a:p>
+                  </a:txBody>
+                  <a:tcPr marL="91440" marR="91440" marT="45720" marB="45720" anchor="ctr">
+                    <a:lnL w="9525" cap="flat" cmpd="sng" algn="ctr">
+                      <a:solidFill>
+                        <a:srgbClr val="C6C4B8"/>
+                      </a:solidFill>
+                      <a:prstDash val="solid"/>
+                      <a:round/>
+                      <a:headEnd type="none" w="med" len="med"/>
+                      <a:tailEnd type="none" w="med" len="med"/>
+                    </a:lnL>
+                    <a:lnR w="9525" cap="flat" cmpd="sng" algn="ctr">
+                      <a:solidFill>
+                        <a:srgbClr val="C6C4B8"/>
+                      </a:solidFill>
+                      <a:prstDash val="solid"/>
+                      <a:round/>
+                      <a:headEnd type="none" w="med" len="med"/>
+                      <a:tailEnd type="none" w="med" len="med"/>
+                    </a:lnR>
+                    <a:lnT w="9525" cap="flat" cmpd="sng" algn="ctr">
+                      <a:solidFill>
+                        <a:srgbClr val="C6C4B8"/>
+                      </a:solidFill>
+                      <a:prstDash val="solid"/>
+                      <a:round/>
+                      <a:headEnd type="none" w="med" len="med"/>
+                      <a:tailEnd type="none" w="med" len="med"/>
+                    </a:lnT>
+                    <a:lnB w="9525" cap="flat" cmpd="sng" algn="ctr">
+                      <a:solidFill>
+                        <a:srgbClr val="C6C4B8"/>
+                      </a:solidFill>
+                      <a:prstDash val="solid"/>
+                      <a:round/>
+                      <a:headEnd type="none" w="med" len="med"/>
+                      <a:tailEnd type="none" w="med" len="med"/>
+                    </a:lnB>
+                    <a:solidFill>
+                      <a:srgbClr val="FFFFFF"/>
+                    </a:solidFill>
+                  </a:tcPr>
+                </a:tc>
+                <a:tc>
+                  <a:txBody>
+                    <a:bodyPr/>
+                    <a:lstStyle/>
+                    <a:p>
+                      <a:pPr algn="l" indent="0" marL="0">
+                        <a:buNone/>
+                      </a:pPr>
+                      <a:r>
+                        <a:rPr lang="en-US" sz="1050" dirty="0">
+                          <a:solidFill>
+                            <a:srgbClr val="3B4C5E"/>
+                          </a:solidFill>
+                          <a:latin typeface="Calibri" pitchFamily="34" charset="0"/>
+                          <a:ea typeface="Calibri" pitchFamily="34" charset="-122"/>
+                          <a:cs typeface="Calibri" pitchFamily="34" charset="-120"/>
+                        </a:rPr>
+                        <a:t>Que sean viables con presupuesto, plazo y equipo. Una idea de la IA es una hipótesis hasta verificarla con quien sabe.</a:t>
+                      </a:r>
+                      <a:endParaRPr lang="en-US" sz="1050" dirty="0">
+                        <a:latin typeface="Calibri" charset="0"/>
+                        <a:ea typeface="Calibri" charset="0"/>
+                        <a:cs typeface="Calibri" charset="0"/>
+                      </a:endParaRPr>
+                    </a:p>
+                  </a:txBody>
+                  <a:tcPr marL="91440" marR="91440" marT="45720" marB="45720" anchor="ctr">
+                    <a:lnL w="9525" cap="flat" cmpd="sng" algn="ctr">
+                      <a:solidFill>
+                        <a:srgbClr val="C6C4B8"/>
+                      </a:solidFill>
+                      <a:prstDash val="solid"/>
+                      <a:round/>
+                      <a:headEnd type="none" w="med" len="med"/>
+                      <a:tailEnd type="none" w="med" len="med"/>
+                    </a:lnL>
+                    <a:lnR w="9525" cap="flat" cmpd="sng" algn="ctr">
+                      <a:solidFill>
+                        <a:srgbClr val="C6C4B8"/>
+                      </a:solidFill>
+                      <a:prstDash val="solid"/>
+                      <a:round/>
+                      <a:headEnd type="none" w="med" len="med"/>
+                      <a:tailEnd type="none" w="med" len="med"/>
+                    </a:lnR>
+                    <a:lnT w="9525" cap="flat" cmpd="sng" algn="ctr">
+                      <a:solidFill>
+                        <a:srgbClr val="C6C4B8"/>
+                      </a:solidFill>
+                      <a:prstDash val="solid"/>
+                      <a:round/>
+                      <a:headEnd type="none" w="med" len="med"/>
+                      <a:tailEnd type="none" w="med" len="med"/>
+                    </a:lnT>
+                    <a:lnB w="9525" cap="flat" cmpd="sng" algn="ctr">
+                      <a:solidFill>
+                        <a:srgbClr val="C6C4B8"/>
+                      </a:solidFill>
+                      <a:prstDash val="solid"/>
+                      <a:round/>
+                      <a:headEnd type="none" w="med" len="med"/>
+                      <a:tailEnd type="none" w="med" len="med"/>
+                    </a:lnB>
+                    <a:solidFill>
+                      <a:srgbClr val="FFFFFF"/>
+                    </a:solidFill>
+                  </a:tcPr>
+                </a:tc>
+              </a:tr>
+              <a:tr h="594360">
+                <a:tc>
+                  <a:txBody>
+                    <a:bodyPr/>
+                    <a:lstStyle/>
+                    <a:p>
+                      <a:pPr algn="l" indent="0" marL="0">
+                        <a:buNone/>
+                      </a:pPr>
+                      <a:r>
+                        <a:rPr lang="en-US" sz="1050" b="1" dirty="0">
+                          <a:solidFill>
+                            <a:srgbClr val="3B4C5E"/>
+                          </a:solidFill>
+                          <a:latin typeface="Calibri" pitchFamily="34" charset="0"/>
+                          <a:ea typeface="Calibri" pitchFamily="34" charset="-122"/>
+                          <a:cs typeface="Calibri" pitchFamily="34" charset="-120"/>
+                        </a:rPr>
+                        <a:t>6 · Puntuar</a:t>
+                      </a:r>
+                      <a:endParaRPr lang="en-US" sz="1050" dirty="0">
+                        <a:latin typeface="Calibri" charset="0"/>
+                        <a:ea typeface="Calibri" charset="0"/>
+                        <a:cs typeface="Calibri" charset="0"/>
+                      </a:endParaRPr>
+                    </a:p>
+                  </a:txBody>
+                  <a:tcPr marL="91440" marR="91440" marT="45720" marB="45720" anchor="ctr">
+                    <a:lnL w="9525" cap="flat" cmpd="sng" algn="ctr">
+                      <a:solidFill>
+                        <a:srgbClr val="C6C4B8"/>
+                      </a:solidFill>
+                      <a:prstDash val="solid"/>
+                      <a:round/>
+                      <a:headEnd type="none" w="med" len="med"/>
+                      <a:tailEnd type="none" w="med" len="med"/>
+                    </a:lnL>
+                    <a:lnR w="9525" cap="flat" cmpd="sng" algn="ctr">
+                      <a:solidFill>
+                        <a:srgbClr val="C6C4B8"/>
+                      </a:solidFill>
+                      <a:prstDash val="solid"/>
+                      <a:round/>
+                      <a:headEnd type="none" w="med" len="med"/>
+                      <a:tailEnd type="none" w="med" len="med"/>
+                    </a:lnR>
+                    <a:lnT w="9525" cap="flat" cmpd="sng" algn="ctr">
+                      <a:solidFill>
+                        <a:srgbClr val="C6C4B8"/>
+                      </a:solidFill>
+                      <a:prstDash val="solid"/>
+                      <a:round/>
+                      <a:headEnd type="none" w="med" len="med"/>
+                      <a:tailEnd type="none" w="med" len="med"/>
+                    </a:lnT>
+                    <a:lnB w="9525" cap="flat" cmpd="sng" algn="ctr">
+                      <a:solidFill>
+                        <a:srgbClr val="C6C4B8"/>
+                      </a:solidFill>
+                      <a:prstDash val="solid"/>
+                      <a:round/>
+                      <a:headEnd type="none" w="med" len="med"/>
+                      <a:tailEnd type="none" w="med" len="med"/>
+                    </a:lnB>
+                    <a:solidFill>
+                      <a:srgbClr val="FFFFFF"/>
+                    </a:solidFill>
+                  </a:tcPr>
+                </a:tc>
+                <a:tc>
+                  <a:txBody>
+                    <a:bodyPr/>
+                    <a:lstStyle/>
+                    <a:p>
+                      <a:pPr algn="l" indent="0" marL="0">
+                        <a:buNone/>
+                      </a:pPr>
+                      <a:r>
+                        <a:rPr lang="en-US" sz="1050" dirty="0">
+                          <a:solidFill>
+                            <a:srgbClr val="3B4C5E"/>
+                          </a:solidFill>
+                          <a:latin typeface="Calibri" pitchFamily="34" charset="0"/>
+                          <a:ea typeface="Calibri" pitchFamily="34" charset="-122"/>
+                          <a:cs typeface="Calibri" pitchFamily="34" charset="-120"/>
+                        </a:rPr>
+                        <a:t>Un borrador de puntajes con su razón</a:t>
+                      </a:r>
+                      <a:endParaRPr lang="en-US" sz="1050" dirty="0">
+                        <a:latin typeface="Calibri" charset="0"/>
+                        <a:ea typeface="Calibri" charset="0"/>
+                        <a:cs typeface="Calibri" charset="0"/>
+                      </a:endParaRPr>
+                    </a:p>
+                  </a:txBody>
+                  <a:tcPr marL="91440" marR="91440" marT="45720" marB="45720" anchor="ctr">
+                    <a:lnL w="9525" cap="flat" cmpd="sng" algn="ctr">
+                      <a:solidFill>
+                        <a:srgbClr val="C6C4B8"/>
+                      </a:solidFill>
+                      <a:prstDash val="solid"/>
+                      <a:round/>
+                      <a:headEnd type="none" w="med" len="med"/>
+                      <a:tailEnd type="none" w="med" len="med"/>
+                    </a:lnL>
+                    <a:lnR w="9525" cap="flat" cmpd="sng" algn="ctr">
+                      <a:solidFill>
+                        <a:srgbClr val="C6C4B8"/>
+                      </a:solidFill>
+                      <a:prstDash val="solid"/>
+                      <a:round/>
+                      <a:headEnd type="none" w="med" len="med"/>
+                      <a:tailEnd type="none" w="med" len="med"/>
+                    </a:lnR>
+                    <a:lnT w="9525" cap="flat" cmpd="sng" algn="ctr">
+                      <a:solidFill>
+                        <a:srgbClr val="C6C4B8"/>
+                      </a:solidFill>
+                      <a:prstDash val="solid"/>
+                      <a:round/>
+                      <a:headEnd type="none" w="med" len="med"/>
+                      <a:tailEnd type="none" w="med" len="med"/>
+                    </a:lnT>
+                    <a:lnB w="9525" cap="flat" cmpd="sng" algn="ctr">
+                      <a:solidFill>
+                        <a:srgbClr val="C6C4B8"/>
+                      </a:solidFill>
+                      <a:prstDash val="solid"/>
+                      <a:round/>
+                      <a:headEnd type="none" w="med" len="med"/>
+                      <a:tailEnd type="none" w="med" len="med"/>
+                    </a:lnB>
+                    <a:solidFill>
+                      <a:srgbClr val="FFFFFF"/>
+                    </a:solidFill>
+                  </a:tcPr>
+                </a:tc>
+                <a:tc>
+                  <a:txBody>
+                    <a:bodyPr/>
+                    <a:lstStyle/>
+                    <a:p>
+                      <a:pPr algn="l" indent="0" marL="0">
+                        <a:buNone/>
+                      </a:pPr>
+                      <a:r>
+                        <a:rPr lang="en-US" sz="1050" dirty="0">
+                          <a:solidFill>
+                            <a:srgbClr val="3B4C5E"/>
+                          </a:solidFill>
+                          <a:latin typeface="Calibri" pitchFamily="34" charset="0"/>
+                          <a:ea typeface="Calibri" pitchFamily="34" charset="-122"/>
+                          <a:cs typeface="Calibri" pitchFamily="34" charset="-120"/>
+                        </a:rPr>
+                        <a:t>Cada puntaje contra la escala y los datos del paso 5. Se corrige lo que no coincida.</a:t>
+                      </a:r>
+                      <a:endParaRPr lang="en-US" sz="1050" dirty="0">
+                        <a:latin typeface="Calibri" charset="0"/>
+                        <a:ea typeface="Calibri" charset="0"/>
+                        <a:cs typeface="Calibri" charset="0"/>
+                      </a:endParaRPr>
+                    </a:p>
+                  </a:txBody>
+                  <a:tcPr marL="91440" marR="91440" marT="45720" marB="45720" anchor="ctr">
+                    <a:lnL w="9525" cap="flat" cmpd="sng" algn="ctr">
+                      <a:solidFill>
+                        <a:srgbClr val="C6C4B8"/>
+                      </a:solidFill>
+                      <a:prstDash val="solid"/>
+                      <a:round/>
+                      <a:headEnd type="none" w="med" len="med"/>
+                      <a:tailEnd type="none" w="med" len="med"/>
+                    </a:lnL>
+                    <a:lnR w="9525" cap="flat" cmpd="sng" algn="ctr">
+                      <a:solidFill>
+                        <a:srgbClr val="C6C4B8"/>
+                      </a:solidFill>
+                      <a:prstDash val="solid"/>
+                      <a:round/>
+                      <a:headEnd type="none" w="med" len="med"/>
+                      <a:tailEnd type="none" w="med" len="med"/>
+                    </a:lnR>
+                    <a:lnT w="9525" cap="flat" cmpd="sng" algn="ctr">
+                      <a:solidFill>
+                        <a:srgbClr val="C6C4B8"/>
+                      </a:solidFill>
+                      <a:prstDash val="solid"/>
+                      <a:round/>
+                      <a:headEnd type="none" w="med" len="med"/>
+                      <a:tailEnd type="none" w="med" len="med"/>
+                    </a:lnT>
+                    <a:lnB w="9525" cap="flat" cmpd="sng" algn="ctr">
+                      <a:solidFill>
+                        <a:srgbClr val="C6C4B8"/>
+                      </a:solidFill>
+                      <a:prstDash val="solid"/>
+                      <a:round/>
+                      <a:headEnd type="none" w="med" len="med"/>
+                      <a:tailEnd type="none" w="med" len="med"/>
+                    </a:lnB>
+                    <a:solidFill>
+                      <a:srgbClr val="FFFFFF"/>
+                    </a:solidFill>
+                  </a:tcPr>
+                </a:tc>
+              </a:tr>
+              <a:tr h="594360">
+                <a:tc>
+                  <a:txBody>
+                    <a:bodyPr/>
+                    <a:lstStyle/>
+                    <a:p>
+                      <a:pPr algn="l" indent="0" marL="0">
+                        <a:buNone/>
+                      </a:pPr>
+                      <a:r>
+                        <a:rPr lang="en-US" sz="1050" b="1" dirty="0">
+                          <a:solidFill>
+                            <a:srgbClr val="3B4C5E"/>
+                          </a:solidFill>
+                          <a:latin typeface="Calibri" pitchFamily="34" charset="0"/>
+                          <a:ea typeface="Calibri" pitchFamily="34" charset="-122"/>
+                          <a:cs typeface="Calibri" pitchFamily="34" charset="-120"/>
+                        </a:rPr>
+                        <a:t>7 · Decidir</a:t>
+                      </a:r>
+                      <a:endParaRPr lang="en-US" sz="1050" dirty="0">
+                        <a:latin typeface="Calibri" charset="0"/>
+                        <a:ea typeface="Calibri" charset="0"/>
+                        <a:cs typeface="Calibri" charset="0"/>
+                      </a:endParaRPr>
+                    </a:p>
+                  </a:txBody>
+                  <a:tcPr marL="91440" marR="91440" marT="45720" marB="45720" anchor="ctr">
+                    <a:lnL w="9525" cap="flat" cmpd="sng" algn="ctr">
+                      <a:solidFill>
+                        <a:srgbClr val="C6C4B8"/>
+                      </a:solidFill>
+                      <a:prstDash val="solid"/>
+                      <a:round/>
+                      <a:headEnd type="none" w="med" len="med"/>
+                      <a:tailEnd type="none" w="med" len="med"/>
+                    </a:lnL>
+                    <a:lnR w="9525" cap="flat" cmpd="sng" algn="ctr">
+                      <a:solidFill>
+                        <a:srgbClr val="C6C4B8"/>
+                      </a:solidFill>
+                      <a:prstDash val="solid"/>
+                      <a:round/>
+                      <a:headEnd type="none" w="med" len="med"/>
+                      <a:tailEnd type="none" w="med" len="med"/>
+                    </a:lnR>
+                    <a:lnT w="9525" cap="flat" cmpd="sng" algn="ctr">
+                      <a:solidFill>
+                        <a:srgbClr val="C6C4B8"/>
+                      </a:solidFill>
+                      <a:prstDash val="solid"/>
+                      <a:round/>
+                      <a:headEnd type="none" w="med" len="med"/>
+                      <a:tailEnd type="none" w="med" len="med"/>
+                    </a:lnT>
+                    <a:lnB w="9525" cap="flat" cmpd="sng" algn="ctr">
+                      <a:solidFill>
+                        <a:srgbClr val="C6C4B8"/>
+                      </a:solidFill>
+                      <a:prstDash val="solid"/>
+                      <a:round/>
+                      <a:headEnd type="none" w="med" len="med"/>
+                      <a:tailEnd type="none" w="med" len="med"/>
+                    </a:lnB>
+                    <a:solidFill>
+                      <a:srgbClr val="FFFFFF"/>
+                    </a:solidFill>
+                  </a:tcPr>
+                </a:tc>
+                <a:tc>
+                  <a:txBody>
+                    <a:bodyPr/>
+                    <a:lstStyle/>
+                    <a:p>
+                      <a:pPr algn="l" indent="0" marL="0">
+                        <a:buNone/>
+                      </a:pPr>
+                      <a:r>
+                        <a:rPr lang="en-US" sz="1050" dirty="0">
+                          <a:solidFill>
+                            <a:srgbClr val="3B4C5E"/>
+                          </a:solidFill>
+                          <a:latin typeface="Calibri" pitchFamily="34" charset="0"/>
+                          <a:ea typeface="Calibri" pitchFamily="34" charset="-122"/>
+                          <a:cs typeface="Calibri" pitchFamily="34" charset="-120"/>
+                        </a:rPr>
+                        <a:t>Que ataque la decisión: qué supuesto la invalida y con qué pesos ganaría otra opción</a:t>
+                      </a:r>
+                      <a:endParaRPr lang="en-US" sz="1050" dirty="0">
+                        <a:latin typeface="Calibri" charset="0"/>
+                        <a:ea typeface="Calibri" charset="0"/>
+                        <a:cs typeface="Calibri" charset="0"/>
+                      </a:endParaRPr>
+                    </a:p>
+                  </a:txBody>
+                  <a:tcPr marL="91440" marR="91440" marT="45720" marB="45720" anchor="ctr">
+                    <a:lnL w="9525" cap="flat" cmpd="sng" algn="ctr">
+                      <a:solidFill>
+                        <a:srgbClr val="C6C4B8"/>
+                      </a:solidFill>
+                      <a:prstDash val="solid"/>
+                      <a:round/>
+                      <a:headEnd type="none" w="med" len="med"/>
+                      <a:tailEnd type="none" w="med" len="med"/>
+                    </a:lnL>
+                    <a:lnR w="9525" cap="flat" cmpd="sng" algn="ctr">
+                      <a:solidFill>
+                        <a:srgbClr val="C6C4B8"/>
+                      </a:solidFill>
+                      <a:prstDash val="solid"/>
+                      <a:round/>
+                      <a:headEnd type="none" w="med" len="med"/>
+                      <a:tailEnd type="none" w="med" len="med"/>
+                    </a:lnR>
+                    <a:lnT w="9525" cap="flat" cmpd="sng" algn="ctr">
+                      <a:solidFill>
+                        <a:srgbClr val="C6C4B8"/>
+                      </a:solidFill>
+                      <a:prstDash val="solid"/>
+                      <a:round/>
+                      <a:headEnd type="none" w="med" len="med"/>
+                      <a:tailEnd type="none" w="med" len="med"/>
+                    </a:lnT>
+                    <a:lnB w="9525" cap="flat" cmpd="sng" algn="ctr">
+                      <a:solidFill>
+                        <a:srgbClr val="C6C4B8"/>
+                      </a:solidFill>
+                      <a:prstDash val="solid"/>
+                      <a:round/>
+                      <a:headEnd type="none" w="med" len="med"/>
+                      <a:tailEnd type="none" w="med" len="med"/>
+                    </a:lnB>
+                    <a:solidFill>
+                      <a:srgbClr val="FFFFFF"/>
+                    </a:solidFill>
+                  </a:tcPr>
+                </a:tc>
+                <a:tc>
+                  <a:txBody>
+                    <a:bodyPr/>
+                    <a:lstStyle/>
+                    <a:p>
+                      <a:pPr algn="l" indent="0" marL="0">
+                        <a:buNone/>
+                      </a:pPr>
+                      <a:r>
+                        <a:rPr lang="en-US" sz="1050" dirty="0">
+                          <a:solidFill>
+                            <a:srgbClr val="3B4C5E"/>
+                          </a:solidFill>
+                          <a:latin typeface="Calibri" pitchFamily="34" charset="0"/>
+                          <a:ea typeface="Calibri" pitchFamily="34" charset="-122"/>
+                          <a:cs typeface="Calibri" pitchFamily="34" charset="-120"/>
+                        </a:rPr>
+                        <a:t>Que lo que afirma se recalcule: sus cifras y conclusiones pueden ser incorrectas.</a:t>
+                      </a:r>
+                      <a:endParaRPr lang="en-US" sz="1050" dirty="0">
+                        <a:latin typeface="Calibri" charset="0"/>
+                        <a:ea typeface="Calibri" charset="0"/>
+                        <a:cs typeface="Calibri" charset="0"/>
+                      </a:endParaRPr>
+                    </a:p>
+                  </a:txBody>
+                  <a:tcPr marL="91440" marR="91440" marT="45720" marB="45720" anchor="ctr">
+                    <a:lnL w="9525" cap="flat" cmpd="sng" algn="ctr">
+                      <a:solidFill>
+                        <a:srgbClr val="C6C4B8"/>
+                      </a:solidFill>
+                      <a:prstDash val="solid"/>
+                      <a:round/>
+                      <a:headEnd type="none" w="med" len="med"/>
+                      <a:tailEnd type="none" w="med" len="med"/>
+                    </a:lnL>
+                    <a:lnR w="9525" cap="flat" cmpd="sng" algn="ctr">
+                      <a:solidFill>
+                        <a:srgbClr val="C6C4B8"/>
+                      </a:solidFill>
+                      <a:prstDash val="solid"/>
+                      <a:round/>
+                      <a:headEnd type="none" w="med" len="med"/>
+                      <a:tailEnd type="none" w="med" len="med"/>
+                    </a:lnR>
+                    <a:lnT w="9525" cap="flat" cmpd="sng" algn="ctr">
+                      <a:solidFill>
+                        <a:srgbClr val="C6C4B8"/>
+                      </a:solidFill>
+                      <a:prstDash val="solid"/>
+                      <a:round/>
+                      <a:headEnd type="none" w="med" len="med"/>
+                      <a:tailEnd type="none" w="med" len="med"/>
+                    </a:lnT>
+                    <a:lnB w="9525" cap="flat" cmpd="sng" algn="ctr">
+                      <a:solidFill>
+                        <a:srgbClr val="C6C4B8"/>
+                      </a:solidFill>
+                      <a:prstDash val="solid"/>
+                      <a:round/>
+                      <a:headEnd type="none" w="med" len="med"/>
+                      <a:tailEnd type="none" w="med" len="med"/>
+                    </a:lnB>
+                    <a:solidFill>
+                      <a:srgbClr val="FFFFFF"/>
+                    </a:solidFill>
+                  </a:tcPr>
+                </a:tc>
+              </a:tr>
+              <a:tr h="594360">
+                <a:tc>
+                  <a:txBody>
+                    <a:bodyPr/>
+                    <a:lstStyle/>
+                    <a:p>
+                      <a:pPr algn="l" indent="0" marL="0">
+                        <a:buNone/>
+                      </a:pPr>
+                      <a:r>
+                        <a:rPr lang="en-US" sz="1050" b="1" dirty="0">
+                          <a:solidFill>
+                            <a:srgbClr val="3B4C5E"/>
+                          </a:solidFill>
+                          <a:latin typeface="Calibri" pitchFamily="34" charset="0"/>
+                          <a:ea typeface="Calibri" pitchFamily="34" charset="-122"/>
+                          <a:cs typeface="Calibri" pitchFamily="34" charset="-120"/>
+                        </a:rPr>
+                        <a:t>Registro</a:t>
+                      </a:r>
+                      <a:endParaRPr lang="en-US" sz="1050" dirty="0">
+                        <a:latin typeface="Calibri" charset="0"/>
+                        <a:ea typeface="Calibri" charset="0"/>
+                        <a:cs typeface="Calibri" charset="0"/>
+                      </a:endParaRPr>
+                    </a:p>
+                  </a:txBody>
+                  <a:tcPr marL="91440" marR="91440" marT="45720" marB="45720" anchor="ctr">
+                    <a:lnL w="9525" cap="flat" cmpd="sng" algn="ctr">
+                      <a:solidFill>
+                        <a:srgbClr val="C6C4B8"/>
+                      </a:solidFill>
+                      <a:prstDash val="solid"/>
+                      <a:round/>
+                      <a:headEnd type="none" w="med" len="med"/>
+                      <a:tailEnd type="none" w="med" len="med"/>
+                    </a:lnL>
+                    <a:lnR w="9525" cap="flat" cmpd="sng" algn="ctr">
+                      <a:solidFill>
+                        <a:srgbClr val="C6C4B8"/>
+                      </a:solidFill>
+                      <a:prstDash val="solid"/>
+                      <a:round/>
+                      <a:headEnd type="none" w="med" len="med"/>
+                      <a:tailEnd type="none" w="med" len="med"/>
+                    </a:lnR>
+                    <a:lnT w="9525" cap="flat" cmpd="sng" algn="ctr">
+                      <a:solidFill>
+                        <a:srgbClr val="C6C4B8"/>
+                      </a:solidFill>
+                      <a:prstDash val="solid"/>
+                      <a:round/>
+                      <a:headEnd type="none" w="med" len="med"/>
+                      <a:tailEnd type="none" w="med" len="med"/>
+                    </a:lnT>
+                    <a:lnB w="9525" cap="flat" cmpd="sng" algn="ctr">
+                      <a:solidFill>
+                        <a:srgbClr val="C6C4B8"/>
+                      </a:solidFill>
+                      <a:prstDash val="solid"/>
+                      <a:round/>
+                      <a:headEnd type="none" w="med" len="med"/>
+                      <a:tailEnd type="none" w="med" len="med"/>
+                    </a:lnB>
+                    <a:solidFill>
+                      <a:srgbClr val="FFFFFF"/>
+                    </a:solidFill>
+                  </a:tcPr>
+                </a:tc>
+                <a:tc>
+                  <a:txBody>
+                    <a:bodyPr/>
+                    <a:lstStyle/>
+                    <a:p>
+                      <a:pPr algn="l" indent="0" marL="0">
+                        <a:buNone/>
+                      </a:pPr>
+                      <a:r>
+                        <a:rPr lang="en-US" sz="1050" dirty="0">
+                          <a:solidFill>
+                            <a:srgbClr val="3B4C5E"/>
+                          </a:solidFill>
+                          <a:latin typeface="Calibri" pitchFamily="34" charset="0"/>
+                          <a:ea typeface="Calibri" pitchFamily="34" charset="-122"/>
+                          <a:cs typeface="Calibri" pitchFamily="34" charset="-120"/>
+                        </a:rPr>
+                        <a:t>Un borrador de la ADR</a:t>
+                      </a:r>
+                      <a:endParaRPr lang="en-US" sz="1050" dirty="0">
+                        <a:latin typeface="Calibri" charset="0"/>
+                        <a:ea typeface="Calibri" charset="0"/>
+                        <a:cs typeface="Calibri" charset="0"/>
+                      </a:endParaRPr>
+                    </a:p>
+                  </a:txBody>
+                  <a:tcPr marL="91440" marR="91440" marT="45720" marB="45720" anchor="ctr">
+                    <a:lnL w="9525" cap="flat" cmpd="sng" algn="ctr">
+                      <a:solidFill>
+                        <a:srgbClr val="C6C4B8"/>
+                      </a:solidFill>
+                      <a:prstDash val="solid"/>
+                      <a:round/>
+                      <a:headEnd type="none" w="med" len="med"/>
+                      <a:tailEnd type="none" w="med" len="med"/>
+                    </a:lnL>
+                    <a:lnR w="9525" cap="flat" cmpd="sng" algn="ctr">
+                      <a:solidFill>
+                        <a:srgbClr val="C6C4B8"/>
+                      </a:solidFill>
+                      <a:prstDash val="solid"/>
+                      <a:round/>
+                      <a:headEnd type="none" w="med" len="med"/>
+                      <a:tailEnd type="none" w="med" len="med"/>
+                    </a:lnR>
+                    <a:lnT w="9525" cap="flat" cmpd="sng" algn="ctr">
+                      <a:solidFill>
+                        <a:srgbClr val="C6C4B8"/>
+                      </a:solidFill>
+                      <a:prstDash val="solid"/>
+                      <a:round/>
+                      <a:headEnd type="none" w="med" len="med"/>
+                      <a:tailEnd type="none" w="med" len="med"/>
+                    </a:lnT>
+                    <a:lnB w="9525" cap="flat" cmpd="sng" algn="ctr">
+                      <a:solidFill>
+                        <a:srgbClr val="C6C4B8"/>
+                      </a:solidFill>
+                      <a:prstDash val="solid"/>
+                      <a:round/>
+                      <a:headEnd type="none" w="med" len="med"/>
+                      <a:tailEnd type="none" w="med" len="med"/>
+                    </a:lnB>
+                    <a:solidFill>
+                      <a:srgbClr val="FFFFFF"/>
+                    </a:solidFill>
+                  </a:tcPr>
+                </a:tc>
+                <a:tc>
+                  <a:txBody>
+                    <a:bodyPr/>
+                    <a:lstStyle/>
+                    <a:p>
+                      <a:pPr algn="l" indent="0" marL="0">
+                        <a:buNone/>
+                      </a:pPr>
+                      <a:r>
+                        <a:rPr lang="en-US" sz="1050" dirty="0">
+                          <a:solidFill>
+                            <a:srgbClr val="3B4C5E"/>
+                          </a:solidFill>
+                          <a:latin typeface="Calibri" pitchFamily="34" charset="0"/>
+                          <a:ea typeface="Calibri" pitchFamily="34" charset="-122"/>
+                          <a:cs typeface="Calibri" pitchFamily="34" charset="-120"/>
+                        </a:rPr>
+                        <a:t>Alternativas descartadas con su razón, consecuencias negativas y ningún dato inventado.</a:t>
+                      </a:r>
+                      <a:endParaRPr lang="en-US" sz="1050" dirty="0">
+                        <a:latin typeface="Calibri" charset="0"/>
+                        <a:ea typeface="Calibri" charset="0"/>
+                        <a:cs typeface="Calibri" charset="0"/>
+                      </a:endParaRPr>
+                    </a:p>
+                  </a:txBody>
+                  <a:tcPr marL="91440" marR="91440" marT="45720" marB="45720" anchor="ctr">
+                    <a:lnL w="9525" cap="flat" cmpd="sng" algn="ctr">
+                      <a:solidFill>
+                        <a:srgbClr val="C6C4B8"/>
+                      </a:solidFill>
+                      <a:prstDash val="solid"/>
+                      <a:round/>
+                      <a:headEnd type="none" w="med" len="med"/>
+                      <a:tailEnd type="none" w="med" len="med"/>
+                    </a:lnL>
+                    <a:lnR w="9525" cap="flat" cmpd="sng" algn="ctr">
+                      <a:solidFill>
+                        <a:srgbClr val="C6C4B8"/>
+                      </a:solidFill>
+                      <a:prstDash val="solid"/>
+                      <a:round/>
+                      <a:headEnd type="none" w="med" len="med"/>
+                      <a:tailEnd type="none" w="med" len="med"/>
+                    </a:lnR>
+                    <a:lnT w="9525" cap="flat" cmpd="sng" algn="ctr">
+                      <a:solidFill>
+                        <a:srgbClr val="C6C4B8"/>
+                      </a:solidFill>
+                      <a:prstDash val="solid"/>
+                      <a:round/>
+                      <a:headEnd type="none" w="med" len="med"/>
+                      <a:tailEnd type="none" w="med" len="med"/>
+                    </a:lnT>
+                    <a:lnB w="9525" cap="flat" cmpd="sng" algn="ctr">
+                      <a:solidFill>
+                        <a:srgbClr val="C6C4B8"/>
+                      </a:solidFill>
+                      <a:prstDash val="solid"/>
+                      <a:round/>
+                      <a:headEnd type="none" w="med" len="med"/>
+                      <a:tailEnd type="none" w="med" len="med"/>
+                    </a:lnB>
+                    <a:solidFill>
+                      <a:srgbClr val="FFFFFF"/>
+                    </a:solidFill>
+                  </a:tcPr>
+                </a:tc>
+              </a:tr>
+            </a:tbl>
+          </a:graphicData>
+        </a:graphic>
+      </p:graphicFrame>
+      <p:sp>
+        <p:nvSpPr>
+          <p:cNvPr id="7" name="Shape 4"/>
           <p:cNvSpPr/>
           <p:nvPr/>
         </p:nvSpPr>
         <p:spPr>
           <a:xfrm>
-            <a:off x="457200" y="1371600"/>
-            <a:ext cx="8229600" cy="1691640"/>
-          </a:xfrm>
-          <a:prstGeom prst="rect">
-            <a:avLst/>
-          </a:prstGeom>
-          <a:solidFill>
-            <a:srgbClr val="DCE6ED"/>
-          </a:solidFill>
-          <a:ln w="12700">
-            <a:solidFill>
-              <a:srgbClr val="DCE6ED"/>
-            </a:solidFill>
-            <a:prstDash val="solid"/>
-          </a:ln>
-        </p:spPr>
-      </p:sp>
-      <p:sp>
-        <p:nvSpPr>
-          <p:cNvPr id="7" name="Text 5"/>
-          <p:cNvSpPr txBox="1"/>
-          <p:nvPr/>
-        </p:nvSpPr>
-        <p:spPr>
-          <a:xfrm>
-            <a:off x="640080" y="1417320"/>
-            <a:ext cx="7863840" cy="1600200"/>
-          </a:xfrm>
-          <a:prstGeom prst="rect">
-            <a:avLst/>
-          </a:prstGeom>
-          <a:noFill/>
-          <a:ln/>
-        </p:spPr>
-        <p:txBody>
-          <a:bodyPr wrap="square" lIns="0" tIns="0" rIns="0" bIns="0" rtlCol="0" anchor="ctr"/>
-          <a:lstStyle/>
-          <a:p>
-            <a:pPr indent="0" marL="0">
-              <a:buNone/>
-            </a:pPr>
-            <a:r>
-              <a:rPr lang="en-US" sz="1000" b="1" dirty="0">
-                <a:solidFill>
-                  <a:srgbClr val="B4552B"/>
-                </a:solidFill>
-                <a:latin typeface="Courier New" pitchFamily="34" charset="0"/>
-                <a:ea typeface="Courier New" pitchFamily="34" charset="-122"/>
-                <a:cs typeface="Courier New" pitchFamily="34" charset="-120"/>
-              </a:rPr>
-              <a:t>DECISIÓN  </a:t>
-            </a:r>
-            <a:pPr indent="0" marL="0">
-              <a:spcAft>
-                <a:spcPts val="500"/>
-              </a:spcAft>
-              <a:buNone/>
-            </a:pPr>
-            <a:r>
-              <a:rPr lang="en-US" sz="1250" b="1" dirty="0">
-                <a:solidFill>
-                  <a:srgbClr val="16273F"/>
-                </a:solidFill>
-                <a:latin typeface="Calibri" pitchFamily="34" charset="0"/>
-                <a:ea typeface="Calibri" pitchFamily="34" charset="-122"/>
-                <a:cs typeface="Calibri" pitchFamily="34" charset="-120"/>
-              </a:rPr>
-              <a:t>Implementar un balanceador activo-pasivo con failover automático (opción A).</a:t>
-            </a:r>
-            <a:endParaRPr lang="en-US" sz="1250" dirty="0"/>
-          </a:p>
-          <a:p>
-            <a:pPr indent="0" marL="0">
-              <a:buNone/>
-            </a:pPr>
-            <a:r>
-              <a:rPr lang="en-US" sz="1000" b="1" dirty="0">
-                <a:solidFill>
-                  <a:srgbClr val="B4552B"/>
-                </a:solidFill>
-                <a:latin typeface="Courier New" pitchFamily="34" charset="0"/>
-                <a:ea typeface="Courier New" pitchFamily="34" charset="-122"/>
-                <a:cs typeface="Courier New" pitchFamily="34" charset="-120"/>
-              </a:rPr>
-              <a:t>TRADE-OFF  </a:t>
-            </a:r>
-            <a:pPr indent="0" marL="0">
-              <a:spcAft>
-                <a:spcPts val="500"/>
-              </a:spcAft>
-              <a:buNone/>
-            </a:pPr>
-            <a:r>
-              <a:rPr lang="en-US" sz="1250" dirty="0">
-                <a:solidFill>
-                  <a:srgbClr val="3B4C5E"/>
-                </a:solidFill>
-                <a:latin typeface="Calibri" pitchFamily="34" charset="0"/>
-                <a:ea typeface="Calibri" pitchFamily="34" charset="-122"/>
-                <a:cs typeface="Calibri" pitchFamily="34" charset="-120"/>
-              </a:rPr>
-              <a:t>Se sacrifica la conmutación instantánea (ventana de 30-60 s) a cambio de menor costo y complejidad que el activo-activo.</a:t>
-            </a:r>
-            <a:endParaRPr lang="en-US" sz="1250" dirty="0"/>
-          </a:p>
-          <a:p>
-            <a:pPr indent="0" marL="0">
-              <a:buNone/>
-            </a:pPr>
-            <a:r>
-              <a:rPr lang="en-US" sz="1000" b="1" dirty="0">
-                <a:solidFill>
-                  <a:srgbClr val="B4552B"/>
-                </a:solidFill>
-                <a:latin typeface="Courier New" pitchFamily="34" charset="0"/>
-                <a:ea typeface="Courier New" pitchFamily="34" charset="-122"/>
-                <a:cs typeface="Courier New" pitchFamily="34" charset="-120"/>
-              </a:rPr>
-              <a:t>DESCARTADAS  </a:t>
-            </a:r>
-            <a:pPr indent="0" marL="0">
-              <a:buNone/>
-            </a:pPr>
-            <a:r>
-              <a:rPr lang="en-US" sz="1250" dirty="0">
-                <a:solidFill>
-                  <a:srgbClr val="3B4C5E"/>
-                </a:solidFill>
-                <a:latin typeface="Calibri" pitchFamily="34" charset="0"/>
-                <a:ea typeface="Calibri" pitchFamily="34" charset="-122"/>
-                <a:cs typeface="Calibri" pitchFamily="34" charset="-120"/>
-              </a:rPr>
-              <a:t>B, por costo (+USD 1.100/mes) y por no llegar a la campaña. C, por no eliminar el punto único de falla.</a:t>
-            </a:r>
-            <a:endParaRPr lang="en-US" sz="1250" dirty="0"/>
-          </a:p>
-        </p:txBody>
-      </p:sp>
-      <p:sp>
-        <p:nvSpPr>
-          <p:cNvPr id="8" name="Shape 6"/>
-          <p:cNvSpPr/>
-          <p:nvPr/>
-        </p:nvSpPr>
-        <p:spPr>
-          <a:xfrm>
-            <a:off x="457200" y="3246120"/>
-            <a:ext cx="4023360" cy="1280160"/>
-          </a:xfrm>
-          <a:prstGeom prst="rect">
-            <a:avLst/>
-          </a:prstGeom>
-          <a:solidFill>
-            <a:srgbClr val="F3F6F8"/>
-          </a:solidFill>
-          <a:ln w="9525">
-            <a:solidFill>
-              <a:srgbClr val="C6C4B8"/>
-            </a:solidFill>
-            <a:prstDash val="solid"/>
-          </a:ln>
-        </p:spPr>
-      </p:sp>
-      <p:sp>
-        <p:nvSpPr>
-          <p:cNvPr id="9" name="Text 7"/>
-          <p:cNvSpPr txBox="1"/>
-          <p:nvPr/>
-        </p:nvSpPr>
-        <p:spPr>
-          <a:xfrm>
-            <a:off x="594360" y="3310128"/>
-            <a:ext cx="3749040" cy="1170432"/>
-          </a:xfrm>
-          <a:prstGeom prst="rect">
-            <a:avLst/>
-          </a:prstGeom>
-          <a:noFill/>
-          <a:ln/>
-        </p:spPr>
-        <p:txBody>
-          <a:bodyPr wrap="square" lIns="0" tIns="0" rIns="0" bIns="0" rtlCol="0" anchor="t"/>
-          <a:lstStyle/>
-          <a:p>
-            <a:pPr indent="0" marL="0">
-              <a:spcAft>
-                <a:spcPts val="300"/>
-              </a:spcAft>
-              <a:buNone/>
-            </a:pPr>
-            <a:r>
-              <a:rPr lang="en-US" sz="1300" b="1" dirty="0">
-                <a:solidFill>
-                  <a:srgbClr val="16273F"/>
-                </a:solidFill>
-                <a:latin typeface="Calibri" pitchFamily="34" charset="0"/>
-                <a:ea typeface="Calibri" pitchFamily="34" charset="-122"/>
-                <a:cs typeface="Calibri" pitchFamily="34" charset="-120"/>
-              </a:rPr>
-              <a:t>Paso 8 · Reevaluar</a:t>
-            </a:r>
-            <a:endParaRPr lang="en-US" sz="1300" dirty="0"/>
-          </a:p>
-          <a:p>
-            <a:pPr indent="0" marL="0">
-              <a:buNone/>
-            </a:pPr>
-            <a:r>
-              <a:rPr lang="en-US" sz="1150" dirty="0">
-                <a:solidFill>
-                  <a:srgbClr val="3B4C5E"/>
-                </a:solidFill>
-                <a:latin typeface="Calibri" pitchFamily="34" charset="0"/>
-                <a:ea typeface="Calibri" pitchFamily="34" charset="-122"/>
-                <a:cs typeface="Calibri" pitchFamily="34" charset="-120"/>
-              </a:rPr>
-              <a:t>Revisar después de la campaña de fin de año, o antes si el tráfico crece 30 % sobre el pico. Si eso ocurre, reconsiderar B.</a:t>
-            </a:r>
-            <a:endParaRPr lang="en-US" sz="1300" dirty="0"/>
-          </a:p>
-        </p:txBody>
-      </p:sp>
-      <p:sp>
-        <p:nvSpPr>
-          <p:cNvPr id="10" name="Shape 8"/>
-          <p:cNvSpPr/>
-          <p:nvPr/>
-        </p:nvSpPr>
-        <p:spPr>
-          <a:xfrm>
-            <a:off x="4663440" y="3246120"/>
-            <a:ext cx="4023360" cy="1280160"/>
+            <a:off x="457200" y="4206240"/>
+            <a:ext cx="8229600" cy="457200"/>
           </a:xfrm>
           <a:prstGeom prst="rect">
             <a:avLst/>
@@ -12665,14 +13763,14 @@
       </p:sp>
       <p:sp>
         <p:nvSpPr>
-          <p:cNvPr id="11" name="Text 9"/>
+          <p:cNvPr id="8" name="Text 5"/>
           <p:cNvSpPr txBox="1"/>
           <p:nvPr/>
         </p:nvSpPr>
         <p:spPr>
           <a:xfrm>
-            <a:off x="4800600" y="3310128"/>
-            <a:ext cx="3749040" cy="1170432"/>
+            <a:off x="640080" y="4206240"/>
+            <a:ext cx="7863840" cy="457200"/>
           </a:xfrm>
           <a:prstGeom prst="rect">
             <a:avLst/>
@@ -12681,13 +13779,10 @@
           <a:ln/>
         </p:spPr>
         <p:txBody>
-          <a:bodyPr wrap="square" lIns="0" tIns="0" rIns="0" bIns="0" rtlCol="0" anchor="t"/>
+          <a:bodyPr wrap="square" lIns="0" tIns="0" rIns="0" bIns="0" rtlCol="0" anchor="ctr"/>
           <a:lstStyle/>
           <a:p>
             <a:pPr indent="0" marL="0">
-              <a:spcAft>
-                <a:spcPts val="300"/>
-              </a:spcAft>
               <a:buNone/>
             </a:pPr>
             <a:r>
@@ -12699,24 +13794,7 @@
                 <a:ea typeface="Calibri" pitchFamily="34" charset="-122"/>
                 <a:cs typeface="Calibri" pitchFamily="34" charset="-120"/>
               </a:rPr>
-              <a:t>Esto ya es una ADR en borrador</a:t>
-            </a:r>
-            <a:endParaRPr lang="en-US" sz="1300" dirty="0"/>
-          </a:p>
-          <a:p>
-            <a:pPr indent="0" marL="0">
-              <a:buNone/>
-            </a:pPr>
-            <a:r>
-              <a:rPr lang="en-US" sz="1150" dirty="0">
-                <a:solidFill>
-                  <a:srgbClr val="CADCFC"/>
-                </a:solidFill>
-                <a:latin typeface="Calibri" pitchFamily="34" charset="0"/>
-                <a:ea typeface="Calibri" pitchFamily="34" charset="-122"/>
-                <a:cs typeface="Calibri" pitchFamily="34" charset="-120"/>
-              </a:rPr>
-              <a:t>Contexto, alternativas descartadas, decisión y consecuencias. En el Taller 9 se formaliza su registro.</a:t>
+              <a:t>Puntúe primero usted y compare después con la IA: así evita el anclaje al número que llegó primero.</a:t>
             </a:r>
             <a:endParaRPr lang="en-US" sz="1300" dirty="0"/>
           </a:p>
@@ -12787,7 +13865,7 @@
                 <a:ea typeface="Courier New" pitchFamily="34" charset="-122"/>
                 <a:cs typeface="Courier New" pitchFamily="34" charset="-120"/>
               </a:rPr>
-              <a:t>PARTE 4 · DEL NEGOCIO AL TRABAJO</a:t>
+              <a:t>PARTE 3 · CO-INTELIGENCIA · EJEMPLO</a:t>
             </a:r>
             <a:endParaRPr lang="en-US" sz="1000" dirty="0"/>
           </a:p>
@@ -12826,7 +13904,7 @@
                 <a:ea typeface="Calibri" pitchFamily="34" charset="-122"/>
                 <a:cs typeface="Calibri" pitchFamily="34" charset="-120"/>
               </a:rPr>
-              <a:t>Agrupar las brechas por capacidad</a:t>
+              <a:t>La IA dijo… y el equipo recalculó</a:t>
             </a:r>
             <a:endParaRPr lang="en-US" sz="2800" dirty="0"/>
           </a:p>
@@ -12910,9 +13988,4138 @@
           </a:p>
         </p:txBody>
       </p:sp>
+      <p:sp>
+        <p:nvSpPr>
+          <p:cNvPr id="6" name="Shape 4"/>
+          <p:cNvSpPr/>
+          <p:nvPr/>
+        </p:nvSpPr>
+        <p:spPr>
+          <a:xfrm>
+            <a:off x="457200" y="1325880"/>
+            <a:ext cx="3566160" cy="1188720"/>
+          </a:xfrm>
+          <a:prstGeom prst="rect">
+            <a:avLst/>
+          </a:prstGeom>
+          <a:solidFill>
+            <a:srgbClr val="F6E4DB"/>
+          </a:solidFill>
+          <a:ln w="12700">
+            <a:solidFill>
+              <a:srgbClr val="F6E4DB"/>
+            </a:solidFill>
+            <a:prstDash val="solid"/>
+          </a:ln>
+        </p:spPr>
+      </p:sp>
+      <p:sp>
+        <p:nvSpPr>
+          <p:cNvPr id="7" name="Text 5"/>
+          <p:cNvSpPr txBox="1"/>
+          <p:nvPr/>
+        </p:nvSpPr>
+        <p:spPr>
+          <a:xfrm>
+            <a:off x="594360" y="1371600"/>
+            <a:ext cx="3291840" cy="1097280"/>
+          </a:xfrm>
+          <a:prstGeom prst="rect">
+            <a:avLst/>
+          </a:prstGeom>
+          <a:noFill/>
+          <a:ln/>
+        </p:spPr>
+        <p:txBody>
+          <a:bodyPr wrap="square" lIns="0" tIns="0" rIns="0" bIns="0" rtlCol="0" anchor="t"/>
+          <a:lstStyle/>
+          <a:p>
+            <a:pPr indent="0" marL="0">
+              <a:spcAft>
+                <a:spcPts val="400"/>
+              </a:spcAft>
+              <a:buNone/>
+            </a:pPr>
+            <a:r>
+              <a:rPr lang="en-US" sz="950" b="1" dirty="0">
+                <a:solidFill>
+                  <a:srgbClr val="B4552B"/>
+                </a:solidFill>
+                <a:latin typeface="Courier New" pitchFamily="34" charset="0"/>
+                <a:ea typeface="Courier New" pitchFamily="34" charset="-122"/>
+                <a:cs typeface="Courier New" pitchFamily="34" charset="-120"/>
+              </a:rPr>
+              <a:t>LA IA AFIRMÓ</a:t>
+            </a:r>
+            <a:endParaRPr lang="en-US" sz="950" dirty="0"/>
+          </a:p>
+          <a:p>
+            <a:pPr indent="0" marL="0">
+              <a:buNone/>
+            </a:pPr>
+            <a:r>
+              <a:rPr lang="en-US" sz="1300" i="1" dirty="0">
+                <a:solidFill>
+                  <a:srgbClr val="16273F"/>
+                </a:solidFill>
+                <a:latin typeface="Calibri" pitchFamily="34" charset="0"/>
+                <a:ea typeface="Calibri" pitchFamily="34" charset="-122"/>
+                <a:cs typeface="Calibri" pitchFamily="34" charset="-120"/>
+              </a:rPr>
+              <a:t>«Si la disponibilidad pesara 50 %, ganaría la opción B (activo-activo).»</a:t>
+            </a:r>
+            <a:endParaRPr lang="en-US" sz="950" dirty="0"/>
+          </a:p>
+        </p:txBody>
+      </p:sp>
+      <p:sp>
+        <p:nvSpPr>
+          <p:cNvPr id="8" name="Shape 6"/>
+          <p:cNvSpPr/>
+          <p:nvPr/>
+        </p:nvSpPr>
+        <p:spPr>
+          <a:xfrm>
+            <a:off x="457200" y="2697480"/>
+            <a:ext cx="3566160" cy="1371600"/>
+          </a:xfrm>
+          <a:prstGeom prst="rect">
+            <a:avLst/>
+          </a:prstGeom>
+          <a:solidFill>
+            <a:srgbClr val="DDEFE6"/>
+          </a:solidFill>
+          <a:ln w="12700">
+            <a:solidFill>
+              <a:srgbClr val="DDEFE6"/>
+            </a:solidFill>
+            <a:prstDash val="solid"/>
+          </a:ln>
+        </p:spPr>
+      </p:sp>
+      <p:sp>
+        <p:nvSpPr>
+          <p:cNvPr id="9" name="Text 7"/>
+          <p:cNvSpPr txBox="1"/>
+          <p:nvPr/>
+        </p:nvSpPr>
+        <p:spPr>
+          <a:xfrm>
+            <a:off x="594360" y="2743200"/>
+            <a:ext cx="3291840" cy="1280160"/>
+          </a:xfrm>
+          <a:prstGeom prst="rect">
+            <a:avLst/>
+          </a:prstGeom>
+          <a:noFill/>
+          <a:ln/>
+        </p:spPr>
+        <p:txBody>
+          <a:bodyPr wrap="square" lIns="0" tIns="0" rIns="0" bIns="0" rtlCol="0" anchor="t"/>
+          <a:lstStyle/>
+          <a:p>
+            <a:pPr indent="0" marL="0">
+              <a:spcAft>
+                <a:spcPts val="400"/>
+              </a:spcAft>
+              <a:buNone/>
+            </a:pPr>
+            <a:r>
+              <a:rPr lang="en-US" sz="950" b="1" dirty="0">
+                <a:solidFill>
+                  <a:srgbClr val="1C7150"/>
+                </a:solidFill>
+                <a:latin typeface="Courier New" pitchFamily="34" charset="0"/>
+                <a:ea typeface="Courier New" pitchFamily="34" charset="-122"/>
+                <a:cs typeface="Courier New" pitchFamily="34" charset="-120"/>
+              </a:rPr>
+              <a:t>EL EQUIPO LO RECALCULÓ</a:t>
+            </a:r>
+            <a:endParaRPr lang="en-US" sz="950" dirty="0"/>
+          </a:p>
+          <a:p>
+            <a:pPr indent="0" marL="0">
+              <a:buNone/>
+            </a:pPr>
+            <a:r>
+              <a:rPr lang="en-US" sz="1250" dirty="0">
+                <a:solidFill>
+                  <a:srgbClr val="16273F"/>
+                </a:solidFill>
+                <a:latin typeface="Calibri" pitchFamily="34" charset="0"/>
+                <a:ea typeface="Calibri" pitchFamily="34" charset="-122"/>
+                <a:cs typeface="Calibri" pitchFamily="34" charset="-120"/>
+              </a:rPr>
+              <a:t>Con 50 %, A sigue ganando (3,83 frente a 3,50). B solo gana si la disponibilidad pesa más de ~62 %.</a:t>
+            </a:r>
+            <a:endParaRPr lang="en-US" sz="950" dirty="0"/>
+          </a:p>
+        </p:txBody>
+      </p:sp>
       <p:graphicFrame>
         <p:nvGraphicFramePr>
           <p:cNvPr id="19" name="Table 0"/>
+          <p:cNvGraphicFramePr>
+            <a:graphicFrameLocks noGrp="1"/>
+          </p:cNvGraphicFramePr>
+          <p:nvPr>
+            <p:extLst>
+              <p:ext uri="{D42A27DB-BD31-4B8C-83A1-F6EECF244321}">
+                <p14:modId xmlns:p14="http://schemas.microsoft.com/office/powerpoint/2010/main" val="1579011935"/>
+              </p:ext>
+            </p:extLst>
+          </p:nvPr>
+        </p:nvGraphicFramePr>
+        <p:xfrm>
+          <a:off x="4251960" y="1325880"/>
+          <a:ext cx="4434840" cy="914400"/>
+        </p:xfrm>
+        <a:graphic>
+          <a:graphicData uri="http://schemas.openxmlformats.org/drawingml/2006/table">
+            <a:tbl>
+              <a:tblPr/>
+              <a:tblGrid>
+                <a:gridCol w="1965960"/>
+                <a:gridCol w="822960"/>
+                <a:gridCol w="822960"/>
+                <a:gridCol w="822960"/>
+              </a:tblGrid>
+              <a:tr h="457200">
+                <a:tc>
+                  <a:txBody>
+                    <a:bodyPr/>
+                    <a:lstStyle/>
+                    <a:p>
+                      <a:pPr algn="l" indent="0" marL="0">
+                        <a:buNone/>
+                      </a:pPr>
+                      <a:r>
+                        <a:rPr lang="en-US" sz="1050" b="1" dirty="0">
+                          <a:solidFill>
+                            <a:srgbClr val="FFFFFF"/>
+                          </a:solidFill>
+                          <a:latin typeface="Calibri" pitchFamily="34" charset="0"/>
+                          <a:ea typeface="Calibri" pitchFamily="34" charset="-122"/>
+                          <a:cs typeface="Calibri" pitchFamily="34" charset="-120"/>
+                        </a:rPr>
+                        <a:t>Peso de disponibilidad</a:t>
+                      </a:r>
+                      <a:endParaRPr lang="en-US" sz="1050" dirty="0">
+                        <a:latin typeface="Calibri" charset="0"/>
+                        <a:ea typeface="Calibri" charset="0"/>
+                        <a:cs typeface="Calibri" charset="0"/>
+                      </a:endParaRPr>
+                    </a:p>
+                  </a:txBody>
+                  <a:tcPr marL="91440" marR="91440" marT="45720" marB="45720" anchor="ctr">
+                    <a:lnL w="9525" cap="flat" cmpd="sng" algn="ctr">
+                      <a:solidFill>
+                        <a:srgbClr val="C6C4B8"/>
+                      </a:solidFill>
+                      <a:prstDash val="solid"/>
+                      <a:round/>
+                      <a:headEnd type="none" w="med" len="med"/>
+                      <a:tailEnd type="none" w="med" len="med"/>
+                    </a:lnL>
+                    <a:lnR w="9525" cap="flat" cmpd="sng" algn="ctr">
+                      <a:solidFill>
+                        <a:srgbClr val="C6C4B8"/>
+                      </a:solidFill>
+                      <a:prstDash val="solid"/>
+                      <a:round/>
+                      <a:headEnd type="none" w="med" len="med"/>
+                      <a:tailEnd type="none" w="med" len="med"/>
+                    </a:lnR>
+                    <a:lnT w="9525" cap="flat" cmpd="sng" algn="ctr">
+                      <a:solidFill>
+                        <a:srgbClr val="C6C4B8"/>
+                      </a:solidFill>
+                      <a:prstDash val="solid"/>
+                      <a:round/>
+                      <a:headEnd type="none" w="med" len="med"/>
+                      <a:tailEnd type="none" w="med" len="med"/>
+                    </a:lnT>
+                    <a:lnB w="9525" cap="flat" cmpd="sng" algn="ctr">
+                      <a:solidFill>
+                        <a:srgbClr val="C6C4B8"/>
+                      </a:solidFill>
+                      <a:prstDash val="solid"/>
+                      <a:round/>
+                      <a:headEnd type="none" w="med" len="med"/>
+                      <a:tailEnd type="none" w="med" len="med"/>
+                    </a:lnB>
+                    <a:solidFill>
+                      <a:srgbClr val="16273F"/>
+                    </a:solidFill>
+                  </a:tcPr>
+                </a:tc>
+                <a:tc>
+                  <a:txBody>
+                    <a:bodyPr/>
+                    <a:lstStyle/>
+                    <a:p>
+                      <a:pPr algn="ctr" indent="0" marL="0">
+                        <a:buNone/>
+                      </a:pPr>
+                      <a:r>
+                        <a:rPr lang="en-US" sz="1050" b="1" dirty="0">
+                          <a:solidFill>
+                            <a:srgbClr val="FFFFFF"/>
+                          </a:solidFill>
+                          <a:latin typeface="Calibri" pitchFamily="34" charset="0"/>
+                          <a:ea typeface="Calibri" pitchFamily="34" charset="-122"/>
+                          <a:cs typeface="Calibri" pitchFamily="34" charset="-120"/>
+                        </a:rPr>
+                        <a:t>Total A</a:t>
+                      </a:r>
+                      <a:endParaRPr lang="en-US" sz="1050" dirty="0">
+                        <a:latin typeface="Calibri" charset="0"/>
+                        <a:ea typeface="Calibri" charset="0"/>
+                        <a:cs typeface="Calibri" charset="0"/>
+                      </a:endParaRPr>
+                    </a:p>
+                  </a:txBody>
+                  <a:tcPr marL="91440" marR="91440" marT="45720" marB="45720" anchor="ctr">
+                    <a:lnL w="9525" cap="flat" cmpd="sng" algn="ctr">
+                      <a:solidFill>
+                        <a:srgbClr val="C6C4B8"/>
+                      </a:solidFill>
+                      <a:prstDash val="solid"/>
+                      <a:round/>
+                      <a:headEnd type="none" w="med" len="med"/>
+                      <a:tailEnd type="none" w="med" len="med"/>
+                    </a:lnL>
+                    <a:lnR w="9525" cap="flat" cmpd="sng" algn="ctr">
+                      <a:solidFill>
+                        <a:srgbClr val="C6C4B8"/>
+                      </a:solidFill>
+                      <a:prstDash val="solid"/>
+                      <a:round/>
+                      <a:headEnd type="none" w="med" len="med"/>
+                      <a:tailEnd type="none" w="med" len="med"/>
+                    </a:lnR>
+                    <a:lnT w="9525" cap="flat" cmpd="sng" algn="ctr">
+                      <a:solidFill>
+                        <a:srgbClr val="C6C4B8"/>
+                      </a:solidFill>
+                      <a:prstDash val="solid"/>
+                      <a:round/>
+                      <a:headEnd type="none" w="med" len="med"/>
+                      <a:tailEnd type="none" w="med" len="med"/>
+                    </a:lnT>
+                    <a:lnB w="9525" cap="flat" cmpd="sng" algn="ctr">
+                      <a:solidFill>
+                        <a:srgbClr val="C6C4B8"/>
+                      </a:solidFill>
+                      <a:prstDash val="solid"/>
+                      <a:round/>
+                      <a:headEnd type="none" w="med" len="med"/>
+                      <a:tailEnd type="none" w="med" len="med"/>
+                    </a:lnB>
+                    <a:solidFill>
+                      <a:srgbClr val="16273F"/>
+                    </a:solidFill>
+                  </a:tcPr>
+                </a:tc>
+                <a:tc>
+                  <a:txBody>
+                    <a:bodyPr/>
+                    <a:lstStyle/>
+                    <a:p>
+                      <a:pPr algn="ctr" indent="0" marL="0">
+                        <a:buNone/>
+                      </a:pPr>
+                      <a:r>
+                        <a:rPr lang="en-US" sz="1050" b="1" dirty="0">
+                          <a:solidFill>
+                            <a:srgbClr val="FFFFFF"/>
+                          </a:solidFill>
+                          <a:latin typeface="Calibri" pitchFamily="34" charset="0"/>
+                          <a:ea typeface="Calibri" pitchFamily="34" charset="-122"/>
+                          <a:cs typeface="Calibri" pitchFamily="34" charset="-120"/>
+                        </a:rPr>
+                        <a:t>Total B</a:t>
+                      </a:r>
+                      <a:endParaRPr lang="en-US" sz="1050" dirty="0">
+                        <a:latin typeface="Calibri" charset="0"/>
+                        <a:ea typeface="Calibri" charset="0"/>
+                        <a:cs typeface="Calibri" charset="0"/>
+                      </a:endParaRPr>
+                    </a:p>
+                  </a:txBody>
+                  <a:tcPr marL="91440" marR="91440" marT="45720" marB="45720" anchor="ctr">
+                    <a:lnL w="9525" cap="flat" cmpd="sng" algn="ctr">
+                      <a:solidFill>
+                        <a:srgbClr val="C6C4B8"/>
+                      </a:solidFill>
+                      <a:prstDash val="solid"/>
+                      <a:round/>
+                      <a:headEnd type="none" w="med" len="med"/>
+                      <a:tailEnd type="none" w="med" len="med"/>
+                    </a:lnL>
+                    <a:lnR w="9525" cap="flat" cmpd="sng" algn="ctr">
+                      <a:solidFill>
+                        <a:srgbClr val="C6C4B8"/>
+                      </a:solidFill>
+                      <a:prstDash val="solid"/>
+                      <a:round/>
+                      <a:headEnd type="none" w="med" len="med"/>
+                      <a:tailEnd type="none" w="med" len="med"/>
+                    </a:lnR>
+                    <a:lnT w="9525" cap="flat" cmpd="sng" algn="ctr">
+                      <a:solidFill>
+                        <a:srgbClr val="C6C4B8"/>
+                      </a:solidFill>
+                      <a:prstDash val="solid"/>
+                      <a:round/>
+                      <a:headEnd type="none" w="med" len="med"/>
+                      <a:tailEnd type="none" w="med" len="med"/>
+                    </a:lnT>
+                    <a:lnB w="9525" cap="flat" cmpd="sng" algn="ctr">
+                      <a:solidFill>
+                        <a:srgbClr val="C6C4B8"/>
+                      </a:solidFill>
+                      <a:prstDash val="solid"/>
+                      <a:round/>
+                      <a:headEnd type="none" w="med" len="med"/>
+                      <a:tailEnd type="none" w="med" len="med"/>
+                    </a:lnB>
+                    <a:solidFill>
+                      <a:srgbClr val="16273F"/>
+                    </a:solidFill>
+                  </a:tcPr>
+                </a:tc>
+                <a:tc>
+                  <a:txBody>
+                    <a:bodyPr/>
+                    <a:lstStyle/>
+                    <a:p>
+                      <a:pPr algn="ctr" indent="0" marL="0">
+                        <a:buNone/>
+                      </a:pPr>
+                      <a:r>
+                        <a:rPr lang="en-US" sz="1050" b="1" dirty="0">
+                          <a:solidFill>
+                            <a:srgbClr val="FFFFFF"/>
+                          </a:solidFill>
+                          <a:latin typeface="Calibri" pitchFamily="34" charset="0"/>
+                          <a:ea typeface="Calibri" pitchFamily="34" charset="-122"/>
+                          <a:cs typeface="Calibri" pitchFamily="34" charset="-120"/>
+                        </a:rPr>
+                        <a:t>Gana</a:t>
+                      </a:r>
+                      <a:endParaRPr lang="en-US" sz="1050" dirty="0">
+                        <a:latin typeface="Calibri" charset="0"/>
+                        <a:ea typeface="Calibri" charset="0"/>
+                        <a:cs typeface="Calibri" charset="0"/>
+                      </a:endParaRPr>
+                    </a:p>
+                  </a:txBody>
+                  <a:tcPr marL="91440" marR="91440" marT="45720" marB="45720" anchor="ctr">
+                    <a:lnL w="9525" cap="flat" cmpd="sng" algn="ctr">
+                      <a:solidFill>
+                        <a:srgbClr val="C6C4B8"/>
+                      </a:solidFill>
+                      <a:prstDash val="solid"/>
+                      <a:round/>
+                      <a:headEnd type="none" w="med" len="med"/>
+                      <a:tailEnd type="none" w="med" len="med"/>
+                    </a:lnL>
+                    <a:lnR w="9525" cap="flat" cmpd="sng" algn="ctr">
+                      <a:solidFill>
+                        <a:srgbClr val="C6C4B8"/>
+                      </a:solidFill>
+                      <a:prstDash val="solid"/>
+                      <a:round/>
+                      <a:headEnd type="none" w="med" len="med"/>
+                      <a:tailEnd type="none" w="med" len="med"/>
+                    </a:lnR>
+                    <a:lnT w="9525" cap="flat" cmpd="sng" algn="ctr">
+                      <a:solidFill>
+                        <a:srgbClr val="C6C4B8"/>
+                      </a:solidFill>
+                      <a:prstDash val="solid"/>
+                      <a:round/>
+                      <a:headEnd type="none" w="med" len="med"/>
+                      <a:tailEnd type="none" w="med" len="med"/>
+                    </a:lnT>
+                    <a:lnB w="9525" cap="flat" cmpd="sng" algn="ctr">
+                      <a:solidFill>
+                        <a:srgbClr val="C6C4B8"/>
+                      </a:solidFill>
+                      <a:prstDash val="solid"/>
+                      <a:round/>
+                      <a:headEnd type="none" w="med" len="med"/>
+                      <a:tailEnd type="none" w="med" len="med"/>
+                    </a:lnB>
+                    <a:solidFill>
+                      <a:srgbClr val="16273F"/>
+                    </a:solidFill>
+                  </a:tcPr>
+                </a:tc>
+              </a:tr>
+              <a:tr h="457200">
+                <a:tc>
+                  <a:txBody>
+                    <a:bodyPr/>
+                    <a:lstStyle/>
+                    <a:p>
+                      <a:pPr algn="l" indent="0" marL="0">
+                        <a:buNone/>
+                      </a:pPr>
+                      <a:r>
+                        <a:rPr lang="en-US" sz="1050" dirty="0">
+                          <a:solidFill>
+                            <a:srgbClr val="3B4C5E"/>
+                          </a:solidFill>
+                          <a:latin typeface="Calibri" pitchFamily="34" charset="0"/>
+                          <a:ea typeface="Calibri" pitchFamily="34" charset="-122"/>
+                          <a:cs typeface="Calibri" pitchFamily="34" charset="-120"/>
+                        </a:rPr>
+                        <a:t>35 % (pesos del negocio)</a:t>
+                      </a:r>
+                      <a:endParaRPr lang="en-US" sz="1050" dirty="0">
+                        <a:latin typeface="Calibri" charset="0"/>
+                        <a:ea typeface="Calibri" charset="0"/>
+                        <a:cs typeface="Calibri" charset="0"/>
+                      </a:endParaRPr>
+                    </a:p>
+                  </a:txBody>
+                  <a:tcPr marL="91440" marR="91440" marT="45720" marB="45720" anchor="ctr">
+                    <a:lnL w="9525" cap="flat" cmpd="sng" algn="ctr">
+                      <a:solidFill>
+                        <a:srgbClr val="C6C4B8"/>
+                      </a:solidFill>
+                      <a:prstDash val="solid"/>
+                      <a:round/>
+                      <a:headEnd type="none" w="med" len="med"/>
+                      <a:tailEnd type="none" w="med" len="med"/>
+                    </a:lnL>
+                    <a:lnR w="9525" cap="flat" cmpd="sng" algn="ctr">
+                      <a:solidFill>
+                        <a:srgbClr val="C6C4B8"/>
+                      </a:solidFill>
+                      <a:prstDash val="solid"/>
+                      <a:round/>
+                      <a:headEnd type="none" w="med" len="med"/>
+                      <a:tailEnd type="none" w="med" len="med"/>
+                    </a:lnR>
+                    <a:lnT w="9525" cap="flat" cmpd="sng" algn="ctr">
+                      <a:solidFill>
+                        <a:srgbClr val="C6C4B8"/>
+                      </a:solidFill>
+                      <a:prstDash val="solid"/>
+                      <a:round/>
+                      <a:headEnd type="none" w="med" len="med"/>
+                      <a:tailEnd type="none" w="med" len="med"/>
+                    </a:lnT>
+                    <a:lnB w="9525" cap="flat" cmpd="sng" algn="ctr">
+                      <a:solidFill>
+                        <a:srgbClr val="C6C4B8"/>
+                      </a:solidFill>
+                      <a:prstDash val="solid"/>
+                      <a:round/>
+                      <a:headEnd type="none" w="med" len="med"/>
+                      <a:tailEnd type="none" w="med" len="med"/>
+                    </a:lnB>
+                    <a:solidFill>
+                      <a:srgbClr val="FFFFFF"/>
+                    </a:solidFill>
+                  </a:tcPr>
+                </a:tc>
+                <a:tc>
+                  <a:txBody>
+                    <a:bodyPr/>
+                    <a:lstStyle/>
+                    <a:p>
+                      <a:pPr algn="ctr" indent="0" marL="0">
+                        <a:buNone/>
+                      </a:pPr>
+                      <a:r>
+                        <a:rPr lang="en-US" sz="1050" dirty="0">
+                          <a:solidFill>
+                            <a:srgbClr val="3B4C5E"/>
+                          </a:solidFill>
+                          <a:latin typeface="Calibri" pitchFamily="34" charset="0"/>
+                          <a:ea typeface="Calibri" pitchFamily="34" charset="-122"/>
+                          <a:cs typeface="Calibri" pitchFamily="34" charset="-120"/>
+                        </a:rPr>
+                        <a:t>3,80</a:t>
+                      </a:r>
+                      <a:endParaRPr lang="en-US" sz="1050" dirty="0">
+                        <a:latin typeface="Calibri" charset="0"/>
+                        <a:ea typeface="Calibri" charset="0"/>
+                        <a:cs typeface="Calibri" charset="0"/>
+                      </a:endParaRPr>
+                    </a:p>
+                  </a:txBody>
+                  <a:tcPr marL="91440" marR="91440" marT="45720" marB="45720" anchor="ctr">
+                    <a:lnL w="9525" cap="flat" cmpd="sng" algn="ctr">
+                      <a:solidFill>
+                        <a:srgbClr val="C6C4B8"/>
+                      </a:solidFill>
+                      <a:prstDash val="solid"/>
+                      <a:round/>
+                      <a:headEnd type="none" w="med" len="med"/>
+                      <a:tailEnd type="none" w="med" len="med"/>
+                    </a:lnL>
+                    <a:lnR w="9525" cap="flat" cmpd="sng" algn="ctr">
+                      <a:solidFill>
+                        <a:srgbClr val="C6C4B8"/>
+                      </a:solidFill>
+                      <a:prstDash val="solid"/>
+                      <a:round/>
+                      <a:headEnd type="none" w="med" len="med"/>
+                      <a:tailEnd type="none" w="med" len="med"/>
+                    </a:lnR>
+                    <a:lnT w="9525" cap="flat" cmpd="sng" algn="ctr">
+                      <a:solidFill>
+                        <a:srgbClr val="C6C4B8"/>
+                      </a:solidFill>
+                      <a:prstDash val="solid"/>
+                      <a:round/>
+                      <a:headEnd type="none" w="med" len="med"/>
+                      <a:tailEnd type="none" w="med" len="med"/>
+                    </a:lnT>
+                    <a:lnB w="9525" cap="flat" cmpd="sng" algn="ctr">
+                      <a:solidFill>
+                        <a:srgbClr val="C6C4B8"/>
+                      </a:solidFill>
+                      <a:prstDash val="solid"/>
+                      <a:round/>
+                      <a:headEnd type="none" w="med" len="med"/>
+                      <a:tailEnd type="none" w="med" len="med"/>
+                    </a:lnB>
+                    <a:solidFill>
+                      <a:srgbClr val="FFFFFF"/>
+                    </a:solidFill>
+                  </a:tcPr>
+                </a:tc>
+                <a:tc>
+                  <a:txBody>
+                    <a:bodyPr/>
+                    <a:lstStyle/>
+                    <a:p>
+                      <a:pPr algn="ctr" indent="0" marL="0">
+                        <a:buNone/>
+                      </a:pPr>
+                      <a:r>
+                        <a:rPr lang="en-US" sz="1050" dirty="0">
+                          <a:solidFill>
+                            <a:srgbClr val="3B4C5E"/>
+                          </a:solidFill>
+                          <a:latin typeface="Calibri" pitchFamily="34" charset="0"/>
+                          <a:ea typeface="Calibri" pitchFamily="34" charset="-122"/>
+                          <a:cs typeface="Calibri" pitchFamily="34" charset="-120"/>
+                        </a:rPr>
+                        <a:t>3,05</a:t>
+                      </a:r>
+                      <a:endParaRPr lang="en-US" sz="1050" dirty="0">
+                        <a:latin typeface="Calibri" charset="0"/>
+                        <a:ea typeface="Calibri" charset="0"/>
+                        <a:cs typeface="Calibri" charset="0"/>
+                      </a:endParaRPr>
+                    </a:p>
+                  </a:txBody>
+                  <a:tcPr marL="91440" marR="91440" marT="45720" marB="45720" anchor="ctr">
+                    <a:lnL w="9525" cap="flat" cmpd="sng" algn="ctr">
+                      <a:solidFill>
+                        <a:srgbClr val="C6C4B8"/>
+                      </a:solidFill>
+                      <a:prstDash val="solid"/>
+                      <a:round/>
+                      <a:headEnd type="none" w="med" len="med"/>
+                      <a:tailEnd type="none" w="med" len="med"/>
+                    </a:lnL>
+                    <a:lnR w="9525" cap="flat" cmpd="sng" algn="ctr">
+                      <a:solidFill>
+                        <a:srgbClr val="C6C4B8"/>
+                      </a:solidFill>
+                      <a:prstDash val="solid"/>
+                      <a:round/>
+                      <a:headEnd type="none" w="med" len="med"/>
+                      <a:tailEnd type="none" w="med" len="med"/>
+                    </a:lnR>
+                    <a:lnT w="9525" cap="flat" cmpd="sng" algn="ctr">
+                      <a:solidFill>
+                        <a:srgbClr val="C6C4B8"/>
+                      </a:solidFill>
+                      <a:prstDash val="solid"/>
+                      <a:round/>
+                      <a:headEnd type="none" w="med" len="med"/>
+                      <a:tailEnd type="none" w="med" len="med"/>
+                    </a:lnT>
+                    <a:lnB w="9525" cap="flat" cmpd="sng" algn="ctr">
+                      <a:solidFill>
+                        <a:srgbClr val="C6C4B8"/>
+                      </a:solidFill>
+                      <a:prstDash val="solid"/>
+                      <a:round/>
+                      <a:headEnd type="none" w="med" len="med"/>
+                      <a:tailEnd type="none" w="med" len="med"/>
+                    </a:lnB>
+                    <a:solidFill>
+                      <a:srgbClr val="FFFFFF"/>
+                    </a:solidFill>
+                  </a:tcPr>
+                </a:tc>
+                <a:tc>
+                  <a:txBody>
+                    <a:bodyPr/>
+                    <a:lstStyle/>
+                    <a:p>
+                      <a:pPr algn="ctr" indent="0" marL="0">
+                        <a:buNone/>
+                      </a:pPr>
+                      <a:r>
+                        <a:rPr lang="en-US" sz="1050" b="1" dirty="0">
+                          <a:solidFill>
+                            <a:srgbClr val="3B4C5E"/>
+                          </a:solidFill>
+                          <a:latin typeface="Calibri" pitchFamily="34" charset="0"/>
+                          <a:ea typeface="Calibri" pitchFamily="34" charset="-122"/>
+                          <a:cs typeface="Calibri" pitchFamily="34" charset="-120"/>
+                        </a:rPr>
+                        <a:t>A</a:t>
+                      </a:r>
+                      <a:endParaRPr lang="en-US" sz="1050" dirty="0">
+                        <a:latin typeface="Calibri" charset="0"/>
+                        <a:ea typeface="Calibri" charset="0"/>
+                        <a:cs typeface="Calibri" charset="0"/>
+                      </a:endParaRPr>
+                    </a:p>
+                  </a:txBody>
+                  <a:tcPr marL="91440" marR="91440" marT="45720" marB="45720" anchor="ctr">
+                    <a:lnL w="9525" cap="flat" cmpd="sng" algn="ctr">
+                      <a:solidFill>
+                        <a:srgbClr val="C6C4B8"/>
+                      </a:solidFill>
+                      <a:prstDash val="solid"/>
+                      <a:round/>
+                      <a:headEnd type="none" w="med" len="med"/>
+                      <a:tailEnd type="none" w="med" len="med"/>
+                    </a:lnL>
+                    <a:lnR w="9525" cap="flat" cmpd="sng" algn="ctr">
+                      <a:solidFill>
+                        <a:srgbClr val="C6C4B8"/>
+                      </a:solidFill>
+                      <a:prstDash val="solid"/>
+                      <a:round/>
+                      <a:headEnd type="none" w="med" len="med"/>
+                      <a:tailEnd type="none" w="med" len="med"/>
+                    </a:lnR>
+                    <a:lnT w="9525" cap="flat" cmpd="sng" algn="ctr">
+                      <a:solidFill>
+                        <a:srgbClr val="C6C4B8"/>
+                      </a:solidFill>
+                      <a:prstDash val="solid"/>
+                      <a:round/>
+                      <a:headEnd type="none" w="med" len="med"/>
+                      <a:tailEnd type="none" w="med" len="med"/>
+                    </a:lnT>
+                    <a:lnB w="9525" cap="flat" cmpd="sng" algn="ctr">
+                      <a:solidFill>
+                        <a:srgbClr val="C6C4B8"/>
+                      </a:solidFill>
+                      <a:prstDash val="solid"/>
+                      <a:round/>
+                      <a:headEnd type="none" w="med" len="med"/>
+                      <a:tailEnd type="none" w="med" len="med"/>
+                    </a:lnB>
+                    <a:solidFill>
+                      <a:srgbClr val="FFFFFF"/>
+                    </a:solidFill>
+                  </a:tcPr>
+                </a:tc>
+              </a:tr>
+              <a:tr h="457200">
+                <a:tc>
+                  <a:txBody>
+                    <a:bodyPr/>
+                    <a:lstStyle/>
+                    <a:p>
+                      <a:pPr algn="l" indent="0" marL="0">
+                        <a:buNone/>
+                      </a:pPr>
+                      <a:r>
+                        <a:rPr lang="en-US" sz="1050" b="1" dirty="0">
+                          <a:solidFill>
+                            <a:srgbClr val="3B4C5E"/>
+                          </a:solidFill>
+                          <a:latin typeface="Calibri" pitchFamily="34" charset="0"/>
+                          <a:ea typeface="Calibri" pitchFamily="34" charset="-122"/>
+                          <a:cs typeface="Calibri" pitchFamily="34" charset="-120"/>
+                        </a:rPr>
+                        <a:t>50 % (lo que afirmó la IA)</a:t>
+                      </a:r>
+                      <a:endParaRPr lang="en-US" sz="1050" dirty="0">
+                        <a:latin typeface="Calibri" charset="0"/>
+                        <a:ea typeface="Calibri" charset="0"/>
+                        <a:cs typeface="Calibri" charset="0"/>
+                      </a:endParaRPr>
+                    </a:p>
+                  </a:txBody>
+                  <a:tcPr marL="91440" marR="91440" marT="45720" marB="45720" anchor="ctr">
+                    <a:lnL w="9525" cap="flat" cmpd="sng" algn="ctr">
+                      <a:solidFill>
+                        <a:srgbClr val="C6C4B8"/>
+                      </a:solidFill>
+                      <a:prstDash val="solid"/>
+                      <a:round/>
+                      <a:headEnd type="none" w="med" len="med"/>
+                      <a:tailEnd type="none" w="med" len="med"/>
+                    </a:lnL>
+                    <a:lnR w="9525" cap="flat" cmpd="sng" algn="ctr">
+                      <a:solidFill>
+                        <a:srgbClr val="C6C4B8"/>
+                      </a:solidFill>
+                      <a:prstDash val="solid"/>
+                      <a:round/>
+                      <a:headEnd type="none" w="med" len="med"/>
+                      <a:tailEnd type="none" w="med" len="med"/>
+                    </a:lnR>
+                    <a:lnT w="9525" cap="flat" cmpd="sng" algn="ctr">
+                      <a:solidFill>
+                        <a:srgbClr val="C6C4B8"/>
+                      </a:solidFill>
+                      <a:prstDash val="solid"/>
+                      <a:round/>
+                      <a:headEnd type="none" w="med" len="med"/>
+                      <a:tailEnd type="none" w="med" len="med"/>
+                    </a:lnT>
+                    <a:lnB w="9525" cap="flat" cmpd="sng" algn="ctr">
+                      <a:solidFill>
+                        <a:srgbClr val="C6C4B8"/>
+                      </a:solidFill>
+                      <a:prstDash val="solid"/>
+                      <a:round/>
+                      <a:headEnd type="none" w="med" len="med"/>
+                      <a:tailEnd type="none" w="med" len="med"/>
+                    </a:lnB>
+                    <a:solidFill>
+                      <a:srgbClr val="FFFFFF"/>
+                    </a:solidFill>
+                  </a:tcPr>
+                </a:tc>
+                <a:tc>
+                  <a:txBody>
+                    <a:bodyPr/>
+                    <a:lstStyle/>
+                    <a:p>
+                      <a:pPr algn="ctr" indent="0" marL="0">
+                        <a:buNone/>
+                      </a:pPr>
+                      <a:r>
+                        <a:rPr lang="en-US" sz="1050" b="1" dirty="0">
+                          <a:solidFill>
+                            <a:srgbClr val="3B4C5E"/>
+                          </a:solidFill>
+                          <a:latin typeface="Calibri" pitchFamily="34" charset="0"/>
+                          <a:ea typeface="Calibri" pitchFamily="34" charset="-122"/>
+                          <a:cs typeface="Calibri" pitchFamily="34" charset="-120"/>
+                        </a:rPr>
+                        <a:t>3,83</a:t>
+                      </a:r>
+                      <a:endParaRPr lang="en-US" sz="1050" dirty="0">
+                        <a:latin typeface="Calibri" charset="0"/>
+                        <a:ea typeface="Calibri" charset="0"/>
+                        <a:cs typeface="Calibri" charset="0"/>
+                      </a:endParaRPr>
+                    </a:p>
+                  </a:txBody>
+                  <a:tcPr marL="91440" marR="91440" marT="45720" marB="45720" anchor="ctr">
+                    <a:lnL w="9525" cap="flat" cmpd="sng" algn="ctr">
+                      <a:solidFill>
+                        <a:srgbClr val="C6C4B8"/>
+                      </a:solidFill>
+                      <a:prstDash val="solid"/>
+                      <a:round/>
+                      <a:headEnd type="none" w="med" len="med"/>
+                      <a:tailEnd type="none" w="med" len="med"/>
+                    </a:lnL>
+                    <a:lnR w="9525" cap="flat" cmpd="sng" algn="ctr">
+                      <a:solidFill>
+                        <a:srgbClr val="C6C4B8"/>
+                      </a:solidFill>
+                      <a:prstDash val="solid"/>
+                      <a:round/>
+                      <a:headEnd type="none" w="med" len="med"/>
+                      <a:tailEnd type="none" w="med" len="med"/>
+                    </a:lnR>
+                    <a:lnT w="9525" cap="flat" cmpd="sng" algn="ctr">
+                      <a:solidFill>
+                        <a:srgbClr val="C6C4B8"/>
+                      </a:solidFill>
+                      <a:prstDash val="solid"/>
+                      <a:round/>
+                      <a:headEnd type="none" w="med" len="med"/>
+                      <a:tailEnd type="none" w="med" len="med"/>
+                    </a:lnT>
+                    <a:lnB w="9525" cap="flat" cmpd="sng" algn="ctr">
+                      <a:solidFill>
+                        <a:srgbClr val="C6C4B8"/>
+                      </a:solidFill>
+                      <a:prstDash val="solid"/>
+                      <a:round/>
+                      <a:headEnd type="none" w="med" len="med"/>
+                      <a:tailEnd type="none" w="med" len="med"/>
+                    </a:lnB>
+                    <a:solidFill>
+                      <a:srgbClr val="FFFFFF"/>
+                    </a:solidFill>
+                  </a:tcPr>
+                </a:tc>
+                <a:tc>
+                  <a:txBody>
+                    <a:bodyPr/>
+                    <a:lstStyle/>
+                    <a:p>
+                      <a:pPr algn="ctr" indent="0" marL="0">
+                        <a:buNone/>
+                      </a:pPr>
+                      <a:r>
+                        <a:rPr lang="en-US" sz="1050" b="1" dirty="0">
+                          <a:solidFill>
+                            <a:srgbClr val="3B4C5E"/>
+                          </a:solidFill>
+                          <a:latin typeface="Calibri" pitchFamily="34" charset="0"/>
+                          <a:ea typeface="Calibri" pitchFamily="34" charset="-122"/>
+                          <a:cs typeface="Calibri" pitchFamily="34" charset="-120"/>
+                        </a:rPr>
+                        <a:t>3,50</a:t>
+                      </a:r>
+                      <a:endParaRPr lang="en-US" sz="1050" dirty="0">
+                        <a:latin typeface="Calibri" charset="0"/>
+                        <a:ea typeface="Calibri" charset="0"/>
+                        <a:cs typeface="Calibri" charset="0"/>
+                      </a:endParaRPr>
+                    </a:p>
+                  </a:txBody>
+                  <a:tcPr marL="91440" marR="91440" marT="45720" marB="45720" anchor="ctr">
+                    <a:lnL w="9525" cap="flat" cmpd="sng" algn="ctr">
+                      <a:solidFill>
+                        <a:srgbClr val="C6C4B8"/>
+                      </a:solidFill>
+                      <a:prstDash val="solid"/>
+                      <a:round/>
+                      <a:headEnd type="none" w="med" len="med"/>
+                      <a:tailEnd type="none" w="med" len="med"/>
+                    </a:lnL>
+                    <a:lnR w="9525" cap="flat" cmpd="sng" algn="ctr">
+                      <a:solidFill>
+                        <a:srgbClr val="C6C4B8"/>
+                      </a:solidFill>
+                      <a:prstDash val="solid"/>
+                      <a:round/>
+                      <a:headEnd type="none" w="med" len="med"/>
+                      <a:tailEnd type="none" w="med" len="med"/>
+                    </a:lnR>
+                    <a:lnT w="9525" cap="flat" cmpd="sng" algn="ctr">
+                      <a:solidFill>
+                        <a:srgbClr val="C6C4B8"/>
+                      </a:solidFill>
+                      <a:prstDash val="solid"/>
+                      <a:round/>
+                      <a:headEnd type="none" w="med" len="med"/>
+                      <a:tailEnd type="none" w="med" len="med"/>
+                    </a:lnT>
+                    <a:lnB w="9525" cap="flat" cmpd="sng" algn="ctr">
+                      <a:solidFill>
+                        <a:srgbClr val="C6C4B8"/>
+                      </a:solidFill>
+                      <a:prstDash val="solid"/>
+                      <a:round/>
+                      <a:headEnd type="none" w="med" len="med"/>
+                      <a:tailEnd type="none" w="med" len="med"/>
+                    </a:lnB>
+                    <a:solidFill>
+                      <a:srgbClr val="FFFFFF"/>
+                    </a:solidFill>
+                  </a:tcPr>
+                </a:tc>
+                <a:tc>
+                  <a:txBody>
+                    <a:bodyPr/>
+                    <a:lstStyle/>
+                    <a:p>
+                      <a:pPr algn="ctr" indent="0" marL="0">
+                        <a:buNone/>
+                      </a:pPr>
+                      <a:r>
+                        <a:rPr lang="en-US" sz="1050" b="1" dirty="0">
+                          <a:solidFill>
+                            <a:srgbClr val="B4552B"/>
+                          </a:solidFill>
+                          <a:latin typeface="Calibri" pitchFamily="34" charset="0"/>
+                          <a:ea typeface="Calibri" pitchFamily="34" charset="-122"/>
+                          <a:cs typeface="Calibri" pitchFamily="34" charset="-120"/>
+                        </a:rPr>
+                        <a:t>A</a:t>
+                      </a:r>
+                      <a:endParaRPr lang="en-US" sz="1050" dirty="0">
+                        <a:latin typeface="Calibri" charset="0"/>
+                        <a:ea typeface="Calibri" charset="0"/>
+                        <a:cs typeface="Calibri" charset="0"/>
+                      </a:endParaRPr>
+                    </a:p>
+                  </a:txBody>
+                  <a:tcPr marL="91440" marR="91440" marT="45720" marB="45720" anchor="ctr">
+                    <a:lnL w="9525" cap="flat" cmpd="sng" algn="ctr">
+                      <a:solidFill>
+                        <a:srgbClr val="C6C4B8"/>
+                      </a:solidFill>
+                      <a:prstDash val="solid"/>
+                      <a:round/>
+                      <a:headEnd type="none" w="med" len="med"/>
+                      <a:tailEnd type="none" w="med" len="med"/>
+                    </a:lnL>
+                    <a:lnR w="9525" cap="flat" cmpd="sng" algn="ctr">
+                      <a:solidFill>
+                        <a:srgbClr val="C6C4B8"/>
+                      </a:solidFill>
+                      <a:prstDash val="solid"/>
+                      <a:round/>
+                      <a:headEnd type="none" w="med" len="med"/>
+                      <a:tailEnd type="none" w="med" len="med"/>
+                    </a:lnR>
+                    <a:lnT w="9525" cap="flat" cmpd="sng" algn="ctr">
+                      <a:solidFill>
+                        <a:srgbClr val="C6C4B8"/>
+                      </a:solidFill>
+                      <a:prstDash val="solid"/>
+                      <a:round/>
+                      <a:headEnd type="none" w="med" len="med"/>
+                      <a:tailEnd type="none" w="med" len="med"/>
+                    </a:lnT>
+                    <a:lnB w="9525" cap="flat" cmpd="sng" algn="ctr">
+                      <a:solidFill>
+                        <a:srgbClr val="C6C4B8"/>
+                      </a:solidFill>
+                      <a:prstDash val="solid"/>
+                      <a:round/>
+                      <a:headEnd type="none" w="med" len="med"/>
+                      <a:tailEnd type="none" w="med" len="med"/>
+                    </a:lnB>
+                    <a:solidFill>
+                      <a:srgbClr val="FFFFFF"/>
+                    </a:solidFill>
+                  </a:tcPr>
+                </a:tc>
+              </a:tr>
+              <a:tr h="457200">
+                <a:tc>
+                  <a:txBody>
+                    <a:bodyPr/>
+                    <a:lstStyle/>
+                    <a:p>
+                      <a:pPr algn="l" indent="0" marL="0">
+                        <a:buNone/>
+                      </a:pPr>
+                      <a:r>
+                        <a:rPr lang="en-US" sz="1050" dirty="0">
+                          <a:solidFill>
+                            <a:srgbClr val="3B4C5E"/>
+                          </a:solidFill>
+                          <a:latin typeface="Calibri" pitchFamily="34" charset="0"/>
+                          <a:ea typeface="Calibri" pitchFamily="34" charset="-122"/>
+                          <a:cs typeface="Calibri" pitchFamily="34" charset="-120"/>
+                        </a:rPr>
+                        <a:t>62,5 %</a:t>
+                      </a:r>
+                      <a:endParaRPr lang="en-US" sz="1050" dirty="0">
+                        <a:latin typeface="Calibri" charset="0"/>
+                        <a:ea typeface="Calibri" charset="0"/>
+                        <a:cs typeface="Calibri" charset="0"/>
+                      </a:endParaRPr>
+                    </a:p>
+                  </a:txBody>
+                  <a:tcPr marL="91440" marR="91440" marT="45720" marB="45720" anchor="ctr">
+                    <a:lnL w="9525" cap="flat" cmpd="sng" algn="ctr">
+                      <a:solidFill>
+                        <a:srgbClr val="C6C4B8"/>
+                      </a:solidFill>
+                      <a:prstDash val="solid"/>
+                      <a:round/>
+                      <a:headEnd type="none" w="med" len="med"/>
+                      <a:tailEnd type="none" w="med" len="med"/>
+                    </a:lnL>
+                    <a:lnR w="9525" cap="flat" cmpd="sng" algn="ctr">
+                      <a:solidFill>
+                        <a:srgbClr val="C6C4B8"/>
+                      </a:solidFill>
+                      <a:prstDash val="solid"/>
+                      <a:round/>
+                      <a:headEnd type="none" w="med" len="med"/>
+                      <a:tailEnd type="none" w="med" len="med"/>
+                    </a:lnR>
+                    <a:lnT w="9525" cap="flat" cmpd="sng" algn="ctr">
+                      <a:solidFill>
+                        <a:srgbClr val="C6C4B8"/>
+                      </a:solidFill>
+                      <a:prstDash val="solid"/>
+                      <a:round/>
+                      <a:headEnd type="none" w="med" len="med"/>
+                      <a:tailEnd type="none" w="med" len="med"/>
+                    </a:lnT>
+                    <a:lnB w="9525" cap="flat" cmpd="sng" algn="ctr">
+                      <a:solidFill>
+                        <a:srgbClr val="C6C4B8"/>
+                      </a:solidFill>
+                      <a:prstDash val="solid"/>
+                      <a:round/>
+                      <a:headEnd type="none" w="med" len="med"/>
+                      <a:tailEnd type="none" w="med" len="med"/>
+                    </a:lnB>
+                    <a:solidFill>
+                      <a:srgbClr val="FFFFFF"/>
+                    </a:solidFill>
+                  </a:tcPr>
+                </a:tc>
+                <a:tc>
+                  <a:txBody>
+                    <a:bodyPr/>
+                    <a:lstStyle/>
+                    <a:p>
+                      <a:pPr algn="ctr" indent="0" marL="0">
+                        <a:buNone/>
+                      </a:pPr>
+                      <a:r>
+                        <a:rPr lang="en-US" sz="1050" dirty="0">
+                          <a:solidFill>
+                            <a:srgbClr val="3B4C5E"/>
+                          </a:solidFill>
+                          <a:latin typeface="Calibri" pitchFamily="34" charset="0"/>
+                          <a:ea typeface="Calibri" pitchFamily="34" charset="-122"/>
+                          <a:cs typeface="Calibri" pitchFamily="34" charset="-120"/>
+                        </a:rPr>
+                        <a:t>3,88</a:t>
+                      </a:r>
+                      <a:endParaRPr lang="en-US" sz="1050" dirty="0">
+                        <a:latin typeface="Calibri" charset="0"/>
+                        <a:ea typeface="Calibri" charset="0"/>
+                        <a:cs typeface="Calibri" charset="0"/>
+                      </a:endParaRPr>
+                    </a:p>
+                  </a:txBody>
+                  <a:tcPr marL="91440" marR="91440" marT="45720" marB="45720" anchor="ctr">
+                    <a:lnL w="9525" cap="flat" cmpd="sng" algn="ctr">
+                      <a:solidFill>
+                        <a:srgbClr val="C6C4B8"/>
+                      </a:solidFill>
+                      <a:prstDash val="solid"/>
+                      <a:round/>
+                      <a:headEnd type="none" w="med" len="med"/>
+                      <a:tailEnd type="none" w="med" len="med"/>
+                    </a:lnL>
+                    <a:lnR w="9525" cap="flat" cmpd="sng" algn="ctr">
+                      <a:solidFill>
+                        <a:srgbClr val="C6C4B8"/>
+                      </a:solidFill>
+                      <a:prstDash val="solid"/>
+                      <a:round/>
+                      <a:headEnd type="none" w="med" len="med"/>
+                      <a:tailEnd type="none" w="med" len="med"/>
+                    </a:lnR>
+                    <a:lnT w="9525" cap="flat" cmpd="sng" algn="ctr">
+                      <a:solidFill>
+                        <a:srgbClr val="C6C4B8"/>
+                      </a:solidFill>
+                      <a:prstDash val="solid"/>
+                      <a:round/>
+                      <a:headEnd type="none" w="med" len="med"/>
+                      <a:tailEnd type="none" w="med" len="med"/>
+                    </a:lnT>
+                    <a:lnB w="9525" cap="flat" cmpd="sng" algn="ctr">
+                      <a:solidFill>
+                        <a:srgbClr val="C6C4B8"/>
+                      </a:solidFill>
+                      <a:prstDash val="solid"/>
+                      <a:round/>
+                      <a:headEnd type="none" w="med" len="med"/>
+                      <a:tailEnd type="none" w="med" len="med"/>
+                    </a:lnB>
+                    <a:solidFill>
+                      <a:srgbClr val="FFFFFF"/>
+                    </a:solidFill>
+                  </a:tcPr>
+                </a:tc>
+                <a:tc>
+                  <a:txBody>
+                    <a:bodyPr/>
+                    <a:lstStyle/>
+                    <a:p>
+                      <a:pPr algn="ctr" indent="0" marL="0">
+                        <a:buNone/>
+                      </a:pPr>
+                      <a:r>
+                        <a:rPr lang="en-US" sz="1050" dirty="0">
+                          <a:solidFill>
+                            <a:srgbClr val="3B4C5E"/>
+                          </a:solidFill>
+                          <a:latin typeface="Calibri" pitchFamily="34" charset="0"/>
+                          <a:ea typeface="Calibri" pitchFamily="34" charset="-122"/>
+                          <a:cs typeface="Calibri" pitchFamily="34" charset="-120"/>
+                        </a:rPr>
+                        <a:t>3,88</a:t>
+                      </a:r>
+                      <a:endParaRPr lang="en-US" sz="1050" dirty="0">
+                        <a:latin typeface="Calibri" charset="0"/>
+                        <a:ea typeface="Calibri" charset="0"/>
+                        <a:cs typeface="Calibri" charset="0"/>
+                      </a:endParaRPr>
+                    </a:p>
+                  </a:txBody>
+                  <a:tcPr marL="91440" marR="91440" marT="45720" marB="45720" anchor="ctr">
+                    <a:lnL w="9525" cap="flat" cmpd="sng" algn="ctr">
+                      <a:solidFill>
+                        <a:srgbClr val="C6C4B8"/>
+                      </a:solidFill>
+                      <a:prstDash val="solid"/>
+                      <a:round/>
+                      <a:headEnd type="none" w="med" len="med"/>
+                      <a:tailEnd type="none" w="med" len="med"/>
+                    </a:lnL>
+                    <a:lnR w="9525" cap="flat" cmpd="sng" algn="ctr">
+                      <a:solidFill>
+                        <a:srgbClr val="C6C4B8"/>
+                      </a:solidFill>
+                      <a:prstDash val="solid"/>
+                      <a:round/>
+                      <a:headEnd type="none" w="med" len="med"/>
+                      <a:tailEnd type="none" w="med" len="med"/>
+                    </a:lnR>
+                    <a:lnT w="9525" cap="flat" cmpd="sng" algn="ctr">
+                      <a:solidFill>
+                        <a:srgbClr val="C6C4B8"/>
+                      </a:solidFill>
+                      <a:prstDash val="solid"/>
+                      <a:round/>
+                      <a:headEnd type="none" w="med" len="med"/>
+                      <a:tailEnd type="none" w="med" len="med"/>
+                    </a:lnT>
+                    <a:lnB w="9525" cap="flat" cmpd="sng" algn="ctr">
+                      <a:solidFill>
+                        <a:srgbClr val="C6C4B8"/>
+                      </a:solidFill>
+                      <a:prstDash val="solid"/>
+                      <a:round/>
+                      <a:headEnd type="none" w="med" len="med"/>
+                      <a:tailEnd type="none" w="med" len="med"/>
+                    </a:lnB>
+                    <a:solidFill>
+                      <a:srgbClr val="FFFFFF"/>
+                    </a:solidFill>
+                  </a:tcPr>
+                </a:tc>
+                <a:tc>
+                  <a:txBody>
+                    <a:bodyPr/>
+                    <a:lstStyle/>
+                    <a:p>
+                      <a:pPr algn="ctr" indent="0" marL="0">
+                        <a:buNone/>
+                      </a:pPr>
+                      <a:r>
+                        <a:rPr lang="en-US" sz="1050" b="1" dirty="0">
+                          <a:solidFill>
+                            <a:srgbClr val="3B4C5E"/>
+                          </a:solidFill>
+                          <a:latin typeface="Calibri" pitchFamily="34" charset="0"/>
+                          <a:ea typeface="Calibri" pitchFamily="34" charset="-122"/>
+                          <a:cs typeface="Calibri" pitchFamily="34" charset="-120"/>
+                        </a:rPr>
+                        <a:t>Empate</a:t>
+                      </a:r>
+                      <a:endParaRPr lang="en-US" sz="1050" dirty="0">
+                        <a:latin typeface="Calibri" charset="0"/>
+                        <a:ea typeface="Calibri" charset="0"/>
+                        <a:cs typeface="Calibri" charset="0"/>
+                      </a:endParaRPr>
+                    </a:p>
+                  </a:txBody>
+                  <a:tcPr marL="91440" marR="91440" marT="45720" marB="45720" anchor="ctr">
+                    <a:lnL w="9525" cap="flat" cmpd="sng" algn="ctr">
+                      <a:solidFill>
+                        <a:srgbClr val="C6C4B8"/>
+                      </a:solidFill>
+                      <a:prstDash val="solid"/>
+                      <a:round/>
+                      <a:headEnd type="none" w="med" len="med"/>
+                      <a:tailEnd type="none" w="med" len="med"/>
+                    </a:lnL>
+                    <a:lnR w="9525" cap="flat" cmpd="sng" algn="ctr">
+                      <a:solidFill>
+                        <a:srgbClr val="C6C4B8"/>
+                      </a:solidFill>
+                      <a:prstDash val="solid"/>
+                      <a:round/>
+                      <a:headEnd type="none" w="med" len="med"/>
+                      <a:tailEnd type="none" w="med" len="med"/>
+                    </a:lnR>
+                    <a:lnT w="9525" cap="flat" cmpd="sng" algn="ctr">
+                      <a:solidFill>
+                        <a:srgbClr val="C6C4B8"/>
+                      </a:solidFill>
+                      <a:prstDash val="solid"/>
+                      <a:round/>
+                      <a:headEnd type="none" w="med" len="med"/>
+                      <a:tailEnd type="none" w="med" len="med"/>
+                    </a:lnT>
+                    <a:lnB w="9525" cap="flat" cmpd="sng" algn="ctr">
+                      <a:solidFill>
+                        <a:srgbClr val="C6C4B8"/>
+                      </a:solidFill>
+                      <a:prstDash val="solid"/>
+                      <a:round/>
+                      <a:headEnd type="none" w="med" len="med"/>
+                      <a:tailEnd type="none" w="med" len="med"/>
+                    </a:lnB>
+                    <a:solidFill>
+                      <a:srgbClr val="FFFFFF"/>
+                    </a:solidFill>
+                  </a:tcPr>
+                </a:tc>
+              </a:tr>
+              <a:tr h="457200">
+                <a:tc>
+                  <a:txBody>
+                    <a:bodyPr/>
+                    <a:lstStyle/>
+                    <a:p>
+                      <a:pPr algn="l" indent="0" marL="0">
+                        <a:buNone/>
+                      </a:pPr>
+                      <a:r>
+                        <a:rPr lang="en-US" sz="1050" dirty="0">
+                          <a:solidFill>
+                            <a:srgbClr val="3B4C5E"/>
+                          </a:solidFill>
+                          <a:latin typeface="Calibri" pitchFamily="34" charset="0"/>
+                          <a:ea typeface="Calibri" pitchFamily="34" charset="-122"/>
+                          <a:cs typeface="Calibri" pitchFamily="34" charset="-120"/>
+                        </a:rPr>
+                        <a:t>70 %</a:t>
+                      </a:r>
+                      <a:endParaRPr lang="en-US" sz="1050" dirty="0">
+                        <a:latin typeface="Calibri" charset="0"/>
+                        <a:ea typeface="Calibri" charset="0"/>
+                        <a:cs typeface="Calibri" charset="0"/>
+                      </a:endParaRPr>
+                    </a:p>
+                  </a:txBody>
+                  <a:tcPr marL="91440" marR="91440" marT="45720" marB="45720" anchor="ctr">
+                    <a:lnL w="9525" cap="flat" cmpd="sng" algn="ctr">
+                      <a:solidFill>
+                        <a:srgbClr val="C6C4B8"/>
+                      </a:solidFill>
+                      <a:prstDash val="solid"/>
+                      <a:round/>
+                      <a:headEnd type="none" w="med" len="med"/>
+                      <a:tailEnd type="none" w="med" len="med"/>
+                    </a:lnL>
+                    <a:lnR w="9525" cap="flat" cmpd="sng" algn="ctr">
+                      <a:solidFill>
+                        <a:srgbClr val="C6C4B8"/>
+                      </a:solidFill>
+                      <a:prstDash val="solid"/>
+                      <a:round/>
+                      <a:headEnd type="none" w="med" len="med"/>
+                      <a:tailEnd type="none" w="med" len="med"/>
+                    </a:lnR>
+                    <a:lnT w="9525" cap="flat" cmpd="sng" algn="ctr">
+                      <a:solidFill>
+                        <a:srgbClr val="C6C4B8"/>
+                      </a:solidFill>
+                      <a:prstDash val="solid"/>
+                      <a:round/>
+                      <a:headEnd type="none" w="med" len="med"/>
+                      <a:tailEnd type="none" w="med" len="med"/>
+                    </a:lnT>
+                    <a:lnB w="9525" cap="flat" cmpd="sng" algn="ctr">
+                      <a:solidFill>
+                        <a:srgbClr val="C6C4B8"/>
+                      </a:solidFill>
+                      <a:prstDash val="solid"/>
+                      <a:round/>
+                      <a:headEnd type="none" w="med" len="med"/>
+                      <a:tailEnd type="none" w="med" len="med"/>
+                    </a:lnB>
+                    <a:solidFill>
+                      <a:srgbClr val="FFFFFF"/>
+                    </a:solidFill>
+                  </a:tcPr>
+                </a:tc>
+                <a:tc>
+                  <a:txBody>
+                    <a:bodyPr/>
+                    <a:lstStyle/>
+                    <a:p>
+                      <a:pPr algn="ctr" indent="0" marL="0">
+                        <a:buNone/>
+                      </a:pPr>
+                      <a:r>
+                        <a:rPr lang="en-US" sz="1050" dirty="0">
+                          <a:solidFill>
+                            <a:srgbClr val="3B4C5E"/>
+                          </a:solidFill>
+                          <a:latin typeface="Calibri" pitchFamily="34" charset="0"/>
+                          <a:ea typeface="Calibri" pitchFamily="34" charset="-122"/>
+                          <a:cs typeface="Calibri" pitchFamily="34" charset="-120"/>
+                        </a:rPr>
+                        <a:t>3,90</a:t>
+                      </a:r>
+                      <a:endParaRPr lang="en-US" sz="1050" dirty="0">
+                        <a:latin typeface="Calibri" charset="0"/>
+                        <a:ea typeface="Calibri" charset="0"/>
+                        <a:cs typeface="Calibri" charset="0"/>
+                      </a:endParaRPr>
+                    </a:p>
+                  </a:txBody>
+                  <a:tcPr marL="91440" marR="91440" marT="45720" marB="45720" anchor="ctr">
+                    <a:lnL w="9525" cap="flat" cmpd="sng" algn="ctr">
+                      <a:solidFill>
+                        <a:srgbClr val="C6C4B8"/>
+                      </a:solidFill>
+                      <a:prstDash val="solid"/>
+                      <a:round/>
+                      <a:headEnd type="none" w="med" len="med"/>
+                      <a:tailEnd type="none" w="med" len="med"/>
+                    </a:lnL>
+                    <a:lnR w="9525" cap="flat" cmpd="sng" algn="ctr">
+                      <a:solidFill>
+                        <a:srgbClr val="C6C4B8"/>
+                      </a:solidFill>
+                      <a:prstDash val="solid"/>
+                      <a:round/>
+                      <a:headEnd type="none" w="med" len="med"/>
+                      <a:tailEnd type="none" w="med" len="med"/>
+                    </a:lnR>
+                    <a:lnT w="9525" cap="flat" cmpd="sng" algn="ctr">
+                      <a:solidFill>
+                        <a:srgbClr val="C6C4B8"/>
+                      </a:solidFill>
+                      <a:prstDash val="solid"/>
+                      <a:round/>
+                      <a:headEnd type="none" w="med" len="med"/>
+                      <a:tailEnd type="none" w="med" len="med"/>
+                    </a:lnT>
+                    <a:lnB w="9525" cap="flat" cmpd="sng" algn="ctr">
+                      <a:solidFill>
+                        <a:srgbClr val="C6C4B8"/>
+                      </a:solidFill>
+                      <a:prstDash val="solid"/>
+                      <a:round/>
+                      <a:headEnd type="none" w="med" len="med"/>
+                      <a:tailEnd type="none" w="med" len="med"/>
+                    </a:lnB>
+                    <a:solidFill>
+                      <a:srgbClr val="FFFFFF"/>
+                    </a:solidFill>
+                  </a:tcPr>
+                </a:tc>
+                <a:tc>
+                  <a:txBody>
+                    <a:bodyPr/>
+                    <a:lstStyle/>
+                    <a:p>
+                      <a:pPr algn="ctr" indent="0" marL="0">
+                        <a:buNone/>
+                      </a:pPr>
+                      <a:r>
+                        <a:rPr lang="en-US" sz="1050" dirty="0">
+                          <a:solidFill>
+                            <a:srgbClr val="3B4C5E"/>
+                          </a:solidFill>
+                          <a:latin typeface="Calibri" pitchFamily="34" charset="0"/>
+                          <a:ea typeface="Calibri" pitchFamily="34" charset="-122"/>
+                          <a:cs typeface="Calibri" pitchFamily="34" charset="-120"/>
+                        </a:rPr>
+                        <a:t>4,10</a:t>
+                      </a:r>
+                      <a:endParaRPr lang="en-US" sz="1050" dirty="0">
+                        <a:latin typeface="Calibri" charset="0"/>
+                        <a:ea typeface="Calibri" charset="0"/>
+                        <a:cs typeface="Calibri" charset="0"/>
+                      </a:endParaRPr>
+                    </a:p>
+                  </a:txBody>
+                  <a:tcPr marL="91440" marR="91440" marT="45720" marB="45720" anchor="ctr">
+                    <a:lnL w="9525" cap="flat" cmpd="sng" algn="ctr">
+                      <a:solidFill>
+                        <a:srgbClr val="C6C4B8"/>
+                      </a:solidFill>
+                      <a:prstDash val="solid"/>
+                      <a:round/>
+                      <a:headEnd type="none" w="med" len="med"/>
+                      <a:tailEnd type="none" w="med" len="med"/>
+                    </a:lnL>
+                    <a:lnR w="9525" cap="flat" cmpd="sng" algn="ctr">
+                      <a:solidFill>
+                        <a:srgbClr val="C6C4B8"/>
+                      </a:solidFill>
+                      <a:prstDash val="solid"/>
+                      <a:round/>
+                      <a:headEnd type="none" w="med" len="med"/>
+                      <a:tailEnd type="none" w="med" len="med"/>
+                    </a:lnR>
+                    <a:lnT w="9525" cap="flat" cmpd="sng" algn="ctr">
+                      <a:solidFill>
+                        <a:srgbClr val="C6C4B8"/>
+                      </a:solidFill>
+                      <a:prstDash val="solid"/>
+                      <a:round/>
+                      <a:headEnd type="none" w="med" len="med"/>
+                      <a:tailEnd type="none" w="med" len="med"/>
+                    </a:lnT>
+                    <a:lnB w="9525" cap="flat" cmpd="sng" algn="ctr">
+                      <a:solidFill>
+                        <a:srgbClr val="C6C4B8"/>
+                      </a:solidFill>
+                      <a:prstDash val="solid"/>
+                      <a:round/>
+                      <a:headEnd type="none" w="med" len="med"/>
+                      <a:tailEnd type="none" w="med" len="med"/>
+                    </a:lnB>
+                    <a:solidFill>
+                      <a:srgbClr val="FFFFFF"/>
+                    </a:solidFill>
+                  </a:tcPr>
+                </a:tc>
+                <a:tc>
+                  <a:txBody>
+                    <a:bodyPr/>
+                    <a:lstStyle/>
+                    <a:p>
+                      <a:pPr algn="ctr" indent="0" marL="0">
+                        <a:buNone/>
+                      </a:pPr>
+                      <a:r>
+                        <a:rPr lang="en-US" sz="1050" b="1" dirty="0">
+                          <a:solidFill>
+                            <a:srgbClr val="3B4C5E"/>
+                          </a:solidFill>
+                          <a:latin typeface="Calibri" pitchFamily="34" charset="0"/>
+                          <a:ea typeface="Calibri" pitchFamily="34" charset="-122"/>
+                          <a:cs typeface="Calibri" pitchFamily="34" charset="-120"/>
+                        </a:rPr>
+                        <a:t>B</a:t>
+                      </a:r>
+                      <a:endParaRPr lang="en-US" sz="1050" dirty="0">
+                        <a:latin typeface="Calibri" charset="0"/>
+                        <a:ea typeface="Calibri" charset="0"/>
+                        <a:cs typeface="Calibri" charset="0"/>
+                      </a:endParaRPr>
+                    </a:p>
+                  </a:txBody>
+                  <a:tcPr marL="91440" marR="91440" marT="45720" marB="45720" anchor="ctr">
+                    <a:lnL w="9525" cap="flat" cmpd="sng" algn="ctr">
+                      <a:solidFill>
+                        <a:srgbClr val="C6C4B8"/>
+                      </a:solidFill>
+                      <a:prstDash val="solid"/>
+                      <a:round/>
+                      <a:headEnd type="none" w="med" len="med"/>
+                      <a:tailEnd type="none" w="med" len="med"/>
+                    </a:lnL>
+                    <a:lnR w="9525" cap="flat" cmpd="sng" algn="ctr">
+                      <a:solidFill>
+                        <a:srgbClr val="C6C4B8"/>
+                      </a:solidFill>
+                      <a:prstDash val="solid"/>
+                      <a:round/>
+                      <a:headEnd type="none" w="med" len="med"/>
+                      <a:tailEnd type="none" w="med" len="med"/>
+                    </a:lnR>
+                    <a:lnT w="9525" cap="flat" cmpd="sng" algn="ctr">
+                      <a:solidFill>
+                        <a:srgbClr val="C6C4B8"/>
+                      </a:solidFill>
+                      <a:prstDash val="solid"/>
+                      <a:round/>
+                      <a:headEnd type="none" w="med" len="med"/>
+                      <a:tailEnd type="none" w="med" len="med"/>
+                    </a:lnT>
+                    <a:lnB w="9525" cap="flat" cmpd="sng" algn="ctr">
+                      <a:solidFill>
+                        <a:srgbClr val="C6C4B8"/>
+                      </a:solidFill>
+                      <a:prstDash val="solid"/>
+                      <a:round/>
+                      <a:headEnd type="none" w="med" len="med"/>
+                      <a:tailEnd type="none" w="med" len="med"/>
+                    </a:lnB>
+                    <a:solidFill>
+                      <a:srgbClr val="FFFFFF"/>
+                    </a:solidFill>
+                  </a:tcPr>
+                </a:tc>
+              </a:tr>
+            </a:tbl>
+          </a:graphicData>
+        </a:graphic>
+      </p:graphicFrame>
+      <p:sp>
+        <p:nvSpPr>
+          <p:cNvPr id="11" name="Text 8"/>
+          <p:cNvSpPr txBox="1"/>
+          <p:nvPr/>
+        </p:nvSpPr>
+        <p:spPr>
+          <a:xfrm>
+            <a:off x="4251960" y="3749040"/>
+            <a:ext cx="4434840" cy="868680"/>
+          </a:xfrm>
+          <a:prstGeom prst="rect">
+            <a:avLst/>
+          </a:prstGeom>
+          <a:noFill/>
+          <a:ln/>
+        </p:spPr>
+        <p:txBody>
+          <a:bodyPr wrap="square" lIns="0" tIns="0" rIns="0" bIns="0" rtlCol="0" anchor="t"/>
+          <a:lstStyle/>
+          <a:p>
+            <a:pPr indent="0" marL="0">
+              <a:buNone/>
+            </a:pPr>
+            <a:r>
+              <a:rPr lang="en-US" sz="1150" dirty="0">
+                <a:solidFill>
+                  <a:srgbClr val="3B4C5E"/>
+                </a:solidFill>
+                <a:latin typeface="Calibri" pitchFamily="34" charset="0"/>
+                <a:ea typeface="Calibri" pitchFamily="34" charset="-122"/>
+                <a:cs typeface="Calibri" pitchFamily="34" charset="-120"/>
+              </a:rPr>
+              <a:t>Se pierde la cifra, pero se gana la pregunta: al comité se le puede decir «si ustedes valoran la disponibilidad por encima de ~62 %, cambiamos a B». La IA es buena generando la pregunta incómoda; la respuesta se recalcula siempre.</a:t>
+            </a:r>
+            <a:endParaRPr lang="en-US" sz="1150" dirty="0"/>
+          </a:p>
+        </p:txBody>
+      </p:sp>
+    </p:spTree>
+  </p:cSld>
+  <p:clrMapOvr>
+    <a:masterClrMapping/>
+  </p:clrMapOvr>
+</p:sld>
+</file>
+
+<file path=ppt/slides/slide19.xml><?xml version="1.0" encoding="utf-8"?>
+<p:sld xmlns:a="http://schemas.openxmlformats.org/drawingml/2006/main" xmlns:r="http://schemas.openxmlformats.org/officeDocument/2006/relationships" xmlns:p="http://schemas.openxmlformats.org/presentationml/2006/main">
+  <p:cSld name="Slide 19">
+    <p:bg>
+      <p:bgPr>
+        <a:solidFill>
+          <a:srgbClr val="FFFFFF"/>
+        </a:solidFill>
+      </p:bgPr>
+    </p:bg>
+    <p:spTree>
+      <p:nvGrpSpPr>
+        <p:cNvPr id="1" name=""/>
+        <p:cNvGrpSpPr/>
+        <p:nvPr/>
+      </p:nvGrpSpPr>
+      <p:grpSpPr>
+        <a:xfrm>
+          <a:off x="0" y="0"/>
+          <a:ext cx="0" cy="0"/>
+          <a:chOff x="0" y="0"/>
+          <a:chExt cx="0" cy="0"/>
+        </a:xfrm>
+      </p:grpSpPr>
+      <p:sp>
+        <p:nvSpPr>
+          <p:cNvPr id="2" name="Text 0"/>
+          <p:cNvSpPr txBox="1"/>
+          <p:nvPr/>
+        </p:nvSpPr>
+        <p:spPr>
+          <a:xfrm>
+            <a:off x="457200" y="256032"/>
+            <a:ext cx="8229600" cy="228600"/>
+          </a:xfrm>
+          <a:prstGeom prst="rect">
+            <a:avLst/>
+          </a:prstGeom>
+          <a:noFill/>
+          <a:ln/>
+        </p:spPr>
+        <p:txBody>
+          <a:bodyPr wrap="square" lIns="0" tIns="0" rIns="0" bIns="0" rtlCol="0" anchor="ctr"/>
+          <a:lstStyle/>
+          <a:p>
+            <a:pPr indent="0" marL="0">
+              <a:buNone/>
+            </a:pPr>
+            <a:r>
+              <a:rPr lang="en-US" sz="1000" dirty="0">
+                <a:solidFill>
+                  <a:srgbClr val="5A7189"/>
+                </a:solidFill>
+                <a:latin typeface="Courier New" pitchFamily="34" charset="0"/>
+                <a:ea typeface="Courier New" pitchFamily="34" charset="-122"/>
+                <a:cs typeface="Courier New" pitchFamily="34" charset="-120"/>
+              </a:rPr>
+              <a:t>PARTE 3 · CO-INTELIGENCIA · REGLAS</a:t>
+            </a:r>
+            <a:endParaRPr lang="en-US" sz="1000" dirty="0"/>
+          </a:p>
+        </p:txBody>
+      </p:sp>
+      <p:sp>
+        <p:nvSpPr>
+          <p:cNvPr id="3" name="Text 1"/>
+          <p:cNvSpPr txBox="1"/>
+          <p:nvPr/>
+        </p:nvSpPr>
+        <p:spPr>
+          <a:xfrm>
+            <a:off x="457200" y="502920"/>
+            <a:ext cx="8229600" cy="685800"/>
+          </a:xfrm>
+          <a:prstGeom prst="rect">
+            <a:avLst/>
+          </a:prstGeom>
+          <a:noFill/>
+          <a:ln/>
+        </p:spPr>
+        <p:txBody>
+          <a:bodyPr wrap="square" lIns="0" tIns="0" rIns="0" bIns="0" rtlCol="0" anchor="t"/>
+          <a:lstStyle/>
+          <a:p>
+            <a:pPr indent="0" marL="0">
+              <a:buNone/>
+            </a:pPr>
+            <a:r>
+              <a:rPr lang="en-US" sz="2800" b="1" dirty="0">
+                <a:solidFill>
+                  <a:srgbClr val="16273F"/>
+                </a:solidFill>
+                <a:latin typeface="Calibri" pitchFamily="34" charset="0"/>
+                <a:ea typeface="Calibri" pitchFamily="34" charset="-122"/>
+                <a:cs typeface="Calibri" pitchFamily="34" charset="-120"/>
+              </a:rPr>
+              <a:t>Siete reglas, y qué cambia si la solución lleva IA</a:t>
+            </a:r>
+            <a:endParaRPr lang="en-US" sz="2800" dirty="0"/>
+          </a:p>
+        </p:txBody>
+      </p:sp>
+      <p:sp>
+        <p:nvSpPr>
+          <p:cNvPr id="4" name="Text 2"/>
+          <p:cNvSpPr txBox="1"/>
+          <p:nvPr/>
+        </p:nvSpPr>
+        <p:spPr>
+          <a:xfrm>
+            <a:off x="457200" y="4800600"/>
+            <a:ext cx="5486400" cy="201168"/>
+          </a:xfrm>
+          <a:prstGeom prst="rect">
+            <a:avLst/>
+          </a:prstGeom>
+          <a:noFill/>
+          <a:ln/>
+        </p:spPr>
+        <p:txBody>
+          <a:bodyPr wrap="square" lIns="0" tIns="0" rIns="0" bIns="0" rtlCol="0" anchor="ctr"/>
+          <a:lstStyle/>
+          <a:p>
+            <a:pPr indent="0" marL="0">
+              <a:buNone/>
+            </a:pPr>
+            <a:r>
+              <a:rPr lang="en-US" sz="800" dirty="0">
+                <a:solidFill>
+                  <a:srgbClr val="5A7189"/>
+                </a:solidFill>
+                <a:latin typeface="Courier New" pitchFamily="34" charset="0"/>
+                <a:ea typeface="Courier New" pitchFamily="34" charset="-122"/>
+                <a:cs typeface="Courier New" pitchFamily="34" charset="-120"/>
+              </a:rPr>
+              <a:t>AREM · Taller 7 · Oportunidades y Soluciones</a:t>
+            </a:r>
+            <a:endParaRPr lang="en-US" sz="800" dirty="0"/>
+          </a:p>
+        </p:txBody>
+      </p:sp>
+      <p:sp>
+        <p:nvSpPr>
+          <p:cNvPr id="5" name="Text 3"/>
+          <p:cNvSpPr txBox="1"/>
+          <p:nvPr/>
+        </p:nvSpPr>
+        <p:spPr>
+          <a:xfrm>
+            <a:off x="7772400" y="4800600"/>
+            <a:ext cx="914400" cy="201168"/>
+          </a:xfrm>
+          <a:prstGeom prst="rect">
+            <a:avLst/>
+          </a:prstGeom>
+          <a:noFill/>
+          <a:ln/>
+        </p:spPr>
+        <p:txBody>
+          <a:bodyPr wrap="square" lIns="0" tIns="0" rIns="0" bIns="0" rtlCol="0" anchor="ctr"/>
+          <a:lstStyle/>
+          <a:p>
+            <a:pPr algn="r" indent="0" marL="0">
+              <a:buNone/>
+            </a:pPr>
+            <a:r>
+              <a:rPr lang="en-US" sz="800" dirty="0">
+                <a:solidFill>
+                  <a:srgbClr val="5A7189"/>
+                </a:solidFill>
+                <a:latin typeface="Courier New" pitchFamily="34" charset="0"/>
+                <a:ea typeface="Courier New" pitchFamily="34" charset="-122"/>
+                <a:cs typeface="Courier New" pitchFamily="34" charset="-120"/>
+              </a:rPr>
+              <a:t>19</a:t>
+            </a:r>
+            <a:endParaRPr lang="en-US" sz="800" dirty="0"/>
+          </a:p>
+        </p:txBody>
+      </p:sp>
+      <p:sp>
+        <p:nvSpPr>
+          <p:cNvPr id="6" name="Shape 4"/>
+          <p:cNvSpPr/>
+          <p:nvPr/>
+        </p:nvSpPr>
+        <p:spPr>
+          <a:xfrm>
+            <a:off x="457200" y="1325880"/>
+            <a:ext cx="329184" cy="329184"/>
+          </a:xfrm>
+          <a:prstGeom prst="ellipse">
+            <a:avLst/>
+          </a:prstGeom>
+          <a:solidFill>
+            <a:srgbClr val="16273F"/>
+          </a:solidFill>
+          <a:ln w="12700">
+            <a:solidFill>
+              <a:srgbClr val="16273F"/>
+            </a:solidFill>
+            <a:prstDash val="solid"/>
+          </a:ln>
+        </p:spPr>
+      </p:sp>
+      <p:sp>
+        <p:nvSpPr>
+          <p:cNvPr id="7" name="Text 5"/>
+          <p:cNvSpPr txBox="1"/>
+          <p:nvPr/>
+        </p:nvSpPr>
+        <p:spPr>
+          <a:xfrm>
+            <a:off x="457200" y="1325880"/>
+            <a:ext cx="329184" cy="329184"/>
+          </a:xfrm>
+          <a:prstGeom prst="rect">
+            <a:avLst/>
+          </a:prstGeom>
+          <a:noFill/>
+          <a:ln/>
+        </p:spPr>
+        <p:txBody>
+          <a:bodyPr wrap="square" lIns="0" tIns="0" rIns="0" bIns="0" rtlCol="0" anchor="ctr"/>
+          <a:lstStyle/>
+          <a:p>
+            <a:pPr algn="ctr" indent="0" marL="0">
+              <a:buNone/>
+            </a:pPr>
+            <a:r>
+              <a:rPr lang="en-US" sz="1200" b="1" dirty="0">
+                <a:solidFill>
+                  <a:srgbClr val="FFFFFF"/>
+                </a:solidFill>
+                <a:latin typeface="Courier New" pitchFamily="34" charset="0"/>
+                <a:ea typeface="Courier New" pitchFamily="34" charset="-122"/>
+                <a:cs typeface="Courier New" pitchFamily="34" charset="-120"/>
+              </a:rPr>
+              <a:t>1</a:t>
+            </a:r>
+            <a:endParaRPr lang="en-US" sz="1200" dirty="0"/>
+          </a:p>
+        </p:txBody>
+      </p:sp>
+      <p:sp>
+        <p:nvSpPr>
+          <p:cNvPr id="8" name="Text 6"/>
+          <p:cNvSpPr txBox="1"/>
+          <p:nvPr/>
+        </p:nvSpPr>
+        <p:spPr>
+          <a:xfrm>
+            <a:off x="914400" y="1325880"/>
+            <a:ext cx="3931920" cy="365760"/>
+          </a:xfrm>
+          <a:prstGeom prst="rect">
+            <a:avLst/>
+          </a:prstGeom>
+          <a:noFill/>
+          <a:ln/>
+        </p:spPr>
+        <p:txBody>
+          <a:bodyPr wrap="square" lIns="0" tIns="0" rIns="0" bIns="0" rtlCol="0" anchor="ctr"/>
+          <a:lstStyle/>
+          <a:p>
+            <a:pPr indent="0" marL="0">
+              <a:buNone/>
+            </a:pPr>
+            <a:r>
+              <a:rPr lang="en-US" sz="1150" dirty="0">
+                <a:solidFill>
+                  <a:srgbClr val="3B4C5E"/>
+                </a:solidFill>
+                <a:latin typeface="Calibri" pitchFamily="34" charset="0"/>
+                <a:ea typeface="Calibri" pitchFamily="34" charset="-122"/>
+                <a:cs typeface="Calibri" pitchFamily="34" charset="-120"/>
+              </a:rPr>
+              <a:t>La IA propone, el equipo justifica</a:t>
+            </a:r>
+            <a:endParaRPr lang="en-US" sz="1150" dirty="0"/>
+          </a:p>
+        </p:txBody>
+      </p:sp>
+      <p:sp>
+        <p:nvSpPr>
+          <p:cNvPr id="9" name="Shape 7"/>
+          <p:cNvSpPr/>
+          <p:nvPr/>
+        </p:nvSpPr>
+        <p:spPr>
+          <a:xfrm>
+            <a:off x="457200" y="1783080"/>
+            <a:ext cx="329184" cy="329184"/>
+          </a:xfrm>
+          <a:prstGeom prst="ellipse">
+            <a:avLst/>
+          </a:prstGeom>
+          <a:solidFill>
+            <a:srgbClr val="16273F"/>
+          </a:solidFill>
+          <a:ln w="12700">
+            <a:solidFill>
+              <a:srgbClr val="16273F"/>
+            </a:solidFill>
+            <a:prstDash val="solid"/>
+          </a:ln>
+        </p:spPr>
+      </p:sp>
+      <p:sp>
+        <p:nvSpPr>
+          <p:cNvPr id="10" name="Text 8"/>
+          <p:cNvSpPr txBox="1"/>
+          <p:nvPr/>
+        </p:nvSpPr>
+        <p:spPr>
+          <a:xfrm>
+            <a:off x="457200" y="1783080"/>
+            <a:ext cx="329184" cy="329184"/>
+          </a:xfrm>
+          <a:prstGeom prst="rect">
+            <a:avLst/>
+          </a:prstGeom>
+          <a:noFill/>
+          <a:ln/>
+        </p:spPr>
+        <p:txBody>
+          <a:bodyPr wrap="square" lIns="0" tIns="0" rIns="0" bIns="0" rtlCol="0" anchor="ctr"/>
+          <a:lstStyle/>
+          <a:p>
+            <a:pPr algn="ctr" indent="0" marL="0">
+              <a:buNone/>
+            </a:pPr>
+            <a:r>
+              <a:rPr lang="en-US" sz="1200" b="1" dirty="0">
+                <a:solidFill>
+                  <a:srgbClr val="FFFFFF"/>
+                </a:solidFill>
+                <a:latin typeface="Courier New" pitchFamily="34" charset="0"/>
+                <a:ea typeface="Courier New" pitchFamily="34" charset="-122"/>
+                <a:cs typeface="Courier New" pitchFamily="34" charset="-120"/>
+              </a:rPr>
+              <a:t>2</a:t>
+            </a:r>
+            <a:endParaRPr lang="en-US" sz="1200" dirty="0"/>
+          </a:p>
+        </p:txBody>
+      </p:sp>
+      <p:sp>
+        <p:nvSpPr>
+          <p:cNvPr id="11" name="Text 9"/>
+          <p:cNvSpPr txBox="1"/>
+          <p:nvPr/>
+        </p:nvSpPr>
+        <p:spPr>
+          <a:xfrm>
+            <a:off x="914400" y="1783080"/>
+            <a:ext cx="3931920" cy="365760"/>
+          </a:xfrm>
+          <a:prstGeom prst="rect">
+            <a:avLst/>
+          </a:prstGeom>
+          <a:noFill/>
+          <a:ln/>
+        </p:spPr>
+        <p:txBody>
+          <a:bodyPr wrap="square" lIns="0" tIns="0" rIns="0" bIns="0" rtlCol="0" anchor="ctr"/>
+          <a:lstStyle/>
+          <a:p>
+            <a:pPr indent="0" marL="0">
+              <a:buNone/>
+            </a:pPr>
+            <a:r>
+              <a:rPr lang="en-US" sz="1150" dirty="0">
+                <a:solidFill>
+                  <a:srgbClr val="3B4C5E"/>
+                </a:solidFill>
+                <a:latin typeface="Calibri" pitchFamily="34" charset="0"/>
+                <a:ea typeface="Calibri" pitchFamily="34" charset="-122"/>
+                <a:cs typeface="Calibri" pitchFamily="34" charset="-120"/>
+              </a:rPr>
+              <a:t>Los pesos no se delegan: los fija el negocio</a:t>
+            </a:r>
+            <a:endParaRPr lang="en-US" sz="1150" dirty="0"/>
+          </a:p>
+        </p:txBody>
+      </p:sp>
+      <p:sp>
+        <p:nvSpPr>
+          <p:cNvPr id="12" name="Shape 10"/>
+          <p:cNvSpPr/>
+          <p:nvPr/>
+        </p:nvSpPr>
+        <p:spPr>
+          <a:xfrm>
+            <a:off x="457200" y="2240280"/>
+            <a:ext cx="329184" cy="329184"/>
+          </a:xfrm>
+          <a:prstGeom prst="ellipse">
+            <a:avLst/>
+          </a:prstGeom>
+          <a:solidFill>
+            <a:srgbClr val="B4552B"/>
+          </a:solidFill>
+          <a:ln w="12700">
+            <a:solidFill>
+              <a:srgbClr val="B4552B"/>
+            </a:solidFill>
+            <a:prstDash val="solid"/>
+          </a:ln>
+        </p:spPr>
+      </p:sp>
+      <p:sp>
+        <p:nvSpPr>
+          <p:cNvPr id="13" name="Text 11"/>
+          <p:cNvSpPr txBox="1"/>
+          <p:nvPr/>
+        </p:nvSpPr>
+        <p:spPr>
+          <a:xfrm>
+            <a:off x="457200" y="2240280"/>
+            <a:ext cx="329184" cy="329184"/>
+          </a:xfrm>
+          <a:prstGeom prst="rect">
+            <a:avLst/>
+          </a:prstGeom>
+          <a:noFill/>
+          <a:ln/>
+        </p:spPr>
+        <p:txBody>
+          <a:bodyPr wrap="square" lIns="0" tIns="0" rIns="0" bIns="0" rtlCol="0" anchor="ctr"/>
+          <a:lstStyle/>
+          <a:p>
+            <a:pPr algn="ctr" indent="0" marL="0">
+              <a:buNone/>
+            </a:pPr>
+            <a:r>
+              <a:rPr lang="en-US" sz="1200" b="1" dirty="0">
+                <a:solidFill>
+                  <a:srgbClr val="FFFFFF"/>
+                </a:solidFill>
+                <a:latin typeface="Courier New" pitchFamily="34" charset="0"/>
+                <a:ea typeface="Courier New" pitchFamily="34" charset="-122"/>
+                <a:cs typeface="Courier New" pitchFamily="34" charset="-120"/>
+              </a:rPr>
+              <a:t>3</a:t>
+            </a:r>
+            <a:endParaRPr lang="en-US" sz="1200" dirty="0"/>
+          </a:p>
+        </p:txBody>
+      </p:sp>
+      <p:sp>
+        <p:nvSpPr>
+          <p:cNvPr id="14" name="Text 12"/>
+          <p:cNvSpPr txBox="1"/>
+          <p:nvPr/>
+        </p:nvSpPr>
+        <p:spPr>
+          <a:xfrm>
+            <a:off x="914400" y="2240280"/>
+            <a:ext cx="3931920" cy="365760"/>
+          </a:xfrm>
+          <a:prstGeom prst="rect">
+            <a:avLst/>
+          </a:prstGeom>
+          <a:noFill/>
+          <a:ln/>
+        </p:spPr>
+        <p:txBody>
+          <a:bodyPr wrap="square" lIns="0" tIns="0" rIns="0" bIns="0" rtlCol="0" anchor="ctr"/>
+          <a:lstStyle/>
+          <a:p>
+            <a:pPr indent="0" marL="0">
+              <a:buNone/>
+            </a:pPr>
+            <a:r>
+              <a:rPr lang="en-US" sz="1150" dirty="0">
+                <a:solidFill>
+                  <a:srgbClr val="3B4C5E"/>
+                </a:solidFill>
+                <a:latin typeface="Calibri" pitchFamily="34" charset="0"/>
+                <a:ea typeface="Calibri" pitchFamily="34" charset="-122"/>
+                <a:cs typeface="Calibri" pitchFamily="34" charset="-120"/>
+              </a:rPr>
+              <a:t>Toda cifra o afirmación se verifica o se recalcula</a:t>
+            </a:r>
+            <a:endParaRPr lang="en-US" sz="1150" dirty="0"/>
+          </a:p>
+        </p:txBody>
+      </p:sp>
+      <p:sp>
+        <p:nvSpPr>
+          <p:cNvPr id="15" name="Shape 13"/>
+          <p:cNvSpPr/>
+          <p:nvPr/>
+        </p:nvSpPr>
+        <p:spPr>
+          <a:xfrm>
+            <a:off x="457200" y="2697480"/>
+            <a:ext cx="329184" cy="329184"/>
+          </a:xfrm>
+          <a:prstGeom prst="ellipse">
+            <a:avLst/>
+          </a:prstGeom>
+          <a:solidFill>
+            <a:srgbClr val="16273F"/>
+          </a:solidFill>
+          <a:ln w="12700">
+            <a:solidFill>
+              <a:srgbClr val="16273F"/>
+            </a:solidFill>
+            <a:prstDash val="solid"/>
+          </a:ln>
+        </p:spPr>
+      </p:sp>
+      <p:sp>
+        <p:nvSpPr>
+          <p:cNvPr id="16" name="Text 14"/>
+          <p:cNvSpPr txBox="1"/>
+          <p:nvPr/>
+        </p:nvSpPr>
+        <p:spPr>
+          <a:xfrm>
+            <a:off x="457200" y="2697480"/>
+            <a:ext cx="329184" cy="329184"/>
+          </a:xfrm>
+          <a:prstGeom prst="rect">
+            <a:avLst/>
+          </a:prstGeom>
+          <a:noFill/>
+          <a:ln/>
+        </p:spPr>
+        <p:txBody>
+          <a:bodyPr wrap="square" lIns="0" tIns="0" rIns="0" bIns="0" rtlCol="0" anchor="ctr"/>
+          <a:lstStyle/>
+          <a:p>
+            <a:pPr algn="ctr" indent="0" marL="0">
+              <a:buNone/>
+            </a:pPr>
+            <a:r>
+              <a:rPr lang="en-US" sz="1200" b="1" dirty="0">
+                <a:solidFill>
+                  <a:srgbClr val="FFFFFF"/>
+                </a:solidFill>
+                <a:latin typeface="Courier New" pitchFamily="34" charset="0"/>
+                <a:ea typeface="Courier New" pitchFamily="34" charset="-122"/>
+                <a:cs typeface="Courier New" pitchFamily="34" charset="-120"/>
+              </a:rPr>
+              <a:t>4</a:t>
+            </a:r>
+            <a:endParaRPr lang="en-US" sz="1200" dirty="0"/>
+          </a:p>
+        </p:txBody>
+      </p:sp>
+      <p:sp>
+        <p:nvSpPr>
+          <p:cNvPr id="17" name="Text 15"/>
+          <p:cNvSpPr txBox="1"/>
+          <p:nvPr/>
+        </p:nvSpPr>
+        <p:spPr>
+          <a:xfrm>
+            <a:off x="914400" y="2697480"/>
+            <a:ext cx="3931920" cy="365760"/>
+          </a:xfrm>
+          <a:prstGeom prst="rect">
+            <a:avLst/>
+          </a:prstGeom>
+          <a:noFill/>
+          <a:ln/>
+        </p:spPr>
+        <p:txBody>
+          <a:bodyPr wrap="square" lIns="0" tIns="0" rIns="0" bIns="0" rtlCol="0" anchor="ctr"/>
+          <a:lstStyle/>
+          <a:p>
+            <a:pPr indent="0" marL="0">
+              <a:buNone/>
+            </a:pPr>
+            <a:r>
+              <a:rPr lang="en-US" sz="1150" dirty="0">
+                <a:solidFill>
+                  <a:srgbClr val="3B4C5E"/>
+                </a:solidFill>
+                <a:latin typeface="Calibri" pitchFamily="34" charset="0"/>
+                <a:ea typeface="Calibri" pitchFamily="34" charset="-122"/>
+                <a:cs typeface="Calibri" pitchFamily="34" charset="-120"/>
+              </a:rPr>
+              <a:t>Puntúe primero usted, compare después</a:t>
+            </a:r>
+            <a:endParaRPr lang="en-US" sz="1150" dirty="0"/>
+          </a:p>
+        </p:txBody>
+      </p:sp>
+      <p:sp>
+        <p:nvSpPr>
+          <p:cNvPr id="18" name="Shape 16"/>
+          <p:cNvSpPr/>
+          <p:nvPr/>
+        </p:nvSpPr>
+        <p:spPr>
+          <a:xfrm>
+            <a:off x="457200" y="3154680"/>
+            <a:ext cx="329184" cy="329184"/>
+          </a:xfrm>
+          <a:prstGeom prst="ellipse">
+            <a:avLst/>
+          </a:prstGeom>
+          <a:solidFill>
+            <a:srgbClr val="16273F"/>
+          </a:solidFill>
+          <a:ln w="12700">
+            <a:solidFill>
+              <a:srgbClr val="16273F"/>
+            </a:solidFill>
+            <a:prstDash val="solid"/>
+          </a:ln>
+        </p:spPr>
+      </p:sp>
+      <p:sp>
+        <p:nvSpPr>
+          <p:cNvPr id="19" name="Text 17"/>
+          <p:cNvSpPr txBox="1"/>
+          <p:nvPr/>
+        </p:nvSpPr>
+        <p:spPr>
+          <a:xfrm>
+            <a:off x="457200" y="3154680"/>
+            <a:ext cx="329184" cy="329184"/>
+          </a:xfrm>
+          <a:prstGeom prst="rect">
+            <a:avLst/>
+          </a:prstGeom>
+          <a:noFill/>
+          <a:ln/>
+        </p:spPr>
+        <p:txBody>
+          <a:bodyPr wrap="square" lIns="0" tIns="0" rIns="0" bIns="0" rtlCol="0" anchor="ctr"/>
+          <a:lstStyle/>
+          <a:p>
+            <a:pPr algn="ctr" indent="0" marL="0">
+              <a:buNone/>
+            </a:pPr>
+            <a:r>
+              <a:rPr lang="en-US" sz="1200" b="1" dirty="0">
+                <a:solidFill>
+                  <a:srgbClr val="FFFFFF"/>
+                </a:solidFill>
+                <a:latin typeface="Courier New" pitchFamily="34" charset="0"/>
+                <a:ea typeface="Courier New" pitchFamily="34" charset="-122"/>
+                <a:cs typeface="Courier New" pitchFamily="34" charset="-120"/>
+              </a:rPr>
+              <a:t>5</a:t>
+            </a:r>
+            <a:endParaRPr lang="en-US" sz="1200" dirty="0"/>
+          </a:p>
+        </p:txBody>
+      </p:sp>
+      <p:sp>
+        <p:nvSpPr>
+          <p:cNvPr id="20" name="Text 18"/>
+          <p:cNvSpPr txBox="1"/>
+          <p:nvPr/>
+        </p:nvSpPr>
+        <p:spPr>
+          <a:xfrm>
+            <a:off x="914400" y="3154680"/>
+            <a:ext cx="3931920" cy="365760"/>
+          </a:xfrm>
+          <a:prstGeom prst="rect">
+            <a:avLst/>
+          </a:prstGeom>
+          <a:noFill/>
+          <a:ln/>
+        </p:spPr>
+        <p:txBody>
+          <a:bodyPr wrap="square" lIns="0" tIns="0" rIns="0" bIns="0" rtlCol="0" anchor="ctr"/>
+          <a:lstStyle/>
+          <a:p>
+            <a:pPr indent="0" marL="0">
+              <a:buNone/>
+            </a:pPr>
+            <a:r>
+              <a:rPr lang="en-US" sz="1150" dirty="0">
+                <a:solidFill>
+                  <a:srgbClr val="3B4C5E"/>
+                </a:solidFill>
+                <a:latin typeface="Calibri" pitchFamily="34" charset="0"/>
+                <a:ea typeface="Calibri" pitchFamily="34" charset="-122"/>
+                <a:cs typeface="Calibri" pitchFamily="34" charset="-120"/>
+              </a:rPr>
+              <a:t>Pida también la contra-opinión (no solo la opción popular)</a:t>
+            </a:r>
+            <a:endParaRPr lang="en-US" sz="1150" dirty="0"/>
+          </a:p>
+        </p:txBody>
+      </p:sp>
+      <p:sp>
+        <p:nvSpPr>
+          <p:cNvPr id="21" name="Shape 19"/>
+          <p:cNvSpPr/>
+          <p:nvPr/>
+        </p:nvSpPr>
+        <p:spPr>
+          <a:xfrm>
+            <a:off x="457200" y="3611880"/>
+            <a:ext cx="329184" cy="329184"/>
+          </a:xfrm>
+          <a:prstGeom prst="ellipse">
+            <a:avLst/>
+          </a:prstGeom>
+          <a:solidFill>
+            <a:srgbClr val="16273F"/>
+          </a:solidFill>
+          <a:ln w="12700">
+            <a:solidFill>
+              <a:srgbClr val="16273F"/>
+            </a:solidFill>
+            <a:prstDash val="solid"/>
+          </a:ln>
+        </p:spPr>
+      </p:sp>
+      <p:sp>
+        <p:nvSpPr>
+          <p:cNvPr id="22" name="Text 20"/>
+          <p:cNvSpPr txBox="1"/>
+          <p:nvPr/>
+        </p:nvSpPr>
+        <p:spPr>
+          <a:xfrm>
+            <a:off x="457200" y="3611880"/>
+            <a:ext cx="329184" cy="329184"/>
+          </a:xfrm>
+          <a:prstGeom prst="rect">
+            <a:avLst/>
+          </a:prstGeom>
+          <a:noFill/>
+          <a:ln/>
+        </p:spPr>
+        <p:txBody>
+          <a:bodyPr wrap="square" lIns="0" tIns="0" rIns="0" bIns="0" rtlCol="0" anchor="ctr"/>
+          <a:lstStyle/>
+          <a:p>
+            <a:pPr algn="ctr" indent="0" marL="0">
+              <a:buNone/>
+            </a:pPr>
+            <a:r>
+              <a:rPr lang="en-US" sz="1200" b="1" dirty="0">
+                <a:solidFill>
+                  <a:srgbClr val="FFFFFF"/>
+                </a:solidFill>
+                <a:latin typeface="Courier New" pitchFamily="34" charset="0"/>
+                <a:ea typeface="Courier New" pitchFamily="34" charset="-122"/>
+                <a:cs typeface="Courier New" pitchFamily="34" charset="-120"/>
+              </a:rPr>
+              <a:t>6</a:t>
+            </a:r>
+            <a:endParaRPr lang="en-US" sz="1200" dirty="0"/>
+          </a:p>
+        </p:txBody>
+      </p:sp>
+      <p:sp>
+        <p:nvSpPr>
+          <p:cNvPr id="23" name="Text 21"/>
+          <p:cNvSpPr txBox="1"/>
+          <p:nvPr/>
+        </p:nvSpPr>
+        <p:spPr>
+          <a:xfrm>
+            <a:off x="914400" y="3611880"/>
+            <a:ext cx="3931920" cy="365760"/>
+          </a:xfrm>
+          <a:prstGeom prst="rect">
+            <a:avLst/>
+          </a:prstGeom>
+          <a:noFill/>
+          <a:ln/>
+        </p:spPr>
+        <p:txBody>
+          <a:bodyPr wrap="square" lIns="0" tIns="0" rIns="0" bIns="0" rtlCol="0" anchor="ctr"/>
+          <a:lstStyle/>
+          <a:p>
+            <a:pPr indent="0" marL="0">
+              <a:buNone/>
+            </a:pPr>
+            <a:r>
+              <a:rPr lang="en-US" sz="1150" dirty="0">
+                <a:solidFill>
+                  <a:srgbClr val="3B4C5E"/>
+                </a:solidFill>
+                <a:latin typeface="Calibri" pitchFamily="34" charset="0"/>
+                <a:ea typeface="Calibri" pitchFamily="34" charset="-122"/>
+                <a:cs typeface="Calibri" pitchFamily="34" charset="-120"/>
+              </a:rPr>
+              <a:t>Anonimice al cliente o confirme que autoriza la herramienta</a:t>
+            </a:r>
+            <a:endParaRPr lang="en-US" sz="1150" dirty="0"/>
+          </a:p>
+        </p:txBody>
+      </p:sp>
+      <p:sp>
+        <p:nvSpPr>
+          <p:cNvPr id="24" name="Shape 22"/>
+          <p:cNvSpPr/>
+          <p:nvPr/>
+        </p:nvSpPr>
+        <p:spPr>
+          <a:xfrm>
+            <a:off x="457200" y="4069080"/>
+            <a:ext cx="329184" cy="329184"/>
+          </a:xfrm>
+          <a:prstGeom prst="ellipse">
+            <a:avLst/>
+          </a:prstGeom>
+          <a:solidFill>
+            <a:srgbClr val="16273F"/>
+          </a:solidFill>
+          <a:ln w="12700">
+            <a:solidFill>
+              <a:srgbClr val="16273F"/>
+            </a:solidFill>
+            <a:prstDash val="solid"/>
+          </a:ln>
+        </p:spPr>
+      </p:sp>
+      <p:sp>
+        <p:nvSpPr>
+          <p:cNvPr id="25" name="Text 23"/>
+          <p:cNvSpPr txBox="1"/>
+          <p:nvPr/>
+        </p:nvSpPr>
+        <p:spPr>
+          <a:xfrm>
+            <a:off x="457200" y="4069080"/>
+            <a:ext cx="329184" cy="329184"/>
+          </a:xfrm>
+          <a:prstGeom prst="rect">
+            <a:avLst/>
+          </a:prstGeom>
+          <a:noFill/>
+          <a:ln/>
+        </p:spPr>
+        <p:txBody>
+          <a:bodyPr wrap="square" lIns="0" tIns="0" rIns="0" bIns="0" rtlCol="0" anchor="ctr"/>
+          <a:lstStyle/>
+          <a:p>
+            <a:pPr algn="ctr" indent="0" marL="0">
+              <a:buNone/>
+            </a:pPr>
+            <a:r>
+              <a:rPr lang="en-US" sz="1200" b="1" dirty="0">
+                <a:solidFill>
+                  <a:srgbClr val="FFFFFF"/>
+                </a:solidFill>
+                <a:latin typeface="Courier New" pitchFamily="34" charset="0"/>
+                <a:ea typeface="Courier New" pitchFamily="34" charset="-122"/>
+                <a:cs typeface="Courier New" pitchFamily="34" charset="-120"/>
+              </a:rPr>
+              <a:t>7</a:t>
+            </a:r>
+            <a:endParaRPr lang="en-US" sz="1200" dirty="0"/>
+          </a:p>
+        </p:txBody>
+      </p:sp>
+      <p:sp>
+        <p:nvSpPr>
+          <p:cNvPr id="26" name="Text 24"/>
+          <p:cNvSpPr txBox="1"/>
+          <p:nvPr/>
+        </p:nvSpPr>
+        <p:spPr>
+          <a:xfrm>
+            <a:off x="914400" y="4069080"/>
+            <a:ext cx="3931920" cy="365760"/>
+          </a:xfrm>
+          <a:prstGeom prst="rect">
+            <a:avLst/>
+          </a:prstGeom>
+          <a:noFill/>
+          <a:ln/>
+        </p:spPr>
+        <p:txBody>
+          <a:bodyPr wrap="square" lIns="0" tIns="0" rIns="0" bIns="0" rtlCol="0" anchor="ctr"/>
+          <a:lstStyle/>
+          <a:p>
+            <a:pPr indent="0" marL="0">
+              <a:buNone/>
+            </a:pPr>
+            <a:r>
+              <a:rPr lang="en-US" sz="1150" dirty="0">
+                <a:solidFill>
+                  <a:srgbClr val="3B4C5E"/>
+                </a:solidFill>
+                <a:latin typeface="Calibri" pitchFamily="34" charset="0"/>
+                <a:ea typeface="Calibri" pitchFamily="34" charset="-122"/>
+                <a:cs typeface="Calibri" pitchFamily="34" charset="-120"/>
+              </a:rPr>
+              <a:t>Registre qué propuso la IA y qué cambió el equipo</a:t>
+            </a:r>
+            <a:endParaRPr lang="en-US" sz="1150" dirty="0"/>
+          </a:p>
+        </p:txBody>
+      </p:sp>
+      <p:sp>
+        <p:nvSpPr>
+          <p:cNvPr id="27" name="Shape 25"/>
+          <p:cNvSpPr/>
+          <p:nvPr/>
+        </p:nvSpPr>
+        <p:spPr>
+          <a:xfrm>
+            <a:off x="5120640" y="1325880"/>
+            <a:ext cx="3566160" cy="3200400"/>
+          </a:xfrm>
+          <a:prstGeom prst="rect">
+            <a:avLst/>
+          </a:prstGeom>
+          <a:solidFill>
+            <a:srgbClr val="F3F6F8"/>
+          </a:solidFill>
+          <a:ln w="9525">
+            <a:solidFill>
+              <a:srgbClr val="C6C4B8"/>
+            </a:solidFill>
+            <a:prstDash val="solid"/>
+          </a:ln>
+        </p:spPr>
+      </p:sp>
+      <p:sp>
+        <p:nvSpPr>
+          <p:cNvPr id="28" name="Text 26"/>
+          <p:cNvSpPr txBox="1"/>
+          <p:nvPr/>
+        </p:nvSpPr>
+        <p:spPr>
+          <a:xfrm>
+            <a:off x="5257800" y="1417320"/>
+            <a:ext cx="3291840" cy="3017520"/>
+          </a:xfrm>
+          <a:prstGeom prst="rect">
+            <a:avLst/>
+          </a:prstGeom>
+          <a:noFill/>
+          <a:ln/>
+        </p:spPr>
+        <p:txBody>
+          <a:bodyPr wrap="square" lIns="0" tIns="0" rIns="0" bIns="0" rtlCol="0" anchor="t"/>
+          <a:lstStyle/>
+          <a:p>
+            <a:pPr indent="0" marL="0">
+              <a:spcAft>
+                <a:spcPts val="400"/>
+              </a:spcAft>
+              <a:buNone/>
+            </a:pPr>
+            <a:r>
+              <a:rPr lang="en-US" sz="1300" b="1" dirty="0">
+                <a:solidFill>
+                  <a:srgbClr val="16273F"/>
+                </a:solidFill>
+                <a:latin typeface="Calibri" pitchFamily="34" charset="0"/>
+                <a:ea typeface="Calibri" pitchFamily="34" charset="-122"/>
+                <a:cs typeface="Calibri" pitchFamily="34" charset="-120"/>
+              </a:rPr>
+              <a:t>Si una opción incluye IA</a:t>
+            </a:r>
+            <a:endParaRPr lang="en-US" sz="1150" dirty="0"/>
+          </a:p>
+          <a:p>
+            <a:pPr indent="0" marL="0">
+              <a:spcAft>
+                <a:spcPts val="300"/>
+              </a:spcAft>
+              <a:buNone/>
+            </a:pPr>
+            <a:r>
+              <a:rPr lang="en-US" sz="1150" dirty="0">
+                <a:solidFill>
+                  <a:srgbClr val="3B4C5E"/>
+                </a:solidFill>
+                <a:latin typeface="Calibri" pitchFamily="34" charset="0"/>
+                <a:ea typeface="Calibri" pitchFamily="34" charset="-122"/>
+                <a:cs typeface="Calibri" pitchFamily="34" charset="-120"/>
+              </a:rPr>
+              <a:t>Agregue criterios a la matriz:</a:t>
+            </a:r>
+            <a:endParaRPr lang="en-US" sz="1150" dirty="0"/>
+          </a:p>
+          <a:p>
+            <a:pPr marL="342900" indent="-342900">
+              <a:buSzPct val="100000"/>
+              <a:buChar char="•"/>
+            </a:pPr>
+            <a:r>
+              <a:rPr lang="en-US" sz="1150" dirty="0">
+                <a:solidFill>
+                  <a:srgbClr val="3B4C5E"/>
+                </a:solidFill>
+                <a:latin typeface="Calibri" pitchFamily="34" charset="0"/>
+                <a:ea typeface="Calibri" pitchFamily="34" charset="-122"/>
+                <a:cs typeface="Calibri" pitchFamily="34" charset="-120"/>
+              </a:rPr>
+              <a:t>Autonomía y supervisión humana</a:t>
+            </a:r>
+            <a:endParaRPr lang="en-US" sz="1150" dirty="0"/>
+          </a:p>
+          <a:p>
+            <a:pPr marL="342900" indent="-342900">
+              <a:buSzPct val="100000"/>
+              <a:buChar char="•"/>
+            </a:pPr>
+            <a:r>
+              <a:rPr lang="en-US" sz="1150" dirty="0">
+                <a:solidFill>
+                  <a:srgbClr val="3B4C5E"/>
+                </a:solidFill>
+                <a:latin typeface="Calibri" pitchFamily="34" charset="0"/>
+                <a:ea typeface="Calibri" pitchFamily="34" charset="-122"/>
+                <a:cs typeface="Calibri" pitchFamily="34" charset="-120"/>
+              </a:rPr>
+              <a:t>Tríada letal (Taller 5)</a:t>
+            </a:r>
+            <a:endParaRPr lang="en-US" sz="1150" dirty="0"/>
+          </a:p>
+          <a:p>
+            <a:pPr marL="342900" indent="-342900">
+              <a:buSzPct val="100000"/>
+              <a:buChar char="•"/>
+            </a:pPr>
+            <a:r>
+              <a:rPr lang="en-US" sz="1150" dirty="0">
+                <a:solidFill>
+                  <a:srgbClr val="3B4C5E"/>
+                </a:solidFill>
+                <a:latin typeface="Calibri" pitchFamily="34" charset="0"/>
+                <a:ea typeface="Calibri" pitchFamily="34" charset="-122"/>
+                <a:cs typeface="Calibri" pitchFamily="34" charset="-120"/>
+              </a:rPr>
+              <a:t>Fiabilidad: qué pasa si alucina</a:t>
+            </a:r>
+            <a:endParaRPr lang="en-US" sz="1150" dirty="0"/>
+          </a:p>
+          <a:p>
+            <a:pPr marL="342900" indent="-342900">
+              <a:spcAft>
+                <a:spcPts val="500"/>
+              </a:spcAft>
+              <a:buSzPct val="100000"/>
+              <a:buChar char="•"/>
+            </a:pPr>
+            <a:r>
+              <a:rPr lang="en-US" sz="1150" dirty="0">
+                <a:solidFill>
+                  <a:srgbClr val="3B4C5E"/>
+                </a:solidFill>
+                <a:latin typeface="Calibri" pitchFamily="34" charset="0"/>
+                <a:ea typeface="Calibri" pitchFamily="34" charset="-122"/>
+                <a:cs typeface="Calibri" pitchFamily="34" charset="-120"/>
+              </a:rPr>
+              <a:t>Costo variable y dependencia del proveedor del modelo</a:t>
+            </a:r>
+            <a:endParaRPr lang="en-US" sz="1150" dirty="0"/>
+          </a:p>
+          <a:p>
+            <a:pPr indent="0" marL="0">
+              <a:buNone/>
+            </a:pPr>
+            <a:r>
+              <a:rPr lang="en-US" sz="1150" i="1" dirty="0">
+                <a:solidFill>
+                  <a:srgbClr val="3B4C5E"/>
+                </a:solidFill>
+                <a:latin typeface="Calibri" pitchFamily="34" charset="0"/>
+                <a:ea typeface="Calibri" pitchFamily="34" charset="-122"/>
+                <a:cs typeface="Calibri" pitchFamily="34" charset="-120"/>
+              </a:rPr>
+              <a:t>Ejemplo: el chatbot de RedExpress (idea #7) se modela con el patrón de sistemas agénticos, no como caja negra.</a:t>
+            </a:r>
+            <a:endParaRPr lang="en-US" sz="1150" dirty="0"/>
+          </a:p>
+        </p:txBody>
+      </p:sp>
+    </p:spTree>
+  </p:cSld>
+  <p:clrMapOvr>
+    <a:masterClrMapping/>
+  </p:clrMapOvr>
+</p:sld>
+</file>
+
+<file path=ppt/slides/slide2.xml><?xml version="1.0" encoding="utf-8"?>
+<p:sld xmlns:a="http://schemas.openxmlformats.org/drawingml/2006/main" xmlns:r="http://schemas.openxmlformats.org/officeDocument/2006/relationships" xmlns:p="http://schemas.openxmlformats.org/presentationml/2006/main">
+  <p:cSld name="Slide 2">
+    <p:bg>
+      <p:bgPr>
+        <a:solidFill>
+          <a:srgbClr val="FFFFFF"/>
+        </a:solidFill>
+      </p:bgPr>
+    </p:bg>
+    <p:spTree>
+      <p:nvGrpSpPr>
+        <p:cNvPr id="1" name=""/>
+        <p:cNvGrpSpPr/>
+        <p:nvPr/>
+      </p:nvGrpSpPr>
+      <p:grpSpPr>
+        <a:xfrm>
+          <a:off x="0" y="0"/>
+          <a:ext cx="0" cy="0"/>
+          <a:chOff x="0" y="0"/>
+          <a:chExt cx="0" cy="0"/>
+        </a:xfrm>
+      </p:grpSpPr>
+      <p:sp>
+        <p:nvSpPr>
+          <p:cNvPr id="2" name="Text 0"/>
+          <p:cNvSpPr txBox="1"/>
+          <p:nvPr/>
+        </p:nvSpPr>
+        <p:spPr>
+          <a:xfrm>
+            <a:off x="457200" y="256032"/>
+            <a:ext cx="8229600" cy="228600"/>
+          </a:xfrm>
+          <a:prstGeom prst="rect">
+            <a:avLst/>
+          </a:prstGeom>
+          <a:noFill/>
+          <a:ln/>
+        </p:spPr>
+        <p:txBody>
+          <a:bodyPr wrap="square" lIns="0" tIns="0" rIns="0" bIns="0" rtlCol="0" anchor="ctr"/>
+          <a:lstStyle/>
+          <a:p>
+            <a:pPr indent="0" marL="0">
+              <a:buNone/>
+            </a:pPr>
+            <a:r>
+              <a:rPr lang="en-US" sz="1000" dirty="0">
+                <a:solidFill>
+                  <a:srgbClr val="5A7189"/>
+                </a:solidFill>
+                <a:latin typeface="Courier New" pitchFamily="34" charset="0"/>
+                <a:ea typeface="Courier New" pitchFamily="34" charset="-122"/>
+                <a:cs typeface="Courier New" pitchFamily="34" charset="-120"/>
+              </a:rPr>
+              <a:t>01 · OBJETIVO</a:t>
+            </a:r>
+            <a:endParaRPr lang="en-US" sz="1000" dirty="0"/>
+          </a:p>
+        </p:txBody>
+      </p:sp>
+      <p:sp>
+        <p:nvSpPr>
+          <p:cNvPr id="3" name="Text 1"/>
+          <p:cNvSpPr txBox="1"/>
+          <p:nvPr/>
+        </p:nvSpPr>
+        <p:spPr>
+          <a:xfrm>
+            <a:off x="457200" y="502920"/>
+            <a:ext cx="8229600" cy="685800"/>
+          </a:xfrm>
+          <a:prstGeom prst="rect">
+            <a:avLst/>
+          </a:prstGeom>
+          <a:noFill/>
+          <a:ln/>
+        </p:spPr>
+        <p:txBody>
+          <a:bodyPr wrap="square" lIns="0" tIns="0" rIns="0" bIns="0" rtlCol="0" anchor="t"/>
+          <a:lstStyle/>
+          <a:p>
+            <a:pPr indent="0" marL="0">
+              <a:buNone/>
+            </a:pPr>
+            <a:r>
+              <a:rPr lang="en-US" sz="2800" b="1" dirty="0">
+                <a:solidFill>
+                  <a:srgbClr val="16273F"/>
+                </a:solidFill>
+                <a:latin typeface="Calibri" pitchFamily="34" charset="0"/>
+                <a:ea typeface="Calibri" pitchFamily="34" charset="-122"/>
+                <a:cs typeface="Calibri" pitchFamily="34" charset="-120"/>
+              </a:rPr>
+              <a:t>Qué se lleva de esta clase</a:t>
+            </a:r>
+            <a:endParaRPr lang="en-US" sz="2800" dirty="0"/>
+          </a:p>
+        </p:txBody>
+      </p:sp>
+      <p:sp>
+        <p:nvSpPr>
+          <p:cNvPr id="4" name="Text 2"/>
+          <p:cNvSpPr txBox="1"/>
+          <p:nvPr/>
+        </p:nvSpPr>
+        <p:spPr>
+          <a:xfrm>
+            <a:off x="457200" y="4800600"/>
+            <a:ext cx="5486400" cy="201168"/>
+          </a:xfrm>
+          <a:prstGeom prst="rect">
+            <a:avLst/>
+          </a:prstGeom>
+          <a:noFill/>
+          <a:ln/>
+        </p:spPr>
+        <p:txBody>
+          <a:bodyPr wrap="square" lIns="0" tIns="0" rIns="0" bIns="0" rtlCol="0" anchor="ctr"/>
+          <a:lstStyle/>
+          <a:p>
+            <a:pPr indent="0" marL="0">
+              <a:buNone/>
+            </a:pPr>
+            <a:r>
+              <a:rPr lang="en-US" sz="800" dirty="0">
+                <a:solidFill>
+                  <a:srgbClr val="5A7189"/>
+                </a:solidFill>
+                <a:latin typeface="Courier New" pitchFamily="34" charset="0"/>
+                <a:ea typeface="Courier New" pitchFamily="34" charset="-122"/>
+                <a:cs typeface="Courier New" pitchFamily="34" charset="-120"/>
+              </a:rPr>
+              <a:t>AREM · Taller 7 · Oportunidades y Soluciones</a:t>
+            </a:r>
+            <a:endParaRPr lang="en-US" sz="800" dirty="0"/>
+          </a:p>
+        </p:txBody>
+      </p:sp>
+      <p:sp>
+        <p:nvSpPr>
+          <p:cNvPr id="5" name="Text 3"/>
+          <p:cNvSpPr txBox="1"/>
+          <p:nvPr/>
+        </p:nvSpPr>
+        <p:spPr>
+          <a:xfrm>
+            <a:off x="7772400" y="4800600"/>
+            <a:ext cx="914400" cy="201168"/>
+          </a:xfrm>
+          <a:prstGeom prst="rect">
+            <a:avLst/>
+          </a:prstGeom>
+          <a:noFill/>
+          <a:ln/>
+        </p:spPr>
+        <p:txBody>
+          <a:bodyPr wrap="square" lIns="0" tIns="0" rIns="0" bIns="0" rtlCol="0" anchor="ctr"/>
+          <a:lstStyle/>
+          <a:p>
+            <a:pPr algn="r" indent="0" marL="0">
+              <a:buNone/>
+            </a:pPr>
+            <a:r>
+              <a:rPr lang="en-US" sz="800" dirty="0">
+                <a:solidFill>
+                  <a:srgbClr val="5A7189"/>
+                </a:solidFill>
+                <a:latin typeface="Courier New" pitchFamily="34" charset="0"/>
+                <a:ea typeface="Courier New" pitchFamily="34" charset="-122"/>
+                <a:cs typeface="Courier New" pitchFamily="34" charset="-120"/>
+              </a:rPr>
+              <a:t>2</a:t>
+            </a:r>
+            <a:endParaRPr lang="en-US" sz="800" dirty="0"/>
+          </a:p>
+        </p:txBody>
+      </p:sp>
+      <p:sp>
+        <p:nvSpPr>
+          <p:cNvPr id="6" name="Shape 4"/>
+          <p:cNvSpPr/>
+          <p:nvPr/>
+        </p:nvSpPr>
+        <p:spPr>
+          <a:xfrm>
+            <a:off x="457200" y="1371600"/>
+            <a:ext cx="2606040" cy="2286000"/>
+          </a:xfrm>
+          <a:prstGeom prst="rect">
+            <a:avLst/>
+          </a:prstGeom>
+          <a:solidFill>
+            <a:srgbClr val="F3F6F8"/>
+          </a:solidFill>
+          <a:ln w="9525">
+            <a:solidFill>
+              <a:srgbClr val="C6C4B8"/>
+            </a:solidFill>
+            <a:prstDash val="solid"/>
+          </a:ln>
+        </p:spPr>
+      </p:sp>
+      <p:sp>
+        <p:nvSpPr>
+          <p:cNvPr id="7" name="Shape 5"/>
+          <p:cNvSpPr/>
+          <p:nvPr/>
+        </p:nvSpPr>
+        <p:spPr>
+          <a:xfrm>
+            <a:off x="640080" y="1554480"/>
+            <a:ext cx="457200" cy="457200"/>
+          </a:xfrm>
+          <a:prstGeom prst="ellipse">
+            <a:avLst/>
+          </a:prstGeom>
+          <a:solidFill>
+            <a:srgbClr val="16273F"/>
+          </a:solidFill>
+          <a:ln w="12700">
+            <a:solidFill>
+              <a:srgbClr val="16273F"/>
+            </a:solidFill>
+            <a:prstDash val="solid"/>
+          </a:ln>
+        </p:spPr>
+      </p:sp>
+      <p:sp>
+        <p:nvSpPr>
+          <p:cNvPr id="8" name="Text 6"/>
+          <p:cNvSpPr txBox="1"/>
+          <p:nvPr/>
+        </p:nvSpPr>
+        <p:spPr>
+          <a:xfrm>
+            <a:off x="640080" y="1554480"/>
+            <a:ext cx="457200" cy="457200"/>
+          </a:xfrm>
+          <a:prstGeom prst="rect">
+            <a:avLst/>
+          </a:prstGeom>
+          <a:noFill/>
+          <a:ln/>
+        </p:spPr>
+        <p:txBody>
+          <a:bodyPr wrap="square" lIns="0" tIns="0" rIns="0" bIns="0" rtlCol="0" anchor="ctr"/>
+          <a:lstStyle/>
+          <a:p>
+            <a:pPr algn="ctr" indent="0" marL="0">
+              <a:buNone/>
+            </a:pPr>
+            <a:r>
+              <a:rPr lang="en-US" sz="1200" b="1" dirty="0">
+                <a:solidFill>
+                  <a:srgbClr val="FFFFFF"/>
+                </a:solidFill>
+                <a:latin typeface="Courier New" pitchFamily="34" charset="0"/>
+                <a:ea typeface="Courier New" pitchFamily="34" charset="-122"/>
+                <a:cs typeface="Courier New" pitchFamily="34" charset="-120"/>
+              </a:rPr>
+              <a:t>1</a:t>
+            </a:r>
+            <a:endParaRPr lang="en-US" sz="1200" dirty="0"/>
+          </a:p>
+        </p:txBody>
+      </p:sp>
+      <p:sp>
+        <p:nvSpPr>
+          <p:cNvPr id="9" name="Text 7"/>
+          <p:cNvSpPr txBox="1"/>
+          <p:nvPr/>
+        </p:nvSpPr>
+        <p:spPr>
+          <a:xfrm>
+            <a:off x="640080" y="2148840"/>
+            <a:ext cx="2286000" cy="365760"/>
+          </a:xfrm>
+          <a:prstGeom prst="rect">
+            <a:avLst/>
+          </a:prstGeom>
+          <a:noFill/>
+          <a:ln/>
+        </p:spPr>
+        <p:txBody>
+          <a:bodyPr wrap="square" lIns="0" tIns="0" rIns="0" bIns="0" rtlCol="0" anchor="ctr"/>
+          <a:lstStyle/>
+          <a:p>
+            <a:pPr indent="0" marL="0">
+              <a:buNone/>
+            </a:pPr>
+            <a:r>
+              <a:rPr lang="en-US" sz="1700" b="1" dirty="0">
+                <a:solidFill>
+                  <a:srgbClr val="16273F"/>
+                </a:solidFill>
+                <a:latin typeface="Calibri" pitchFamily="34" charset="0"/>
+                <a:ea typeface="Calibri" pitchFamily="34" charset="-122"/>
+                <a:cs typeface="Calibri" pitchFamily="34" charset="-120"/>
+              </a:rPr>
+              <a:t>Partir del contexto</a:t>
+            </a:r>
+            <a:endParaRPr lang="en-US" sz="1700" dirty="0"/>
+          </a:p>
+        </p:txBody>
+      </p:sp>
+      <p:sp>
+        <p:nvSpPr>
+          <p:cNvPr id="10" name="Text 8"/>
+          <p:cNvSpPr txBox="1"/>
+          <p:nvPr/>
+        </p:nvSpPr>
+        <p:spPr>
+          <a:xfrm>
+            <a:off x="640080" y="2560320"/>
+            <a:ext cx="2286000" cy="1005840"/>
+          </a:xfrm>
+          <a:prstGeom prst="rect">
+            <a:avLst/>
+          </a:prstGeom>
+          <a:noFill/>
+          <a:ln/>
+        </p:spPr>
+        <p:txBody>
+          <a:bodyPr wrap="square" lIns="0" tIns="0" rIns="0" bIns="0" rtlCol="0" anchor="t"/>
+          <a:lstStyle/>
+          <a:p>
+            <a:pPr indent="0" marL="0">
+              <a:buNone/>
+            </a:pPr>
+            <a:r>
+              <a:rPr lang="en-US" sz="1250" dirty="0">
+                <a:solidFill>
+                  <a:srgbClr val="3B4C5E"/>
+                </a:solidFill>
+                <a:latin typeface="Calibri" pitchFamily="34" charset="0"/>
+                <a:ea typeface="Calibri" pitchFamily="34" charset="-122"/>
+                <a:cs typeface="Calibri" pitchFamily="34" charset="-120"/>
+              </a:rPr>
+              <a:t>Leer el AS-IS y convertir hallazgos de los Talleres 3 a 6 en brechas concretas, no en opiniones.</a:t>
+            </a:r>
+            <a:endParaRPr lang="en-US" sz="1250" dirty="0"/>
+          </a:p>
+        </p:txBody>
+      </p:sp>
+      <p:sp>
+        <p:nvSpPr>
+          <p:cNvPr id="11" name="Shape 9"/>
+          <p:cNvSpPr/>
+          <p:nvPr/>
+        </p:nvSpPr>
+        <p:spPr>
+          <a:xfrm>
+            <a:off x="3264408" y="1371600"/>
+            <a:ext cx="2606040" cy="2286000"/>
+          </a:xfrm>
+          <a:prstGeom prst="rect">
+            <a:avLst/>
+          </a:prstGeom>
+          <a:solidFill>
+            <a:srgbClr val="F3F6F8"/>
+          </a:solidFill>
+          <a:ln w="9525">
+            <a:solidFill>
+              <a:srgbClr val="C6C4B8"/>
+            </a:solidFill>
+            <a:prstDash val="solid"/>
+          </a:ln>
+        </p:spPr>
+      </p:sp>
+      <p:sp>
+        <p:nvSpPr>
+          <p:cNvPr id="12" name="Shape 10"/>
+          <p:cNvSpPr/>
+          <p:nvPr/>
+        </p:nvSpPr>
+        <p:spPr>
+          <a:xfrm>
+            <a:off x="3447288" y="1554480"/>
+            <a:ext cx="457200" cy="457200"/>
+          </a:xfrm>
+          <a:prstGeom prst="ellipse">
+            <a:avLst/>
+          </a:prstGeom>
+          <a:solidFill>
+            <a:srgbClr val="16273F"/>
+          </a:solidFill>
+          <a:ln w="12700">
+            <a:solidFill>
+              <a:srgbClr val="16273F"/>
+            </a:solidFill>
+            <a:prstDash val="solid"/>
+          </a:ln>
+        </p:spPr>
+      </p:sp>
+      <p:sp>
+        <p:nvSpPr>
+          <p:cNvPr id="13" name="Text 11"/>
+          <p:cNvSpPr txBox="1"/>
+          <p:nvPr/>
+        </p:nvSpPr>
+        <p:spPr>
+          <a:xfrm>
+            <a:off x="3447288" y="1554480"/>
+            <a:ext cx="457200" cy="457200"/>
+          </a:xfrm>
+          <a:prstGeom prst="rect">
+            <a:avLst/>
+          </a:prstGeom>
+          <a:noFill/>
+          <a:ln/>
+        </p:spPr>
+        <p:txBody>
+          <a:bodyPr wrap="square" lIns="0" tIns="0" rIns="0" bIns="0" rtlCol="0" anchor="ctr"/>
+          <a:lstStyle/>
+          <a:p>
+            <a:pPr algn="ctr" indent="0" marL="0">
+              <a:buNone/>
+            </a:pPr>
+            <a:r>
+              <a:rPr lang="en-US" sz="1200" b="1" dirty="0">
+                <a:solidFill>
+                  <a:srgbClr val="FFFFFF"/>
+                </a:solidFill>
+                <a:latin typeface="Courier New" pitchFamily="34" charset="0"/>
+                <a:ea typeface="Courier New" pitchFamily="34" charset="-122"/>
+                <a:cs typeface="Courier New" pitchFamily="34" charset="-120"/>
+              </a:rPr>
+              <a:t>2</a:t>
+            </a:r>
+            <a:endParaRPr lang="en-US" sz="1200" dirty="0"/>
+          </a:p>
+        </p:txBody>
+      </p:sp>
+      <p:sp>
+        <p:nvSpPr>
+          <p:cNvPr id="14" name="Text 12"/>
+          <p:cNvSpPr txBox="1"/>
+          <p:nvPr/>
+        </p:nvSpPr>
+        <p:spPr>
+          <a:xfrm>
+            <a:off x="3447288" y="2148840"/>
+            <a:ext cx="2286000" cy="365760"/>
+          </a:xfrm>
+          <a:prstGeom prst="rect">
+            <a:avLst/>
+          </a:prstGeom>
+          <a:noFill/>
+          <a:ln/>
+        </p:spPr>
+        <p:txBody>
+          <a:bodyPr wrap="square" lIns="0" tIns="0" rIns="0" bIns="0" rtlCol="0" anchor="ctr"/>
+          <a:lstStyle/>
+          <a:p>
+            <a:pPr indent="0" marL="0">
+              <a:buNone/>
+            </a:pPr>
+            <a:r>
+              <a:rPr lang="en-US" sz="1700" b="1" dirty="0">
+                <a:solidFill>
+                  <a:srgbClr val="16273F"/>
+                </a:solidFill>
+                <a:latin typeface="Calibri" pitchFamily="34" charset="0"/>
+                <a:ea typeface="Calibri" pitchFamily="34" charset="-122"/>
+                <a:cs typeface="Calibri" pitchFamily="34" charset="-120"/>
+              </a:rPr>
+              <a:t>Armar la solución</a:t>
+            </a:r>
+            <a:endParaRPr lang="en-US" sz="1700" dirty="0"/>
+          </a:p>
+        </p:txBody>
+      </p:sp>
+      <p:sp>
+        <p:nvSpPr>
+          <p:cNvPr id="15" name="Text 13"/>
+          <p:cNvSpPr txBox="1"/>
+          <p:nvPr/>
+        </p:nvSpPr>
+        <p:spPr>
+          <a:xfrm>
+            <a:off x="3447288" y="2560320"/>
+            <a:ext cx="2286000" cy="1005840"/>
+          </a:xfrm>
+          <a:prstGeom prst="rect">
+            <a:avLst/>
+          </a:prstGeom>
+          <a:noFill/>
+          <a:ln/>
+        </p:spPr>
+        <p:txBody>
+          <a:bodyPr wrap="square" lIns="0" tIns="0" rIns="0" bIns="0" rtlCol="0" anchor="t"/>
+          <a:lstStyle/>
+          <a:p>
+            <a:pPr indent="0" marL="0">
+              <a:buNone/>
+            </a:pPr>
+            <a:r>
+              <a:rPr lang="en-US" sz="1250" dirty="0">
+                <a:solidFill>
+                  <a:srgbClr val="3B4C5E"/>
+                </a:solidFill>
+                <a:latin typeface="Calibri" pitchFamily="34" charset="0"/>
+                <a:ea typeface="Calibri" pitchFamily="34" charset="-122"/>
+                <a:cs typeface="Calibri" pitchFamily="34" charset="-120"/>
+              </a:rPr>
+              <a:t>Abrir con una lluvia de ideas sin censura, priorizar 2-3 y dibujar el TO-BE que corrige cada brecha.</a:t>
+            </a:r>
+            <a:endParaRPr lang="en-US" sz="1250" dirty="0"/>
+          </a:p>
+        </p:txBody>
+      </p:sp>
+      <p:sp>
+        <p:nvSpPr>
+          <p:cNvPr id="16" name="Shape 14"/>
+          <p:cNvSpPr/>
+          <p:nvPr/>
+        </p:nvSpPr>
+        <p:spPr>
+          <a:xfrm>
+            <a:off x="6071616" y="1371600"/>
+            <a:ext cx="2606040" cy="2286000"/>
+          </a:xfrm>
+          <a:prstGeom prst="rect">
+            <a:avLst/>
+          </a:prstGeom>
+          <a:solidFill>
+            <a:srgbClr val="F3F6F8"/>
+          </a:solidFill>
+          <a:ln w="9525">
+            <a:solidFill>
+              <a:srgbClr val="C6C4B8"/>
+            </a:solidFill>
+            <a:prstDash val="solid"/>
+          </a:ln>
+        </p:spPr>
+      </p:sp>
+      <p:sp>
+        <p:nvSpPr>
+          <p:cNvPr id="17" name="Shape 15"/>
+          <p:cNvSpPr/>
+          <p:nvPr/>
+        </p:nvSpPr>
+        <p:spPr>
+          <a:xfrm>
+            <a:off x="6254496" y="1554480"/>
+            <a:ext cx="457200" cy="457200"/>
+          </a:xfrm>
+          <a:prstGeom prst="ellipse">
+            <a:avLst/>
+          </a:prstGeom>
+          <a:solidFill>
+            <a:srgbClr val="B4552B"/>
+          </a:solidFill>
+          <a:ln w="12700">
+            <a:solidFill>
+              <a:srgbClr val="B4552B"/>
+            </a:solidFill>
+            <a:prstDash val="solid"/>
+          </a:ln>
+        </p:spPr>
+      </p:sp>
+      <p:sp>
+        <p:nvSpPr>
+          <p:cNvPr id="18" name="Text 16"/>
+          <p:cNvSpPr txBox="1"/>
+          <p:nvPr/>
+        </p:nvSpPr>
+        <p:spPr>
+          <a:xfrm>
+            <a:off x="6254496" y="1554480"/>
+            <a:ext cx="457200" cy="457200"/>
+          </a:xfrm>
+          <a:prstGeom prst="rect">
+            <a:avLst/>
+          </a:prstGeom>
+          <a:noFill/>
+          <a:ln/>
+        </p:spPr>
+        <p:txBody>
+          <a:bodyPr wrap="square" lIns="0" tIns="0" rIns="0" bIns="0" rtlCol="0" anchor="ctr"/>
+          <a:lstStyle/>
+          <a:p>
+            <a:pPr algn="ctr" indent="0" marL="0">
+              <a:buNone/>
+            </a:pPr>
+            <a:r>
+              <a:rPr lang="en-US" sz="1200" b="1" dirty="0">
+                <a:solidFill>
+                  <a:srgbClr val="FFFFFF"/>
+                </a:solidFill>
+                <a:latin typeface="Courier New" pitchFamily="34" charset="0"/>
+                <a:ea typeface="Courier New" pitchFamily="34" charset="-122"/>
+                <a:cs typeface="Courier New" pitchFamily="34" charset="-120"/>
+              </a:rPr>
+              <a:t>3</a:t>
+            </a:r>
+            <a:endParaRPr lang="en-US" sz="1200" dirty="0"/>
+          </a:p>
+        </p:txBody>
+      </p:sp>
+      <p:sp>
+        <p:nvSpPr>
+          <p:cNvPr id="19" name="Text 17"/>
+          <p:cNvSpPr txBox="1"/>
+          <p:nvPr/>
+        </p:nvSpPr>
+        <p:spPr>
+          <a:xfrm>
+            <a:off x="6254496" y="2148840"/>
+            <a:ext cx="2286000" cy="365760"/>
+          </a:xfrm>
+          <a:prstGeom prst="rect">
+            <a:avLst/>
+          </a:prstGeom>
+          <a:noFill/>
+          <a:ln/>
+        </p:spPr>
+        <p:txBody>
+          <a:bodyPr wrap="square" lIns="0" tIns="0" rIns="0" bIns="0" rtlCol="0" anchor="ctr"/>
+          <a:lstStyle/>
+          <a:p>
+            <a:pPr indent="0" marL="0">
+              <a:buNone/>
+            </a:pPr>
+            <a:r>
+              <a:rPr lang="en-US" sz="1700" b="1" dirty="0">
+                <a:solidFill>
+                  <a:srgbClr val="16273F"/>
+                </a:solidFill>
+                <a:latin typeface="Calibri" pitchFamily="34" charset="0"/>
+                <a:ea typeface="Calibri" pitchFamily="34" charset="-122"/>
+                <a:cs typeface="Calibri" pitchFamily="34" charset="-120"/>
+              </a:rPr>
+              <a:t>Tomar la decisión</a:t>
+            </a:r>
+            <a:endParaRPr lang="en-US" sz="1700" dirty="0"/>
+          </a:p>
+        </p:txBody>
+      </p:sp>
+      <p:sp>
+        <p:nvSpPr>
+          <p:cNvPr id="20" name="Text 18"/>
+          <p:cNvSpPr txBox="1"/>
+          <p:nvPr/>
+        </p:nvSpPr>
+        <p:spPr>
+          <a:xfrm>
+            <a:off x="6254496" y="2560320"/>
+            <a:ext cx="2286000" cy="1005840"/>
+          </a:xfrm>
+          <a:prstGeom prst="rect">
+            <a:avLst/>
+          </a:prstGeom>
+          <a:noFill/>
+          <a:ln/>
+        </p:spPr>
+        <p:txBody>
+          <a:bodyPr wrap="square" lIns="0" tIns="0" rIns="0" bIns="0" rtlCol="0" anchor="t"/>
+          <a:lstStyle/>
+          <a:p>
+            <a:pPr indent="0" marL="0">
+              <a:buNone/>
+            </a:pPr>
+            <a:r>
+              <a:rPr lang="en-US" sz="1250" dirty="0">
+                <a:solidFill>
+                  <a:srgbClr val="3B4C5E"/>
+                </a:solidFill>
+                <a:latin typeface="Calibri" pitchFamily="34" charset="0"/>
+                <a:ea typeface="Calibri" pitchFamily="34" charset="-122"/>
+                <a:cs typeface="Calibri" pitchFamily="34" charset="-120"/>
+              </a:rPr>
+              <a:t>Cuando una brecha tiene varias soluciones, elegir con criterios ponderados y dejar la razón escrita.</a:t>
+            </a:r>
+            <a:endParaRPr lang="en-US" sz="1250" dirty="0"/>
+          </a:p>
+        </p:txBody>
+      </p:sp>
+      <p:sp>
+        <p:nvSpPr>
+          <p:cNvPr id="21" name="Text 19"/>
+          <p:cNvSpPr txBox="1"/>
+          <p:nvPr/>
+        </p:nvSpPr>
+        <p:spPr>
+          <a:xfrm>
+            <a:off x="457200" y="3931920"/>
+            <a:ext cx="8229600" cy="640080"/>
+          </a:xfrm>
+          <a:prstGeom prst="rect">
+            <a:avLst/>
+          </a:prstGeom>
+          <a:noFill/>
+          <a:ln/>
+        </p:spPr>
+        <p:txBody>
+          <a:bodyPr wrap="square" lIns="0" tIns="0" rIns="0" bIns="0" rtlCol="0" anchor="t"/>
+          <a:lstStyle/>
+          <a:p>
+            <a:pPr indent="0" marL="0">
+              <a:buNone/>
+            </a:pPr>
+            <a:r>
+              <a:rPr lang="en-US" sz="1000" b="1" dirty="0">
+                <a:solidFill>
+                  <a:srgbClr val="B4552B"/>
+                </a:solidFill>
+                <a:latin typeface="Courier New" pitchFamily="34" charset="0"/>
+                <a:ea typeface="Courier New" pitchFamily="34" charset="-122"/>
+                <a:cs typeface="Courier New" pitchFamily="34" charset="-120"/>
+              </a:rPr>
+              <a:t>ENTREGABLE  </a:t>
+            </a:r>
+            <a:pPr indent="0" marL="0">
+              <a:buNone/>
+            </a:pPr>
+            <a:r>
+              <a:rPr lang="en-US" sz="1200" dirty="0">
+                <a:solidFill>
+                  <a:srgbClr val="3B4C5E"/>
+                </a:solidFill>
+                <a:latin typeface="Calibri" pitchFamily="34" charset="0"/>
+                <a:ea typeface="Calibri" pitchFamily="34" charset="-122"/>
+                <a:cs typeface="Calibri" pitchFamily="34" charset="-120"/>
+              </a:rPr>
+              <a:t>Documento de mejora de arquitectura (máx. 6 páginas + anexos): diagnóstico, propuesta de mejoras, TO-BE y análisis de beneficios y riesgos.</a:t>
+            </a:r>
+            <a:endParaRPr lang="en-US" sz="1000" dirty="0"/>
+          </a:p>
+        </p:txBody>
+      </p:sp>
+    </p:spTree>
+  </p:cSld>
+  <p:clrMapOvr>
+    <a:masterClrMapping/>
+  </p:clrMapOvr>
+</p:sld>
+</file>
+
+<file path=ppt/slides/slide20.xml><?xml version="1.0" encoding="utf-8"?>
+<p:sld xmlns:a="http://schemas.openxmlformats.org/drawingml/2006/main" xmlns:r="http://schemas.openxmlformats.org/officeDocument/2006/relationships" xmlns:p="http://schemas.openxmlformats.org/presentationml/2006/main">
+  <p:cSld name="Slide 20">
+    <p:bg>
+      <p:bgPr>
+        <a:solidFill>
+          <a:srgbClr val="FFFFFF"/>
+        </a:solidFill>
+      </p:bgPr>
+    </p:bg>
+    <p:spTree>
+      <p:nvGrpSpPr>
+        <p:cNvPr id="1" name=""/>
+        <p:cNvGrpSpPr/>
+        <p:nvPr/>
+      </p:nvGrpSpPr>
+      <p:grpSpPr>
+        <a:xfrm>
+          <a:off x="0" y="0"/>
+          <a:ext cx="0" cy="0"/>
+          <a:chOff x="0" y="0"/>
+          <a:chExt cx="0" cy="0"/>
+        </a:xfrm>
+      </p:grpSpPr>
+      <p:sp>
+        <p:nvSpPr>
+          <p:cNvPr id="2" name="Text 0"/>
+          <p:cNvSpPr txBox="1"/>
+          <p:nvPr/>
+        </p:nvSpPr>
+        <p:spPr>
+          <a:xfrm>
+            <a:off x="457200" y="256032"/>
+            <a:ext cx="8229600" cy="228600"/>
+          </a:xfrm>
+          <a:prstGeom prst="rect">
+            <a:avLst/>
+          </a:prstGeom>
+          <a:noFill/>
+          <a:ln/>
+        </p:spPr>
+        <p:txBody>
+          <a:bodyPr wrap="square" lIns="0" tIns="0" rIns="0" bIns="0" rtlCol="0" anchor="ctr"/>
+          <a:lstStyle/>
+          <a:p>
+            <a:pPr indent="0" marL="0">
+              <a:buNone/>
+            </a:pPr>
+            <a:r>
+              <a:rPr lang="en-US" sz="1000" dirty="0">
+                <a:solidFill>
+                  <a:srgbClr val="5A7189"/>
+                </a:solidFill>
+                <a:latin typeface="Courier New" pitchFamily="34" charset="0"/>
+                <a:ea typeface="Courier New" pitchFamily="34" charset="-122"/>
+                <a:cs typeface="Courier New" pitchFamily="34" charset="-120"/>
+              </a:rPr>
+              <a:t>PARTE 3 · PASOS 7 Y 8 · EJEMPLO</a:t>
+            </a:r>
+            <a:endParaRPr lang="en-US" sz="1000" dirty="0"/>
+          </a:p>
+        </p:txBody>
+      </p:sp>
+      <p:sp>
+        <p:nvSpPr>
+          <p:cNvPr id="3" name="Text 1"/>
+          <p:cNvSpPr txBox="1"/>
+          <p:nvPr/>
+        </p:nvSpPr>
+        <p:spPr>
+          <a:xfrm>
+            <a:off x="457200" y="502920"/>
+            <a:ext cx="8229600" cy="685800"/>
+          </a:xfrm>
+          <a:prstGeom prst="rect">
+            <a:avLst/>
+          </a:prstGeom>
+          <a:noFill/>
+          <a:ln/>
+        </p:spPr>
+        <p:txBody>
+          <a:bodyPr wrap="square" lIns="0" tIns="0" rIns="0" bIns="0" rtlCol="0" anchor="t"/>
+          <a:lstStyle/>
+          <a:p>
+            <a:pPr indent="0" marL="0">
+              <a:buNone/>
+            </a:pPr>
+            <a:r>
+              <a:rPr lang="en-US" sz="2800" b="1" dirty="0">
+                <a:solidFill>
+                  <a:srgbClr val="16273F"/>
+                </a:solidFill>
+                <a:latin typeface="Calibri" pitchFamily="34" charset="0"/>
+                <a:ea typeface="Calibri" pitchFamily="34" charset="-122"/>
+                <a:cs typeface="Calibri" pitchFamily="34" charset="-120"/>
+              </a:rPr>
+              <a:t>Decidir, comunicar y fijar cuándo revisar</a:t>
+            </a:r>
+            <a:endParaRPr lang="en-US" sz="2800" dirty="0"/>
+          </a:p>
+        </p:txBody>
+      </p:sp>
+      <p:sp>
+        <p:nvSpPr>
+          <p:cNvPr id="4" name="Text 2"/>
+          <p:cNvSpPr txBox="1"/>
+          <p:nvPr/>
+        </p:nvSpPr>
+        <p:spPr>
+          <a:xfrm>
+            <a:off x="457200" y="4800600"/>
+            <a:ext cx="5486400" cy="201168"/>
+          </a:xfrm>
+          <a:prstGeom prst="rect">
+            <a:avLst/>
+          </a:prstGeom>
+          <a:noFill/>
+          <a:ln/>
+        </p:spPr>
+        <p:txBody>
+          <a:bodyPr wrap="square" lIns="0" tIns="0" rIns="0" bIns="0" rtlCol="0" anchor="ctr"/>
+          <a:lstStyle/>
+          <a:p>
+            <a:pPr indent="0" marL="0">
+              <a:buNone/>
+            </a:pPr>
+            <a:r>
+              <a:rPr lang="en-US" sz="800" dirty="0">
+                <a:solidFill>
+                  <a:srgbClr val="5A7189"/>
+                </a:solidFill>
+                <a:latin typeface="Courier New" pitchFamily="34" charset="0"/>
+                <a:ea typeface="Courier New" pitchFamily="34" charset="-122"/>
+                <a:cs typeface="Courier New" pitchFamily="34" charset="-120"/>
+              </a:rPr>
+              <a:t>AREM · Taller 7 · Oportunidades y Soluciones</a:t>
+            </a:r>
+            <a:endParaRPr lang="en-US" sz="800" dirty="0"/>
+          </a:p>
+        </p:txBody>
+      </p:sp>
+      <p:sp>
+        <p:nvSpPr>
+          <p:cNvPr id="5" name="Text 3"/>
+          <p:cNvSpPr txBox="1"/>
+          <p:nvPr/>
+        </p:nvSpPr>
+        <p:spPr>
+          <a:xfrm>
+            <a:off x="7772400" y="4800600"/>
+            <a:ext cx="914400" cy="201168"/>
+          </a:xfrm>
+          <a:prstGeom prst="rect">
+            <a:avLst/>
+          </a:prstGeom>
+          <a:noFill/>
+          <a:ln/>
+        </p:spPr>
+        <p:txBody>
+          <a:bodyPr wrap="square" lIns="0" tIns="0" rIns="0" bIns="0" rtlCol="0" anchor="ctr"/>
+          <a:lstStyle/>
+          <a:p>
+            <a:pPr algn="r" indent="0" marL="0">
+              <a:buNone/>
+            </a:pPr>
+            <a:r>
+              <a:rPr lang="en-US" sz="800" dirty="0">
+                <a:solidFill>
+                  <a:srgbClr val="5A7189"/>
+                </a:solidFill>
+                <a:latin typeface="Courier New" pitchFamily="34" charset="0"/>
+                <a:ea typeface="Courier New" pitchFamily="34" charset="-122"/>
+                <a:cs typeface="Courier New" pitchFamily="34" charset="-120"/>
+              </a:rPr>
+              <a:t>20</a:t>
+            </a:r>
+            <a:endParaRPr lang="en-US" sz="800" dirty="0"/>
+          </a:p>
+        </p:txBody>
+      </p:sp>
+      <p:sp>
+        <p:nvSpPr>
+          <p:cNvPr id="6" name="Shape 4"/>
+          <p:cNvSpPr/>
+          <p:nvPr/>
+        </p:nvSpPr>
+        <p:spPr>
+          <a:xfrm>
+            <a:off x="457200" y="1371600"/>
+            <a:ext cx="8229600" cy="1691640"/>
+          </a:xfrm>
+          <a:prstGeom prst="rect">
+            <a:avLst/>
+          </a:prstGeom>
+          <a:solidFill>
+            <a:srgbClr val="DCE6ED"/>
+          </a:solidFill>
+          <a:ln w="12700">
+            <a:solidFill>
+              <a:srgbClr val="DCE6ED"/>
+            </a:solidFill>
+            <a:prstDash val="solid"/>
+          </a:ln>
+        </p:spPr>
+      </p:sp>
+      <p:sp>
+        <p:nvSpPr>
+          <p:cNvPr id="7" name="Text 5"/>
+          <p:cNvSpPr txBox="1"/>
+          <p:nvPr/>
+        </p:nvSpPr>
+        <p:spPr>
+          <a:xfrm>
+            <a:off x="640080" y="1417320"/>
+            <a:ext cx="7863840" cy="1600200"/>
+          </a:xfrm>
+          <a:prstGeom prst="rect">
+            <a:avLst/>
+          </a:prstGeom>
+          <a:noFill/>
+          <a:ln/>
+        </p:spPr>
+        <p:txBody>
+          <a:bodyPr wrap="square" lIns="0" tIns="0" rIns="0" bIns="0" rtlCol="0" anchor="ctr"/>
+          <a:lstStyle/>
+          <a:p>
+            <a:pPr indent="0" marL="0">
+              <a:buNone/>
+            </a:pPr>
+            <a:r>
+              <a:rPr lang="en-US" sz="1000" b="1" dirty="0">
+                <a:solidFill>
+                  <a:srgbClr val="B4552B"/>
+                </a:solidFill>
+                <a:latin typeface="Courier New" pitchFamily="34" charset="0"/>
+                <a:ea typeface="Courier New" pitchFamily="34" charset="-122"/>
+                <a:cs typeface="Courier New" pitchFamily="34" charset="-120"/>
+              </a:rPr>
+              <a:t>DECISIÓN  </a:t>
+            </a:r>
+            <a:pPr indent="0" marL="0">
+              <a:spcAft>
+                <a:spcPts val="500"/>
+              </a:spcAft>
+              <a:buNone/>
+            </a:pPr>
+            <a:r>
+              <a:rPr lang="en-US" sz="1250" b="1" dirty="0">
+                <a:solidFill>
+                  <a:srgbClr val="16273F"/>
+                </a:solidFill>
+                <a:latin typeface="Calibri" pitchFamily="34" charset="0"/>
+                <a:ea typeface="Calibri" pitchFamily="34" charset="-122"/>
+                <a:cs typeface="Calibri" pitchFamily="34" charset="-120"/>
+              </a:rPr>
+              <a:t>Implementar un balanceador activo-pasivo con failover automático (opción A).</a:t>
+            </a:r>
+            <a:endParaRPr lang="en-US" sz="1250" dirty="0"/>
+          </a:p>
+          <a:p>
+            <a:pPr indent="0" marL="0">
+              <a:buNone/>
+            </a:pPr>
+            <a:r>
+              <a:rPr lang="en-US" sz="1000" b="1" dirty="0">
+                <a:solidFill>
+                  <a:srgbClr val="B4552B"/>
+                </a:solidFill>
+                <a:latin typeface="Courier New" pitchFamily="34" charset="0"/>
+                <a:ea typeface="Courier New" pitchFamily="34" charset="-122"/>
+                <a:cs typeface="Courier New" pitchFamily="34" charset="-120"/>
+              </a:rPr>
+              <a:t>TRADE-OFF  </a:t>
+            </a:r>
+            <a:pPr indent="0" marL="0">
+              <a:spcAft>
+                <a:spcPts val="500"/>
+              </a:spcAft>
+              <a:buNone/>
+            </a:pPr>
+            <a:r>
+              <a:rPr lang="en-US" sz="1250" dirty="0">
+                <a:solidFill>
+                  <a:srgbClr val="3B4C5E"/>
+                </a:solidFill>
+                <a:latin typeface="Calibri" pitchFamily="34" charset="0"/>
+                <a:ea typeface="Calibri" pitchFamily="34" charset="-122"/>
+                <a:cs typeface="Calibri" pitchFamily="34" charset="-120"/>
+              </a:rPr>
+              <a:t>Se sacrifica la conmutación instantánea (ventana de 30-60 s) a cambio de menor costo y complejidad que el activo-activo.</a:t>
+            </a:r>
+            <a:endParaRPr lang="en-US" sz="1250" dirty="0"/>
+          </a:p>
+          <a:p>
+            <a:pPr indent="0" marL="0">
+              <a:buNone/>
+            </a:pPr>
+            <a:r>
+              <a:rPr lang="en-US" sz="1000" b="1" dirty="0">
+                <a:solidFill>
+                  <a:srgbClr val="B4552B"/>
+                </a:solidFill>
+                <a:latin typeface="Courier New" pitchFamily="34" charset="0"/>
+                <a:ea typeface="Courier New" pitchFamily="34" charset="-122"/>
+                <a:cs typeface="Courier New" pitchFamily="34" charset="-120"/>
+              </a:rPr>
+              <a:t>DESCARTADAS  </a:t>
+            </a:r>
+            <a:pPr indent="0" marL="0">
+              <a:buNone/>
+            </a:pPr>
+            <a:r>
+              <a:rPr lang="en-US" sz="1250" dirty="0">
+                <a:solidFill>
+                  <a:srgbClr val="3B4C5E"/>
+                </a:solidFill>
+                <a:latin typeface="Calibri" pitchFamily="34" charset="0"/>
+                <a:ea typeface="Calibri" pitchFamily="34" charset="-122"/>
+                <a:cs typeface="Calibri" pitchFamily="34" charset="-120"/>
+              </a:rPr>
+              <a:t>B, por costo (+USD 1.100/mes) y por no llegar a la campaña. C, por no eliminar el punto único de falla.</a:t>
+            </a:r>
+            <a:endParaRPr lang="en-US" sz="1250" dirty="0"/>
+          </a:p>
+        </p:txBody>
+      </p:sp>
+      <p:sp>
+        <p:nvSpPr>
+          <p:cNvPr id="8" name="Shape 6"/>
+          <p:cNvSpPr/>
+          <p:nvPr/>
+        </p:nvSpPr>
+        <p:spPr>
+          <a:xfrm>
+            <a:off x="457200" y="3246120"/>
+            <a:ext cx="4023360" cy="1280160"/>
+          </a:xfrm>
+          <a:prstGeom prst="rect">
+            <a:avLst/>
+          </a:prstGeom>
+          <a:solidFill>
+            <a:srgbClr val="F3F6F8"/>
+          </a:solidFill>
+          <a:ln w="9525">
+            <a:solidFill>
+              <a:srgbClr val="C6C4B8"/>
+            </a:solidFill>
+            <a:prstDash val="solid"/>
+          </a:ln>
+        </p:spPr>
+      </p:sp>
+      <p:sp>
+        <p:nvSpPr>
+          <p:cNvPr id="9" name="Text 7"/>
+          <p:cNvSpPr txBox="1"/>
+          <p:nvPr/>
+        </p:nvSpPr>
+        <p:spPr>
+          <a:xfrm>
+            <a:off x="594360" y="3310128"/>
+            <a:ext cx="3749040" cy="1170432"/>
+          </a:xfrm>
+          <a:prstGeom prst="rect">
+            <a:avLst/>
+          </a:prstGeom>
+          <a:noFill/>
+          <a:ln/>
+        </p:spPr>
+        <p:txBody>
+          <a:bodyPr wrap="square" lIns="0" tIns="0" rIns="0" bIns="0" rtlCol="0" anchor="t"/>
+          <a:lstStyle/>
+          <a:p>
+            <a:pPr indent="0" marL="0">
+              <a:spcAft>
+                <a:spcPts val="300"/>
+              </a:spcAft>
+              <a:buNone/>
+            </a:pPr>
+            <a:r>
+              <a:rPr lang="en-US" sz="1300" b="1" dirty="0">
+                <a:solidFill>
+                  <a:srgbClr val="16273F"/>
+                </a:solidFill>
+                <a:latin typeface="Calibri" pitchFamily="34" charset="0"/>
+                <a:ea typeface="Calibri" pitchFamily="34" charset="-122"/>
+                <a:cs typeface="Calibri" pitchFamily="34" charset="-120"/>
+              </a:rPr>
+              <a:t>Paso 8 · Reevaluar</a:t>
+            </a:r>
+            <a:endParaRPr lang="en-US" sz="1300" dirty="0"/>
+          </a:p>
+          <a:p>
+            <a:pPr indent="0" marL="0">
+              <a:buNone/>
+            </a:pPr>
+            <a:r>
+              <a:rPr lang="en-US" sz="1150" dirty="0">
+                <a:solidFill>
+                  <a:srgbClr val="3B4C5E"/>
+                </a:solidFill>
+                <a:latin typeface="Calibri" pitchFamily="34" charset="0"/>
+                <a:ea typeface="Calibri" pitchFamily="34" charset="-122"/>
+                <a:cs typeface="Calibri" pitchFamily="34" charset="-120"/>
+              </a:rPr>
+              <a:t>Revisar después de la campaña de fin de año, o antes si el tráfico crece 30 % sobre el pico. Si eso ocurre, reconsiderar B.</a:t>
+            </a:r>
+            <a:endParaRPr lang="en-US" sz="1300" dirty="0"/>
+          </a:p>
+        </p:txBody>
+      </p:sp>
+      <p:sp>
+        <p:nvSpPr>
+          <p:cNvPr id="10" name="Shape 8"/>
+          <p:cNvSpPr/>
+          <p:nvPr/>
+        </p:nvSpPr>
+        <p:spPr>
+          <a:xfrm>
+            <a:off x="4663440" y="3246120"/>
+            <a:ext cx="4023360" cy="1280160"/>
+          </a:xfrm>
+          <a:prstGeom prst="rect">
+            <a:avLst/>
+          </a:prstGeom>
+          <a:solidFill>
+            <a:srgbClr val="16273F"/>
+          </a:solidFill>
+          <a:ln w="12700">
+            <a:solidFill>
+              <a:srgbClr val="16273F"/>
+            </a:solidFill>
+            <a:prstDash val="solid"/>
+          </a:ln>
+        </p:spPr>
+      </p:sp>
+      <p:sp>
+        <p:nvSpPr>
+          <p:cNvPr id="11" name="Text 9"/>
+          <p:cNvSpPr txBox="1"/>
+          <p:nvPr/>
+        </p:nvSpPr>
+        <p:spPr>
+          <a:xfrm>
+            <a:off x="4800600" y="3310128"/>
+            <a:ext cx="3749040" cy="1170432"/>
+          </a:xfrm>
+          <a:prstGeom prst="rect">
+            <a:avLst/>
+          </a:prstGeom>
+          <a:noFill/>
+          <a:ln/>
+        </p:spPr>
+        <p:txBody>
+          <a:bodyPr wrap="square" lIns="0" tIns="0" rIns="0" bIns="0" rtlCol="0" anchor="t"/>
+          <a:lstStyle/>
+          <a:p>
+            <a:pPr indent="0" marL="0">
+              <a:spcAft>
+                <a:spcPts val="300"/>
+              </a:spcAft>
+              <a:buNone/>
+            </a:pPr>
+            <a:r>
+              <a:rPr lang="en-US" sz="1300" b="1" dirty="0">
+                <a:solidFill>
+                  <a:srgbClr val="FFFFFF"/>
+                </a:solidFill>
+                <a:latin typeface="Calibri" pitchFamily="34" charset="0"/>
+                <a:ea typeface="Calibri" pitchFamily="34" charset="-122"/>
+                <a:cs typeface="Calibri" pitchFamily="34" charset="-120"/>
+              </a:rPr>
+              <a:t>Esto ya es una ADR en borrador</a:t>
+            </a:r>
+            <a:endParaRPr lang="en-US" sz="1300" dirty="0"/>
+          </a:p>
+          <a:p>
+            <a:pPr indent="0" marL="0">
+              <a:buNone/>
+            </a:pPr>
+            <a:r>
+              <a:rPr lang="en-US" sz="1150" dirty="0">
+                <a:solidFill>
+                  <a:srgbClr val="CADCFC"/>
+                </a:solidFill>
+                <a:latin typeface="Calibri" pitchFamily="34" charset="0"/>
+                <a:ea typeface="Calibri" pitchFamily="34" charset="-122"/>
+                <a:cs typeface="Calibri" pitchFamily="34" charset="-120"/>
+              </a:rPr>
+              <a:t>Contexto, alternativas descartadas, decisión y consecuencias. En el Taller 9 se formaliza su registro.</a:t>
+            </a:r>
+            <a:endParaRPr lang="en-US" sz="1300" dirty="0"/>
+          </a:p>
+        </p:txBody>
+      </p:sp>
+    </p:spTree>
+  </p:cSld>
+  <p:clrMapOvr>
+    <a:masterClrMapping/>
+  </p:clrMapOvr>
+</p:sld>
+</file>
+
+<file path=ppt/slides/slide21.xml><?xml version="1.0" encoding="utf-8"?>
+<p:sld xmlns:a="http://schemas.openxmlformats.org/drawingml/2006/main" xmlns:r="http://schemas.openxmlformats.org/officeDocument/2006/relationships" xmlns:p="http://schemas.openxmlformats.org/presentationml/2006/main">
+  <p:cSld name="Slide 21">
+    <p:bg>
+      <p:bgPr>
+        <a:solidFill>
+          <a:srgbClr val="FFFFFF"/>
+        </a:solidFill>
+      </p:bgPr>
+    </p:bg>
+    <p:spTree>
+      <p:nvGrpSpPr>
+        <p:cNvPr id="1" name=""/>
+        <p:cNvGrpSpPr/>
+        <p:nvPr/>
+      </p:nvGrpSpPr>
+      <p:grpSpPr>
+        <a:xfrm>
+          <a:off x="0" y="0"/>
+          <a:ext cx="0" cy="0"/>
+          <a:chOff x="0" y="0"/>
+          <a:chExt cx="0" cy="0"/>
+        </a:xfrm>
+      </p:grpSpPr>
+      <p:sp>
+        <p:nvSpPr>
+          <p:cNvPr id="2" name="Text 0"/>
+          <p:cNvSpPr txBox="1"/>
+          <p:nvPr/>
+        </p:nvSpPr>
+        <p:spPr>
+          <a:xfrm>
+            <a:off x="457200" y="256032"/>
+            <a:ext cx="8229600" cy="228600"/>
+          </a:xfrm>
+          <a:prstGeom prst="rect">
+            <a:avLst/>
+          </a:prstGeom>
+          <a:noFill/>
+          <a:ln/>
+        </p:spPr>
+        <p:txBody>
+          <a:bodyPr wrap="square" lIns="0" tIns="0" rIns="0" bIns="0" rtlCol="0" anchor="ctr"/>
+          <a:lstStyle/>
+          <a:p>
+            <a:pPr indent="0" marL="0">
+              <a:buNone/>
+            </a:pPr>
+            <a:r>
+              <a:rPr lang="en-US" sz="1000" dirty="0">
+                <a:solidFill>
+                  <a:srgbClr val="5A7189"/>
+                </a:solidFill>
+                <a:latin typeface="Courier New" pitchFamily="34" charset="0"/>
+                <a:ea typeface="Courier New" pitchFamily="34" charset="-122"/>
+                <a:cs typeface="Courier New" pitchFamily="34" charset="-120"/>
+              </a:rPr>
+              <a:t>PARTE 4 · DEL NEGOCIO AL TRABAJO</a:t>
+            </a:r>
+            <a:endParaRPr lang="en-US" sz="1000" dirty="0"/>
+          </a:p>
+        </p:txBody>
+      </p:sp>
+      <p:sp>
+        <p:nvSpPr>
+          <p:cNvPr id="3" name="Text 1"/>
+          <p:cNvSpPr txBox="1"/>
+          <p:nvPr/>
+        </p:nvSpPr>
+        <p:spPr>
+          <a:xfrm>
+            <a:off x="457200" y="502920"/>
+            <a:ext cx="8229600" cy="685800"/>
+          </a:xfrm>
+          <a:prstGeom prst="rect">
+            <a:avLst/>
+          </a:prstGeom>
+          <a:noFill/>
+          <a:ln/>
+        </p:spPr>
+        <p:txBody>
+          <a:bodyPr wrap="square" lIns="0" tIns="0" rIns="0" bIns="0" rtlCol="0" anchor="t"/>
+          <a:lstStyle/>
+          <a:p>
+            <a:pPr indent="0" marL="0">
+              <a:buNone/>
+            </a:pPr>
+            <a:r>
+              <a:rPr lang="en-US" sz="2800" b="1" dirty="0">
+                <a:solidFill>
+                  <a:srgbClr val="16273F"/>
+                </a:solidFill>
+                <a:latin typeface="Calibri" pitchFamily="34" charset="0"/>
+                <a:ea typeface="Calibri" pitchFamily="34" charset="-122"/>
+                <a:cs typeface="Calibri" pitchFamily="34" charset="-120"/>
+              </a:rPr>
+              <a:t>Agrupar las brechas por capacidad</a:t>
+            </a:r>
+            <a:endParaRPr lang="en-US" sz="2800" dirty="0"/>
+          </a:p>
+        </p:txBody>
+      </p:sp>
+      <p:sp>
+        <p:nvSpPr>
+          <p:cNvPr id="4" name="Text 2"/>
+          <p:cNvSpPr txBox="1"/>
+          <p:nvPr/>
+        </p:nvSpPr>
+        <p:spPr>
+          <a:xfrm>
+            <a:off x="457200" y="4800600"/>
+            <a:ext cx="5486400" cy="201168"/>
+          </a:xfrm>
+          <a:prstGeom prst="rect">
+            <a:avLst/>
+          </a:prstGeom>
+          <a:noFill/>
+          <a:ln/>
+        </p:spPr>
+        <p:txBody>
+          <a:bodyPr wrap="square" lIns="0" tIns="0" rIns="0" bIns="0" rtlCol="0" anchor="ctr"/>
+          <a:lstStyle/>
+          <a:p>
+            <a:pPr indent="0" marL="0">
+              <a:buNone/>
+            </a:pPr>
+            <a:r>
+              <a:rPr lang="en-US" sz="800" dirty="0">
+                <a:solidFill>
+                  <a:srgbClr val="5A7189"/>
+                </a:solidFill>
+                <a:latin typeface="Courier New" pitchFamily="34" charset="0"/>
+                <a:ea typeface="Courier New" pitchFamily="34" charset="-122"/>
+                <a:cs typeface="Courier New" pitchFamily="34" charset="-120"/>
+              </a:rPr>
+              <a:t>AREM · Taller 7 · Oportunidades y Soluciones</a:t>
+            </a:r>
+            <a:endParaRPr lang="en-US" sz="800" dirty="0"/>
+          </a:p>
+        </p:txBody>
+      </p:sp>
+      <p:sp>
+        <p:nvSpPr>
+          <p:cNvPr id="5" name="Text 3"/>
+          <p:cNvSpPr txBox="1"/>
+          <p:nvPr/>
+        </p:nvSpPr>
+        <p:spPr>
+          <a:xfrm>
+            <a:off x="7772400" y="4800600"/>
+            <a:ext cx="914400" cy="201168"/>
+          </a:xfrm>
+          <a:prstGeom prst="rect">
+            <a:avLst/>
+          </a:prstGeom>
+          <a:noFill/>
+          <a:ln/>
+        </p:spPr>
+        <p:txBody>
+          <a:bodyPr wrap="square" lIns="0" tIns="0" rIns="0" bIns="0" rtlCol="0" anchor="ctr"/>
+          <a:lstStyle/>
+          <a:p>
+            <a:pPr algn="r" indent="0" marL="0">
+              <a:buNone/>
+            </a:pPr>
+            <a:r>
+              <a:rPr lang="en-US" sz="800" dirty="0">
+                <a:solidFill>
+                  <a:srgbClr val="5A7189"/>
+                </a:solidFill>
+                <a:latin typeface="Courier New" pitchFamily="34" charset="0"/>
+                <a:ea typeface="Courier New" pitchFamily="34" charset="-122"/>
+                <a:cs typeface="Courier New" pitchFamily="34" charset="-120"/>
+              </a:rPr>
+              <a:t>21</a:t>
+            </a:r>
+            <a:endParaRPr lang="en-US" sz="800" dirty="0"/>
+          </a:p>
+        </p:txBody>
+      </p:sp>
+      <p:graphicFrame>
+        <p:nvGraphicFramePr>
+          <p:cNvPr id="22" name="Table 0"/>
           <p:cNvGraphicFramePr>
             <a:graphicFrameLocks noGrp="1"/>
           </p:cNvGraphicFramePr>
@@ -14799,9 +20006,9 @@
 </p:sld>
 </file>
 
-<file path=ppt/slides/slide19.xml><?xml version="1.0" encoding="utf-8"?>
+<file path=ppt/slides/slide22.xml><?xml version="1.0" encoding="utf-8"?>
 <p:sld xmlns:a="http://schemas.openxmlformats.org/drawingml/2006/main" xmlns:r="http://schemas.openxmlformats.org/officeDocument/2006/relationships" xmlns:p="http://schemas.openxmlformats.org/presentationml/2006/main">
-  <p:cSld name="Slide 19">
+  <p:cSld name="Slide 22">
     <p:bg>
       <p:bgPr>
         <a:solidFill>
@@ -14973,7 +20180,7 @@
                 <a:ea typeface="Courier New" pitchFamily="34" charset="-122"/>
                 <a:cs typeface="Courier New" pitchFamily="34" charset="-120"/>
               </a:rPr>
-              <a:t>19</a:t>
+              <a:t>22</a:t>
             </a:r>
             <a:endParaRPr lang="en-US" sz="800" dirty="0"/>
           </a:p>
@@ -14981,7 +20188,7 @@
       </p:sp>
       <p:graphicFrame>
         <p:nvGraphicFramePr>
-          <p:cNvPr id="20" name="Table 0"/>
+          <p:cNvPr id="23" name="Table 0"/>
           <p:cNvGraphicFramePr>
             <a:graphicFrameLocks noGrp="1"/>
           </p:cNvGraphicFramePr>
@@ -16154,9 +21361,9 @@
 </p:sld>
 </file>
 
-<file path=ppt/slides/slide2.xml><?xml version="1.0" encoding="utf-8"?>
+<file path=ppt/slides/slide23.xml><?xml version="1.0" encoding="utf-8"?>
 <p:sld xmlns:a="http://schemas.openxmlformats.org/drawingml/2006/main" xmlns:r="http://schemas.openxmlformats.org/officeDocument/2006/relationships" xmlns:p="http://schemas.openxmlformats.org/presentationml/2006/main">
-  <p:cSld name="Slide 2">
+  <p:cSld name="Slide 23">
     <p:bg>
       <p:bgPr>
         <a:solidFill>
@@ -16211,7 +21418,7 @@
                 <a:ea typeface="Courier New" pitchFamily="34" charset="-122"/>
                 <a:cs typeface="Courier New" pitchFamily="34" charset="-120"/>
               </a:rPr>
-              <a:t>01 · OBJETIVO</a:t>
+              <a:t>ACTIVIDAD · EN EQUIPO, SOBRE SU CLIENTE REAL</a:t>
             </a:r>
             <a:endParaRPr lang="en-US" sz="1000" dirty="0"/>
           </a:p>
@@ -16250,7 +21457,7 @@
                 <a:ea typeface="Calibri" pitchFamily="34" charset="-122"/>
                 <a:cs typeface="Calibri" pitchFamily="34" charset="-120"/>
               </a:rPr>
-              <a:t>Qué se lleva de esta clase</a:t>
+              <a:t>Actividad: de la brecha a la decisión</a:t>
             </a:r>
             <a:endParaRPr lang="en-US" sz="2800" dirty="0"/>
           </a:p>
@@ -16328,7 +21535,7 @@
                 <a:ea typeface="Courier New" pitchFamily="34" charset="-122"/>
                 <a:cs typeface="Courier New" pitchFamily="34" charset="-120"/>
               </a:rPr>
-              <a:t>2</a:t>
+              <a:t>23</a:t>
             </a:r>
             <a:endParaRPr lang="en-US" sz="800" dirty="0"/>
           </a:p>
@@ -16343,7 +21550,7 @@
         <p:spPr>
           <a:xfrm>
             <a:off x="457200" y="1371600"/>
-            <a:ext cx="2606040" cy="2286000"/>
+            <a:ext cx="1920240" cy="2148840"/>
           </a:xfrm>
           <a:prstGeom prst="rect">
             <a:avLst/>
@@ -16361,39 +21568,14 @@
       </p:sp>
       <p:sp>
         <p:nvSpPr>
-          <p:cNvPr id="7" name="Shape 5"/>
-          <p:cNvSpPr/>
-          <p:nvPr/>
-        </p:nvSpPr>
-        <p:spPr>
-          <a:xfrm>
-            <a:off x="640080" y="1554480"/>
-            <a:ext cx="457200" cy="457200"/>
-          </a:xfrm>
-          <a:prstGeom prst="ellipse">
-            <a:avLst/>
-          </a:prstGeom>
-          <a:solidFill>
-            <a:srgbClr val="16273F"/>
-          </a:solidFill>
-          <a:ln w="12700">
-            <a:solidFill>
-              <a:srgbClr val="16273F"/>
-            </a:solidFill>
-            <a:prstDash val="solid"/>
-          </a:ln>
-        </p:spPr>
-      </p:sp>
-      <p:sp>
-        <p:nvSpPr>
-          <p:cNvPr id="8" name="Text 6"/>
+          <p:cNvPr id="7" name="Text 5"/>
           <p:cNvSpPr txBox="1"/>
           <p:nvPr/>
         </p:nvSpPr>
         <p:spPr>
           <a:xfrm>
-            <a:off x="640080" y="1554480"/>
-            <a:ext cx="457200" cy="457200"/>
+            <a:off x="585216" y="1463040"/>
+            <a:ext cx="1645920" cy="320040"/>
           </a:xfrm>
           <a:prstGeom prst="rect">
             <a:avLst/>
@@ -16405,34 +21587,34 @@
           <a:bodyPr wrap="square" lIns="0" tIns="0" rIns="0" bIns="0" rtlCol="0" anchor="ctr"/>
           <a:lstStyle/>
           <a:p>
-            <a:pPr algn="ctr" indent="0" marL="0">
+            <a:pPr indent="0" marL="0">
               <a:buNone/>
             </a:pPr>
             <a:r>
-              <a:rPr lang="en-US" sz="1200" b="1" dirty="0">
-                <a:solidFill>
-                  <a:srgbClr val="FFFFFF"/>
+              <a:rPr lang="en-US" sz="1500" b="1" dirty="0">
+                <a:solidFill>
+                  <a:srgbClr val="B4552B"/>
                 </a:solidFill>
                 <a:latin typeface="Courier New" pitchFamily="34" charset="0"/>
                 <a:ea typeface="Courier New" pitchFamily="34" charset="-122"/>
                 <a:cs typeface="Courier New" pitchFamily="34" charset="-120"/>
               </a:rPr>
-              <a:t>1</a:t>
-            </a:r>
-            <a:endParaRPr lang="en-US" sz="1200" dirty="0"/>
-          </a:p>
-        </p:txBody>
-      </p:sp>
-      <p:sp>
-        <p:nvSpPr>
-          <p:cNvPr id="9" name="Text 7"/>
+              <a:t>10 min</a:t>
+            </a:r>
+            <a:endParaRPr lang="en-US" sz="1500" dirty="0"/>
+          </a:p>
+        </p:txBody>
+      </p:sp>
+      <p:sp>
+        <p:nvSpPr>
+          <p:cNvPr id="8" name="Text 6"/>
           <p:cNvSpPr txBox="1"/>
           <p:nvPr/>
         </p:nvSpPr>
         <p:spPr>
           <a:xfrm>
-            <a:off x="640080" y="2148840"/>
-            <a:ext cx="2286000" cy="365760"/>
+            <a:off x="585216" y="1828800"/>
+            <a:ext cx="1691640" cy="320040"/>
           </a:xfrm>
           <a:prstGeom prst="rect">
             <a:avLst/>
@@ -16441,14 +21623,14 @@
           <a:ln/>
         </p:spPr>
         <p:txBody>
-          <a:bodyPr wrap="square" lIns="0" tIns="0" rIns="0" bIns="0" rtlCol="0" anchor="ctr"/>
+          <a:bodyPr wrap="square" lIns="0" tIns="0" rIns="0" bIns="0" rtlCol="0" anchor="t"/>
           <a:lstStyle/>
           <a:p>
             <a:pPr indent="0" marL="0">
               <a:buNone/>
             </a:pPr>
             <a:r>
-              <a:rPr lang="en-US" sz="1700" b="1" dirty="0">
+              <a:rPr lang="en-US" sz="1300" b="1" dirty="0">
                 <a:solidFill>
                   <a:srgbClr val="16273F"/>
                 </a:solidFill>
@@ -16456,22 +21638,22 @@
                 <a:ea typeface="Calibri" pitchFamily="34" charset="-122"/>
                 <a:cs typeface="Calibri" pitchFamily="34" charset="-120"/>
               </a:rPr>
-              <a:t>Partir del contexto</a:t>
-            </a:r>
-            <a:endParaRPr lang="en-US" sz="1700" dirty="0"/>
-          </a:p>
-        </p:txBody>
-      </p:sp>
-      <p:sp>
-        <p:nvSpPr>
-          <p:cNvPr id="10" name="Text 8"/>
+              <a:t>Brechas e ideas</a:t>
+            </a:r>
+            <a:endParaRPr lang="en-US" sz="1300" dirty="0"/>
+          </a:p>
+        </p:txBody>
+      </p:sp>
+      <p:sp>
+        <p:nvSpPr>
+          <p:cNvPr id="9" name="Text 7"/>
           <p:cNvSpPr txBox="1"/>
           <p:nvPr/>
         </p:nvSpPr>
         <p:spPr>
           <a:xfrm>
-            <a:off x="640080" y="2560320"/>
-            <a:ext cx="2286000" cy="1005840"/>
+            <a:off x="585216" y="2194560"/>
+            <a:ext cx="1691640" cy="1280160"/>
           </a:xfrm>
           <a:prstGeom prst="rect">
             <a:avLst/>
@@ -16487,7 +21669,7 @@
               <a:buNone/>
             </a:pPr>
             <a:r>
-              <a:rPr lang="en-US" sz="1250" dirty="0">
+              <a:rPr lang="en-US" sz="1050" dirty="0">
                 <a:solidFill>
                   <a:srgbClr val="3B4C5E"/>
                 </a:solidFill>
@@ -16495,22 +21677,22 @@
                 <a:ea typeface="Calibri" pitchFamily="34" charset="-122"/>
                 <a:cs typeface="Calibri" pitchFamily="34" charset="-120"/>
               </a:rPr>
-              <a:t>Leer el AS-IS y convertir hallazgos de los Talleres 3 a 6 en brechas concretas, no en opiniones.</a:t>
-            </a:r>
-            <a:endParaRPr lang="en-US" sz="1250" dirty="0"/>
-          </a:p>
-        </p:txBody>
-      </p:sp>
-      <p:sp>
-        <p:nvSpPr>
-          <p:cNvPr id="11" name="Shape 9"/>
+              <a:t>Consoliden las brechas de los Talleres 3 a 6 y hagan una lluvia de ideas de al menos 6 mejoras.</a:t>
+            </a:r>
+            <a:endParaRPr lang="en-US" sz="1050" dirty="0"/>
+          </a:p>
+        </p:txBody>
+      </p:sp>
+      <p:sp>
+        <p:nvSpPr>
+          <p:cNvPr id="10" name="Shape 8"/>
           <p:cNvSpPr/>
           <p:nvPr/>
         </p:nvSpPr>
         <p:spPr>
           <a:xfrm>
-            <a:off x="3264408" y="1371600"/>
-            <a:ext cx="2606040" cy="2286000"/>
+            <a:off x="2542032" y="1371600"/>
+            <a:ext cx="1920240" cy="2148840"/>
           </a:xfrm>
           <a:prstGeom prst="rect">
             <a:avLst/>
@@ -16528,39 +21710,14 @@
       </p:sp>
       <p:sp>
         <p:nvSpPr>
-          <p:cNvPr id="12" name="Shape 10"/>
-          <p:cNvSpPr/>
-          <p:nvPr/>
-        </p:nvSpPr>
-        <p:spPr>
-          <a:xfrm>
-            <a:off x="3447288" y="1554480"/>
-            <a:ext cx="457200" cy="457200"/>
-          </a:xfrm>
-          <a:prstGeom prst="ellipse">
-            <a:avLst/>
-          </a:prstGeom>
-          <a:solidFill>
-            <a:srgbClr val="16273F"/>
-          </a:solidFill>
-          <a:ln w="12700">
-            <a:solidFill>
-              <a:srgbClr val="16273F"/>
-            </a:solidFill>
-            <a:prstDash val="solid"/>
-          </a:ln>
-        </p:spPr>
-      </p:sp>
-      <p:sp>
-        <p:nvSpPr>
-          <p:cNvPr id="13" name="Text 11"/>
+          <p:cNvPr id="11" name="Text 9"/>
           <p:cNvSpPr txBox="1"/>
           <p:nvPr/>
         </p:nvSpPr>
         <p:spPr>
           <a:xfrm>
-            <a:off x="3447288" y="1554480"/>
-            <a:ext cx="457200" cy="457200"/>
+            <a:off x="2670048" y="1463040"/>
+            <a:ext cx="1645920" cy="320040"/>
           </a:xfrm>
           <a:prstGeom prst="rect">
             <a:avLst/>
@@ -16572,34 +21729,34 @@
           <a:bodyPr wrap="square" lIns="0" tIns="0" rIns="0" bIns="0" rtlCol="0" anchor="ctr"/>
           <a:lstStyle/>
           <a:p>
-            <a:pPr algn="ctr" indent="0" marL="0">
+            <a:pPr indent="0" marL="0">
               <a:buNone/>
             </a:pPr>
             <a:r>
-              <a:rPr lang="en-US" sz="1200" b="1" dirty="0">
-                <a:solidFill>
-                  <a:srgbClr val="FFFFFF"/>
+              <a:rPr lang="en-US" sz="1500" b="1" dirty="0">
+                <a:solidFill>
+                  <a:srgbClr val="B4552B"/>
                 </a:solidFill>
                 <a:latin typeface="Courier New" pitchFamily="34" charset="0"/>
                 <a:ea typeface="Courier New" pitchFamily="34" charset="-122"/>
                 <a:cs typeface="Courier New" pitchFamily="34" charset="-120"/>
               </a:rPr>
-              <a:t>2</a:t>
-            </a:r>
-            <a:endParaRPr lang="en-US" sz="1200" dirty="0"/>
-          </a:p>
-        </p:txBody>
-      </p:sp>
-      <p:sp>
-        <p:nvSpPr>
-          <p:cNvPr id="14" name="Text 12"/>
+              <a:t>15 min</a:t>
+            </a:r>
+            <a:endParaRPr lang="en-US" sz="1500" dirty="0"/>
+          </a:p>
+        </p:txBody>
+      </p:sp>
+      <p:sp>
+        <p:nvSpPr>
+          <p:cNvPr id="12" name="Text 10"/>
           <p:cNvSpPr txBox="1"/>
           <p:nvPr/>
         </p:nvSpPr>
         <p:spPr>
           <a:xfrm>
-            <a:off x="3447288" y="2148840"/>
-            <a:ext cx="2286000" cy="365760"/>
+            <a:off x="2670048" y="1828800"/>
+            <a:ext cx="1691640" cy="320040"/>
           </a:xfrm>
           <a:prstGeom prst="rect">
             <a:avLst/>
@@ -16608,14 +21765,14 @@
           <a:ln/>
         </p:spPr>
         <p:txBody>
-          <a:bodyPr wrap="square" lIns="0" tIns="0" rIns="0" bIns="0" rtlCol="0" anchor="ctr"/>
+          <a:bodyPr wrap="square" lIns="0" tIns="0" rIns="0" bIns="0" rtlCol="0" anchor="t"/>
           <a:lstStyle/>
           <a:p>
             <a:pPr indent="0" marL="0">
               <a:buNone/>
             </a:pPr>
             <a:r>
-              <a:rPr lang="en-US" sz="1700" b="1" dirty="0">
+              <a:rPr lang="en-US" sz="1300" b="1" dirty="0">
                 <a:solidFill>
                   <a:srgbClr val="16273F"/>
                 </a:solidFill>
@@ -16623,22 +21780,22 @@
                 <a:ea typeface="Calibri" pitchFamily="34" charset="-122"/>
                 <a:cs typeface="Calibri" pitchFamily="34" charset="-120"/>
               </a:rPr>
-              <a:t>Armar la solución</a:t>
-            </a:r>
-            <a:endParaRPr lang="en-US" sz="1700" dirty="0"/>
-          </a:p>
-        </p:txBody>
-      </p:sp>
-      <p:sp>
-        <p:nvSpPr>
-          <p:cNvPr id="15" name="Text 13"/>
+              <a:t>Matriz de decisión</a:t>
+            </a:r>
+            <a:endParaRPr lang="en-US" sz="1300" dirty="0"/>
+          </a:p>
+        </p:txBody>
+      </p:sp>
+      <p:sp>
+        <p:nvSpPr>
+          <p:cNvPr id="13" name="Text 11"/>
           <p:cNvSpPr txBox="1"/>
           <p:nvPr/>
         </p:nvSpPr>
         <p:spPr>
           <a:xfrm>
-            <a:off x="3447288" y="2560320"/>
-            <a:ext cx="2286000" cy="1005840"/>
+            <a:off x="2670048" y="2194560"/>
+            <a:ext cx="1691640" cy="1280160"/>
           </a:xfrm>
           <a:prstGeom prst="rect">
             <a:avLst/>
@@ -16654,7 +21811,7 @@
               <a:buNone/>
             </a:pPr>
             <a:r>
-              <a:rPr lang="en-US" sz="1250" dirty="0">
+              <a:rPr lang="en-US" sz="1050" dirty="0">
                 <a:solidFill>
                   <a:srgbClr val="3B4C5E"/>
                 </a:solidFill>
@@ -16662,22 +21819,22 @@
                 <a:ea typeface="Calibri" pitchFamily="34" charset="-122"/>
                 <a:cs typeface="Calibri" pitchFamily="34" charset="-120"/>
               </a:rPr>
-              <a:t>Abrir con una lluvia de ideas sin censura, priorizar 2-3 y dibujar el TO-BE que corrige cada brecha.</a:t>
-            </a:r>
-            <a:endParaRPr lang="en-US" sz="1250" dirty="0"/>
-          </a:p>
-        </p:txBody>
-      </p:sp>
-      <p:sp>
-        <p:nvSpPr>
-          <p:cNvPr id="16" name="Shape 14"/>
+              <a:t>Elijan UNA brecha con varias soluciones y completen la plantilla: problema, fecha límite, criterios, pesos, puntajes justificados.</a:t>
+            </a:r>
+            <a:endParaRPr lang="en-US" sz="1050" dirty="0"/>
+          </a:p>
+        </p:txBody>
+      </p:sp>
+      <p:sp>
+        <p:nvSpPr>
+          <p:cNvPr id="14" name="Shape 12"/>
           <p:cNvSpPr/>
           <p:nvPr/>
         </p:nvSpPr>
         <p:spPr>
           <a:xfrm>
-            <a:off x="6071616" y="1371600"/>
-            <a:ext cx="2606040" cy="2286000"/>
+            <a:off x="4626864" y="1371600"/>
+            <a:ext cx="1920240" cy="2148840"/>
           </a:xfrm>
           <a:prstGeom prst="rect">
             <a:avLst/>
@@ -16695,39 +21852,14 @@
       </p:sp>
       <p:sp>
         <p:nvSpPr>
-          <p:cNvPr id="17" name="Shape 15"/>
-          <p:cNvSpPr/>
-          <p:nvPr/>
-        </p:nvSpPr>
-        <p:spPr>
-          <a:xfrm>
-            <a:off x="6254496" y="1554480"/>
-            <a:ext cx="457200" cy="457200"/>
-          </a:xfrm>
-          <a:prstGeom prst="ellipse">
-            <a:avLst/>
-          </a:prstGeom>
-          <a:solidFill>
-            <a:srgbClr val="B4552B"/>
-          </a:solidFill>
-          <a:ln w="12700">
-            <a:solidFill>
-              <a:srgbClr val="B4552B"/>
-            </a:solidFill>
-            <a:prstDash val="solid"/>
-          </a:ln>
-        </p:spPr>
-      </p:sp>
-      <p:sp>
-        <p:nvSpPr>
-          <p:cNvPr id="18" name="Text 16"/>
+          <p:cNvPr id="15" name="Text 13"/>
           <p:cNvSpPr txBox="1"/>
           <p:nvPr/>
         </p:nvSpPr>
         <p:spPr>
           <a:xfrm>
-            <a:off x="6254496" y="1554480"/>
-            <a:ext cx="457200" cy="457200"/>
+            <a:off x="4754880" y="1463040"/>
+            <a:ext cx="1645920" cy="320040"/>
           </a:xfrm>
           <a:prstGeom prst="rect">
             <a:avLst/>
@@ -16739,34 +21871,34 @@
           <a:bodyPr wrap="square" lIns="0" tIns="0" rIns="0" bIns="0" rtlCol="0" anchor="ctr"/>
           <a:lstStyle/>
           <a:p>
-            <a:pPr algn="ctr" indent="0" marL="0">
+            <a:pPr indent="0" marL="0">
               <a:buNone/>
             </a:pPr>
             <a:r>
-              <a:rPr lang="en-US" sz="1200" b="1" dirty="0">
-                <a:solidFill>
-                  <a:srgbClr val="FFFFFF"/>
+              <a:rPr lang="en-US" sz="1500" b="1" dirty="0">
+                <a:solidFill>
+                  <a:srgbClr val="B4552B"/>
                 </a:solidFill>
                 <a:latin typeface="Courier New" pitchFamily="34" charset="0"/>
                 <a:ea typeface="Courier New" pitchFamily="34" charset="-122"/>
                 <a:cs typeface="Courier New" pitchFamily="34" charset="-120"/>
               </a:rPr>
-              <a:t>3</a:t>
-            </a:r>
-            <a:endParaRPr lang="en-US" sz="1200" dirty="0"/>
-          </a:p>
-        </p:txBody>
-      </p:sp>
-      <p:sp>
-        <p:nvSpPr>
-          <p:cNvPr id="19" name="Text 17"/>
+              <a:t>15 min</a:t>
+            </a:r>
+            <a:endParaRPr lang="en-US" sz="1500" dirty="0"/>
+          </a:p>
+        </p:txBody>
+      </p:sp>
+      <p:sp>
+        <p:nvSpPr>
+          <p:cNvPr id="16" name="Text 14"/>
           <p:cNvSpPr txBox="1"/>
           <p:nvPr/>
         </p:nvSpPr>
         <p:spPr>
           <a:xfrm>
-            <a:off x="6254496" y="2148840"/>
-            <a:ext cx="2286000" cy="365760"/>
+            <a:off x="4754880" y="1828800"/>
+            <a:ext cx="1691640" cy="320040"/>
           </a:xfrm>
           <a:prstGeom prst="rect">
             <a:avLst/>
@@ -16775,14 +21907,14 @@
           <a:ln/>
         </p:spPr>
         <p:txBody>
-          <a:bodyPr wrap="square" lIns="0" tIns="0" rIns="0" bIns="0" rtlCol="0" anchor="ctr"/>
+          <a:bodyPr wrap="square" lIns="0" tIns="0" rIns="0" bIns="0" rtlCol="0" anchor="t"/>
           <a:lstStyle/>
           <a:p>
             <a:pPr indent="0" marL="0">
               <a:buNone/>
             </a:pPr>
             <a:r>
-              <a:rPr lang="en-US" sz="1700" b="1" dirty="0">
+              <a:rPr lang="en-US" sz="1300" b="1" dirty="0">
                 <a:solidFill>
                   <a:srgbClr val="16273F"/>
                 </a:solidFill>
@@ -16790,22 +21922,22 @@
                 <a:ea typeface="Calibri" pitchFamily="34" charset="-122"/>
                 <a:cs typeface="Calibri" pitchFamily="34" charset="-120"/>
               </a:rPr>
-              <a:t>Tomar la decisión</a:t>
-            </a:r>
-            <a:endParaRPr lang="en-US" sz="1700" dirty="0"/>
-          </a:p>
-        </p:txBody>
-      </p:sp>
-      <p:sp>
-        <p:nvSpPr>
-          <p:cNvPr id="20" name="Text 18"/>
+              <a:t>Capacidades y paquetes</a:t>
+            </a:r>
+            <a:endParaRPr lang="en-US" sz="1300" dirty="0"/>
+          </a:p>
+        </p:txBody>
+      </p:sp>
+      <p:sp>
+        <p:nvSpPr>
+          <p:cNvPr id="17" name="Text 15"/>
           <p:cNvSpPr txBox="1"/>
           <p:nvPr/>
         </p:nvSpPr>
         <p:spPr>
           <a:xfrm>
-            <a:off x="6254496" y="2560320"/>
-            <a:ext cx="2286000" cy="1005840"/>
+            <a:off x="4754880" y="2194560"/>
+            <a:ext cx="1691640" cy="1280160"/>
           </a:xfrm>
           <a:prstGeom prst="rect">
             <a:avLst/>
@@ -16821,7 +21953,7 @@
               <a:buNone/>
             </a:pPr>
             <a:r>
-              <a:rPr lang="en-US" sz="1250" dirty="0">
+              <a:rPr lang="en-US" sz="1050" dirty="0">
                 <a:solidFill>
                   <a:srgbClr val="3B4C5E"/>
                 </a:solidFill>
@@ -16829,262 +21961,21 @@
                 <a:ea typeface="Calibri" pitchFamily="34" charset="-122"/>
                 <a:cs typeface="Calibri" pitchFamily="34" charset="-120"/>
               </a:rPr>
-              <a:t>Cuando una brecha tiene varias soluciones, elegir con criterios ponderados y dejar la razón escrita.</a:t>
-            </a:r>
-            <a:endParaRPr lang="en-US" sz="1250" dirty="0"/>
-          </a:p>
-        </p:txBody>
-      </p:sp>
-      <p:sp>
-        <p:nvSpPr>
-          <p:cNvPr id="21" name="Text 19"/>
-          <p:cNvSpPr txBox="1"/>
-          <p:nvPr/>
-        </p:nvSpPr>
-        <p:spPr>
-          <a:xfrm>
-            <a:off x="457200" y="3931920"/>
-            <a:ext cx="8229600" cy="640080"/>
-          </a:xfrm>
-          <a:prstGeom prst="rect">
-            <a:avLst/>
-          </a:prstGeom>
-          <a:noFill/>
-          <a:ln/>
-        </p:spPr>
-        <p:txBody>
-          <a:bodyPr wrap="square" lIns="0" tIns="0" rIns="0" bIns="0" rtlCol="0" anchor="t"/>
-          <a:lstStyle/>
-          <a:p>
-            <a:pPr indent="0" marL="0">
-              <a:buNone/>
-            </a:pPr>
-            <a:r>
-              <a:rPr lang="en-US" sz="1000" b="1" dirty="0">
-                <a:solidFill>
-                  <a:srgbClr val="B4552B"/>
-                </a:solidFill>
-                <a:latin typeface="Courier New" pitchFamily="34" charset="0"/>
-                <a:ea typeface="Courier New" pitchFamily="34" charset="-122"/>
-                <a:cs typeface="Courier New" pitchFamily="34" charset="-120"/>
-              </a:rPr>
-              <a:t>ENTREGABLE  </a:t>
-            </a:r>
-            <a:pPr indent="0" marL="0">
-              <a:buNone/>
-            </a:pPr>
-            <a:r>
-              <a:rPr lang="en-US" sz="1200" dirty="0">
-                <a:solidFill>
-                  <a:srgbClr val="3B4C5E"/>
-                </a:solidFill>
-                <a:latin typeface="Calibri" pitchFamily="34" charset="0"/>
-                <a:ea typeface="Calibri" pitchFamily="34" charset="-122"/>
-                <a:cs typeface="Calibri" pitchFamily="34" charset="-120"/>
-              </a:rPr>
-              <a:t>Documento de mejora de arquitectura (máx. 6 páginas + anexos): diagnóstico, propuesta de mejoras, TO-BE y análisis de beneficios y riesgos.</a:t>
-            </a:r>
-            <a:endParaRPr lang="en-US" sz="1000" dirty="0"/>
-          </a:p>
-        </p:txBody>
-      </p:sp>
-    </p:spTree>
-  </p:cSld>
-  <p:clrMapOvr>
-    <a:masterClrMapping/>
-  </p:clrMapOvr>
-</p:sld>
-</file>
-
-<file path=ppt/slides/slide20.xml><?xml version="1.0" encoding="utf-8"?>
-<p:sld xmlns:a="http://schemas.openxmlformats.org/drawingml/2006/main" xmlns:r="http://schemas.openxmlformats.org/officeDocument/2006/relationships" xmlns:p="http://schemas.openxmlformats.org/presentationml/2006/main">
-  <p:cSld name="Slide 20">
-    <p:bg>
-      <p:bgPr>
-        <a:solidFill>
-          <a:srgbClr val="FFFFFF"/>
-        </a:solidFill>
-      </p:bgPr>
-    </p:bg>
-    <p:spTree>
-      <p:nvGrpSpPr>
-        <p:cNvPr id="1" name=""/>
-        <p:cNvGrpSpPr/>
-        <p:nvPr/>
-      </p:nvGrpSpPr>
-      <p:grpSpPr>
-        <a:xfrm>
-          <a:off x="0" y="0"/>
-          <a:ext cx="0" cy="0"/>
-          <a:chOff x="0" y="0"/>
-          <a:chExt cx="0" cy="0"/>
-        </a:xfrm>
-      </p:grpSpPr>
-      <p:sp>
-        <p:nvSpPr>
-          <p:cNvPr id="2" name="Text 0"/>
-          <p:cNvSpPr txBox="1"/>
-          <p:nvPr/>
-        </p:nvSpPr>
-        <p:spPr>
-          <a:xfrm>
-            <a:off x="457200" y="256032"/>
-            <a:ext cx="8229600" cy="228600"/>
-          </a:xfrm>
-          <a:prstGeom prst="rect">
-            <a:avLst/>
-          </a:prstGeom>
-          <a:noFill/>
-          <a:ln/>
-        </p:spPr>
-        <p:txBody>
-          <a:bodyPr wrap="square" lIns="0" tIns="0" rIns="0" bIns="0" rtlCol="0" anchor="ctr"/>
-          <a:lstStyle/>
-          <a:p>
-            <a:pPr indent="0" marL="0">
-              <a:buNone/>
-            </a:pPr>
-            <a:r>
-              <a:rPr lang="en-US" sz="1000" dirty="0">
-                <a:solidFill>
-                  <a:srgbClr val="5A7189"/>
-                </a:solidFill>
-                <a:latin typeface="Courier New" pitchFamily="34" charset="0"/>
-                <a:ea typeface="Courier New" pitchFamily="34" charset="-122"/>
-                <a:cs typeface="Courier New" pitchFamily="34" charset="-120"/>
-              </a:rPr>
-              <a:t>ACTIVIDAD · EN EQUIPO, SOBRE SU CLIENTE REAL</a:t>
-            </a:r>
-            <a:endParaRPr lang="en-US" sz="1000" dirty="0"/>
-          </a:p>
-        </p:txBody>
-      </p:sp>
-      <p:sp>
-        <p:nvSpPr>
-          <p:cNvPr id="3" name="Text 1"/>
-          <p:cNvSpPr txBox="1"/>
-          <p:nvPr/>
-        </p:nvSpPr>
-        <p:spPr>
-          <a:xfrm>
-            <a:off x="457200" y="502920"/>
-            <a:ext cx="8229600" cy="685800"/>
-          </a:xfrm>
-          <a:prstGeom prst="rect">
-            <a:avLst/>
-          </a:prstGeom>
-          <a:noFill/>
-          <a:ln/>
-        </p:spPr>
-        <p:txBody>
-          <a:bodyPr wrap="square" lIns="0" tIns="0" rIns="0" bIns="0" rtlCol="0" anchor="t"/>
-          <a:lstStyle/>
-          <a:p>
-            <a:pPr indent="0" marL="0">
-              <a:buNone/>
-            </a:pPr>
-            <a:r>
-              <a:rPr lang="en-US" sz="2800" b="1" dirty="0">
-                <a:solidFill>
-                  <a:srgbClr val="16273F"/>
-                </a:solidFill>
-                <a:latin typeface="Calibri" pitchFamily="34" charset="0"/>
-                <a:ea typeface="Calibri" pitchFamily="34" charset="-122"/>
-                <a:cs typeface="Calibri" pitchFamily="34" charset="-120"/>
-              </a:rPr>
-              <a:t>Actividad: de la brecha a la decisión</a:t>
-            </a:r>
-            <a:endParaRPr lang="en-US" sz="2800" dirty="0"/>
-          </a:p>
-        </p:txBody>
-      </p:sp>
-      <p:sp>
-        <p:nvSpPr>
-          <p:cNvPr id="4" name="Text 2"/>
-          <p:cNvSpPr txBox="1"/>
-          <p:nvPr/>
-        </p:nvSpPr>
-        <p:spPr>
-          <a:xfrm>
-            <a:off x="457200" y="4800600"/>
-            <a:ext cx="5486400" cy="201168"/>
-          </a:xfrm>
-          <a:prstGeom prst="rect">
-            <a:avLst/>
-          </a:prstGeom>
-          <a:noFill/>
-          <a:ln/>
-        </p:spPr>
-        <p:txBody>
-          <a:bodyPr wrap="square" lIns="0" tIns="0" rIns="0" bIns="0" rtlCol="0" anchor="ctr"/>
-          <a:lstStyle/>
-          <a:p>
-            <a:pPr indent="0" marL="0">
-              <a:buNone/>
-            </a:pPr>
-            <a:r>
-              <a:rPr lang="en-US" sz="800" dirty="0">
-                <a:solidFill>
-                  <a:srgbClr val="5A7189"/>
-                </a:solidFill>
-                <a:latin typeface="Courier New" pitchFamily="34" charset="0"/>
-                <a:ea typeface="Courier New" pitchFamily="34" charset="-122"/>
-                <a:cs typeface="Courier New" pitchFamily="34" charset="-120"/>
-              </a:rPr>
-              <a:t>AREM · Taller 7 · Oportunidades y Soluciones</a:t>
-            </a:r>
-            <a:endParaRPr lang="en-US" sz="800" dirty="0"/>
-          </a:p>
-        </p:txBody>
-      </p:sp>
-      <p:sp>
-        <p:nvSpPr>
-          <p:cNvPr id="5" name="Text 3"/>
-          <p:cNvSpPr txBox="1"/>
-          <p:nvPr/>
-        </p:nvSpPr>
-        <p:spPr>
-          <a:xfrm>
-            <a:off x="7772400" y="4800600"/>
-            <a:ext cx="914400" cy="201168"/>
-          </a:xfrm>
-          <a:prstGeom prst="rect">
-            <a:avLst/>
-          </a:prstGeom>
-          <a:noFill/>
-          <a:ln/>
-        </p:spPr>
-        <p:txBody>
-          <a:bodyPr wrap="square" lIns="0" tIns="0" rIns="0" bIns="0" rtlCol="0" anchor="ctr"/>
-          <a:lstStyle/>
-          <a:p>
-            <a:pPr algn="r" indent="0" marL="0">
-              <a:buNone/>
-            </a:pPr>
-            <a:r>
-              <a:rPr lang="en-US" sz="800" dirty="0">
-                <a:solidFill>
-                  <a:srgbClr val="5A7189"/>
-                </a:solidFill>
-                <a:latin typeface="Courier New" pitchFamily="34" charset="0"/>
-                <a:ea typeface="Courier New" pitchFamily="34" charset="-122"/>
-                <a:cs typeface="Courier New" pitchFamily="34" charset="-120"/>
-              </a:rPr>
-              <a:t>20</a:t>
-            </a:r>
-            <a:endParaRPr lang="en-US" sz="800" dirty="0"/>
-          </a:p>
-        </p:txBody>
-      </p:sp>
-      <p:sp>
-        <p:nvSpPr>
-          <p:cNvPr id="6" name="Shape 4"/>
+              <a:t>Agrupen las brechas por capacidad de negocio y armen los paquetes de trabajo.</a:t>
+            </a:r>
+            <a:endParaRPr lang="en-US" sz="1050" dirty="0"/>
+          </a:p>
+        </p:txBody>
+      </p:sp>
+      <p:sp>
+        <p:nvSpPr>
+          <p:cNvPr id="18" name="Shape 16"/>
           <p:cNvSpPr/>
           <p:nvPr/>
         </p:nvSpPr>
         <p:spPr>
           <a:xfrm>
-            <a:off x="457200" y="1371600"/>
+            <a:off x="6711696" y="1371600"/>
             <a:ext cx="1920240" cy="2148840"/>
           </a:xfrm>
           <a:prstGeom prst="rect">
@@ -17103,432 +21994,6 @@
       </p:sp>
       <p:sp>
         <p:nvSpPr>
-          <p:cNvPr id="7" name="Text 5"/>
-          <p:cNvSpPr txBox="1"/>
-          <p:nvPr/>
-        </p:nvSpPr>
-        <p:spPr>
-          <a:xfrm>
-            <a:off x="585216" y="1463040"/>
-            <a:ext cx="1645920" cy="320040"/>
-          </a:xfrm>
-          <a:prstGeom prst="rect">
-            <a:avLst/>
-          </a:prstGeom>
-          <a:noFill/>
-          <a:ln/>
-        </p:spPr>
-        <p:txBody>
-          <a:bodyPr wrap="square" lIns="0" tIns="0" rIns="0" bIns="0" rtlCol="0" anchor="ctr"/>
-          <a:lstStyle/>
-          <a:p>
-            <a:pPr indent="0" marL="0">
-              <a:buNone/>
-            </a:pPr>
-            <a:r>
-              <a:rPr lang="en-US" sz="1500" b="1" dirty="0">
-                <a:solidFill>
-                  <a:srgbClr val="B4552B"/>
-                </a:solidFill>
-                <a:latin typeface="Courier New" pitchFamily="34" charset="0"/>
-                <a:ea typeface="Courier New" pitchFamily="34" charset="-122"/>
-                <a:cs typeface="Courier New" pitchFamily="34" charset="-120"/>
-              </a:rPr>
-              <a:t>10 min</a:t>
-            </a:r>
-            <a:endParaRPr lang="en-US" sz="1500" dirty="0"/>
-          </a:p>
-        </p:txBody>
-      </p:sp>
-      <p:sp>
-        <p:nvSpPr>
-          <p:cNvPr id="8" name="Text 6"/>
-          <p:cNvSpPr txBox="1"/>
-          <p:nvPr/>
-        </p:nvSpPr>
-        <p:spPr>
-          <a:xfrm>
-            <a:off x="585216" y="1828800"/>
-            <a:ext cx="1691640" cy="320040"/>
-          </a:xfrm>
-          <a:prstGeom prst="rect">
-            <a:avLst/>
-          </a:prstGeom>
-          <a:noFill/>
-          <a:ln/>
-        </p:spPr>
-        <p:txBody>
-          <a:bodyPr wrap="square" lIns="0" tIns="0" rIns="0" bIns="0" rtlCol="0" anchor="t"/>
-          <a:lstStyle/>
-          <a:p>
-            <a:pPr indent="0" marL="0">
-              <a:buNone/>
-            </a:pPr>
-            <a:r>
-              <a:rPr lang="en-US" sz="1300" b="1" dirty="0">
-                <a:solidFill>
-                  <a:srgbClr val="16273F"/>
-                </a:solidFill>
-                <a:latin typeface="Calibri" pitchFamily="34" charset="0"/>
-                <a:ea typeface="Calibri" pitchFamily="34" charset="-122"/>
-                <a:cs typeface="Calibri" pitchFamily="34" charset="-120"/>
-              </a:rPr>
-              <a:t>Brechas e ideas</a:t>
-            </a:r>
-            <a:endParaRPr lang="en-US" sz="1300" dirty="0"/>
-          </a:p>
-        </p:txBody>
-      </p:sp>
-      <p:sp>
-        <p:nvSpPr>
-          <p:cNvPr id="9" name="Text 7"/>
-          <p:cNvSpPr txBox="1"/>
-          <p:nvPr/>
-        </p:nvSpPr>
-        <p:spPr>
-          <a:xfrm>
-            <a:off x="585216" y="2194560"/>
-            <a:ext cx="1691640" cy="1280160"/>
-          </a:xfrm>
-          <a:prstGeom prst="rect">
-            <a:avLst/>
-          </a:prstGeom>
-          <a:noFill/>
-          <a:ln/>
-        </p:spPr>
-        <p:txBody>
-          <a:bodyPr wrap="square" lIns="0" tIns="0" rIns="0" bIns="0" rtlCol="0" anchor="t"/>
-          <a:lstStyle/>
-          <a:p>
-            <a:pPr indent="0" marL="0">
-              <a:buNone/>
-            </a:pPr>
-            <a:r>
-              <a:rPr lang="en-US" sz="1050" dirty="0">
-                <a:solidFill>
-                  <a:srgbClr val="3B4C5E"/>
-                </a:solidFill>
-                <a:latin typeface="Calibri" pitchFamily="34" charset="0"/>
-                <a:ea typeface="Calibri" pitchFamily="34" charset="-122"/>
-                <a:cs typeface="Calibri" pitchFamily="34" charset="-120"/>
-              </a:rPr>
-              <a:t>Consoliden las brechas de los Talleres 3 a 6 y hagan una lluvia de ideas de al menos 6 mejoras.</a:t>
-            </a:r>
-            <a:endParaRPr lang="en-US" sz="1050" dirty="0"/>
-          </a:p>
-        </p:txBody>
-      </p:sp>
-      <p:sp>
-        <p:nvSpPr>
-          <p:cNvPr id="10" name="Shape 8"/>
-          <p:cNvSpPr/>
-          <p:nvPr/>
-        </p:nvSpPr>
-        <p:spPr>
-          <a:xfrm>
-            <a:off x="2542032" y="1371600"/>
-            <a:ext cx="1920240" cy="2148840"/>
-          </a:xfrm>
-          <a:prstGeom prst="rect">
-            <a:avLst/>
-          </a:prstGeom>
-          <a:solidFill>
-            <a:srgbClr val="F3F6F8"/>
-          </a:solidFill>
-          <a:ln w="9525">
-            <a:solidFill>
-              <a:srgbClr val="C6C4B8"/>
-            </a:solidFill>
-            <a:prstDash val="solid"/>
-          </a:ln>
-        </p:spPr>
-      </p:sp>
-      <p:sp>
-        <p:nvSpPr>
-          <p:cNvPr id="11" name="Text 9"/>
-          <p:cNvSpPr txBox="1"/>
-          <p:nvPr/>
-        </p:nvSpPr>
-        <p:spPr>
-          <a:xfrm>
-            <a:off x="2670048" y="1463040"/>
-            <a:ext cx="1645920" cy="320040"/>
-          </a:xfrm>
-          <a:prstGeom prst="rect">
-            <a:avLst/>
-          </a:prstGeom>
-          <a:noFill/>
-          <a:ln/>
-        </p:spPr>
-        <p:txBody>
-          <a:bodyPr wrap="square" lIns="0" tIns="0" rIns="0" bIns="0" rtlCol="0" anchor="ctr"/>
-          <a:lstStyle/>
-          <a:p>
-            <a:pPr indent="0" marL="0">
-              <a:buNone/>
-            </a:pPr>
-            <a:r>
-              <a:rPr lang="en-US" sz="1500" b="1" dirty="0">
-                <a:solidFill>
-                  <a:srgbClr val="B4552B"/>
-                </a:solidFill>
-                <a:latin typeface="Courier New" pitchFamily="34" charset="0"/>
-                <a:ea typeface="Courier New" pitchFamily="34" charset="-122"/>
-                <a:cs typeface="Courier New" pitchFamily="34" charset="-120"/>
-              </a:rPr>
-              <a:t>15 min</a:t>
-            </a:r>
-            <a:endParaRPr lang="en-US" sz="1500" dirty="0"/>
-          </a:p>
-        </p:txBody>
-      </p:sp>
-      <p:sp>
-        <p:nvSpPr>
-          <p:cNvPr id="12" name="Text 10"/>
-          <p:cNvSpPr txBox="1"/>
-          <p:nvPr/>
-        </p:nvSpPr>
-        <p:spPr>
-          <a:xfrm>
-            <a:off x="2670048" y="1828800"/>
-            <a:ext cx="1691640" cy="320040"/>
-          </a:xfrm>
-          <a:prstGeom prst="rect">
-            <a:avLst/>
-          </a:prstGeom>
-          <a:noFill/>
-          <a:ln/>
-        </p:spPr>
-        <p:txBody>
-          <a:bodyPr wrap="square" lIns="0" tIns="0" rIns="0" bIns="0" rtlCol="0" anchor="t"/>
-          <a:lstStyle/>
-          <a:p>
-            <a:pPr indent="0" marL="0">
-              <a:buNone/>
-            </a:pPr>
-            <a:r>
-              <a:rPr lang="en-US" sz="1300" b="1" dirty="0">
-                <a:solidFill>
-                  <a:srgbClr val="16273F"/>
-                </a:solidFill>
-                <a:latin typeface="Calibri" pitchFamily="34" charset="0"/>
-                <a:ea typeface="Calibri" pitchFamily="34" charset="-122"/>
-                <a:cs typeface="Calibri" pitchFamily="34" charset="-120"/>
-              </a:rPr>
-              <a:t>Matriz de decisión</a:t>
-            </a:r>
-            <a:endParaRPr lang="en-US" sz="1300" dirty="0"/>
-          </a:p>
-        </p:txBody>
-      </p:sp>
-      <p:sp>
-        <p:nvSpPr>
-          <p:cNvPr id="13" name="Text 11"/>
-          <p:cNvSpPr txBox="1"/>
-          <p:nvPr/>
-        </p:nvSpPr>
-        <p:spPr>
-          <a:xfrm>
-            <a:off x="2670048" y="2194560"/>
-            <a:ext cx="1691640" cy="1280160"/>
-          </a:xfrm>
-          <a:prstGeom prst="rect">
-            <a:avLst/>
-          </a:prstGeom>
-          <a:noFill/>
-          <a:ln/>
-        </p:spPr>
-        <p:txBody>
-          <a:bodyPr wrap="square" lIns="0" tIns="0" rIns="0" bIns="0" rtlCol="0" anchor="t"/>
-          <a:lstStyle/>
-          <a:p>
-            <a:pPr indent="0" marL="0">
-              <a:buNone/>
-            </a:pPr>
-            <a:r>
-              <a:rPr lang="en-US" sz="1050" dirty="0">
-                <a:solidFill>
-                  <a:srgbClr val="3B4C5E"/>
-                </a:solidFill>
-                <a:latin typeface="Calibri" pitchFamily="34" charset="0"/>
-                <a:ea typeface="Calibri" pitchFamily="34" charset="-122"/>
-                <a:cs typeface="Calibri" pitchFamily="34" charset="-120"/>
-              </a:rPr>
-              <a:t>Elijan UNA brecha con varias soluciones y completen la plantilla: problema, fecha límite, criterios, pesos, puntajes justificados.</a:t>
-            </a:r>
-            <a:endParaRPr lang="en-US" sz="1050" dirty="0"/>
-          </a:p>
-        </p:txBody>
-      </p:sp>
-      <p:sp>
-        <p:nvSpPr>
-          <p:cNvPr id="14" name="Shape 12"/>
-          <p:cNvSpPr/>
-          <p:nvPr/>
-        </p:nvSpPr>
-        <p:spPr>
-          <a:xfrm>
-            <a:off x="4626864" y="1371600"/>
-            <a:ext cx="1920240" cy="2148840"/>
-          </a:xfrm>
-          <a:prstGeom prst="rect">
-            <a:avLst/>
-          </a:prstGeom>
-          <a:solidFill>
-            <a:srgbClr val="F3F6F8"/>
-          </a:solidFill>
-          <a:ln w="9525">
-            <a:solidFill>
-              <a:srgbClr val="C6C4B8"/>
-            </a:solidFill>
-            <a:prstDash val="solid"/>
-          </a:ln>
-        </p:spPr>
-      </p:sp>
-      <p:sp>
-        <p:nvSpPr>
-          <p:cNvPr id="15" name="Text 13"/>
-          <p:cNvSpPr txBox="1"/>
-          <p:nvPr/>
-        </p:nvSpPr>
-        <p:spPr>
-          <a:xfrm>
-            <a:off x="4754880" y="1463040"/>
-            <a:ext cx="1645920" cy="320040"/>
-          </a:xfrm>
-          <a:prstGeom prst="rect">
-            <a:avLst/>
-          </a:prstGeom>
-          <a:noFill/>
-          <a:ln/>
-        </p:spPr>
-        <p:txBody>
-          <a:bodyPr wrap="square" lIns="0" tIns="0" rIns="0" bIns="0" rtlCol="0" anchor="ctr"/>
-          <a:lstStyle/>
-          <a:p>
-            <a:pPr indent="0" marL="0">
-              <a:buNone/>
-            </a:pPr>
-            <a:r>
-              <a:rPr lang="en-US" sz="1500" b="1" dirty="0">
-                <a:solidFill>
-                  <a:srgbClr val="B4552B"/>
-                </a:solidFill>
-                <a:latin typeface="Courier New" pitchFamily="34" charset="0"/>
-                <a:ea typeface="Courier New" pitchFamily="34" charset="-122"/>
-                <a:cs typeface="Courier New" pitchFamily="34" charset="-120"/>
-              </a:rPr>
-              <a:t>15 min</a:t>
-            </a:r>
-            <a:endParaRPr lang="en-US" sz="1500" dirty="0"/>
-          </a:p>
-        </p:txBody>
-      </p:sp>
-      <p:sp>
-        <p:nvSpPr>
-          <p:cNvPr id="16" name="Text 14"/>
-          <p:cNvSpPr txBox="1"/>
-          <p:nvPr/>
-        </p:nvSpPr>
-        <p:spPr>
-          <a:xfrm>
-            <a:off x="4754880" y="1828800"/>
-            <a:ext cx="1691640" cy="320040"/>
-          </a:xfrm>
-          <a:prstGeom prst="rect">
-            <a:avLst/>
-          </a:prstGeom>
-          <a:noFill/>
-          <a:ln/>
-        </p:spPr>
-        <p:txBody>
-          <a:bodyPr wrap="square" lIns="0" tIns="0" rIns="0" bIns="0" rtlCol="0" anchor="t"/>
-          <a:lstStyle/>
-          <a:p>
-            <a:pPr indent="0" marL="0">
-              <a:buNone/>
-            </a:pPr>
-            <a:r>
-              <a:rPr lang="en-US" sz="1300" b="1" dirty="0">
-                <a:solidFill>
-                  <a:srgbClr val="16273F"/>
-                </a:solidFill>
-                <a:latin typeface="Calibri" pitchFamily="34" charset="0"/>
-                <a:ea typeface="Calibri" pitchFamily="34" charset="-122"/>
-                <a:cs typeface="Calibri" pitchFamily="34" charset="-120"/>
-              </a:rPr>
-              <a:t>Capacidades y paquetes</a:t>
-            </a:r>
-            <a:endParaRPr lang="en-US" sz="1300" dirty="0"/>
-          </a:p>
-        </p:txBody>
-      </p:sp>
-      <p:sp>
-        <p:nvSpPr>
-          <p:cNvPr id="17" name="Text 15"/>
-          <p:cNvSpPr txBox="1"/>
-          <p:nvPr/>
-        </p:nvSpPr>
-        <p:spPr>
-          <a:xfrm>
-            <a:off x="4754880" y="2194560"/>
-            <a:ext cx="1691640" cy="1280160"/>
-          </a:xfrm>
-          <a:prstGeom prst="rect">
-            <a:avLst/>
-          </a:prstGeom>
-          <a:noFill/>
-          <a:ln/>
-        </p:spPr>
-        <p:txBody>
-          <a:bodyPr wrap="square" lIns="0" tIns="0" rIns="0" bIns="0" rtlCol="0" anchor="t"/>
-          <a:lstStyle/>
-          <a:p>
-            <a:pPr indent="0" marL="0">
-              <a:buNone/>
-            </a:pPr>
-            <a:r>
-              <a:rPr lang="en-US" sz="1050" dirty="0">
-                <a:solidFill>
-                  <a:srgbClr val="3B4C5E"/>
-                </a:solidFill>
-                <a:latin typeface="Calibri" pitchFamily="34" charset="0"/>
-                <a:ea typeface="Calibri" pitchFamily="34" charset="-122"/>
-                <a:cs typeface="Calibri" pitchFamily="34" charset="-120"/>
-              </a:rPr>
-              <a:t>Agrupen las brechas por capacidad de negocio y armen los paquetes de trabajo.</a:t>
-            </a:r>
-            <a:endParaRPr lang="en-US" sz="1050" dirty="0"/>
-          </a:p>
-        </p:txBody>
-      </p:sp>
-      <p:sp>
-        <p:nvSpPr>
-          <p:cNvPr id="18" name="Shape 16"/>
-          <p:cNvSpPr/>
-          <p:nvPr/>
-        </p:nvSpPr>
-        <p:spPr>
-          <a:xfrm>
-            <a:off x="6711696" y="1371600"/>
-            <a:ext cx="1920240" cy="2148840"/>
-          </a:xfrm>
-          <a:prstGeom prst="rect">
-            <a:avLst/>
-          </a:prstGeom>
-          <a:solidFill>
-            <a:srgbClr val="F3F6F8"/>
-          </a:solidFill>
-          <a:ln w="9525">
-            <a:solidFill>
-              <a:srgbClr val="C6C4B8"/>
-            </a:solidFill>
-            <a:prstDash val="solid"/>
-          </a:ln>
-        </p:spPr>
-      </p:sp>
-      <p:sp>
-        <p:nvSpPr>
           <p:cNvPr id="19" name="Text 17"/>
           <p:cNvSpPr txBox="1"/>
           <p:nvPr/>
@@ -17767,9 +22232,9 @@
 </p:sld>
 </file>
 
-<file path=ppt/slides/slide21.xml><?xml version="1.0" encoding="utf-8"?>
+<file path=ppt/slides/slide24.xml><?xml version="1.0" encoding="utf-8"?>
 <p:sld xmlns:a="http://schemas.openxmlformats.org/drawingml/2006/main" xmlns:r="http://schemas.openxmlformats.org/officeDocument/2006/relationships" xmlns:p="http://schemas.openxmlformats.org/presentationml/2006/main">
-  <p:cSld name="Slide 21">
+  <p:cSld name="Slide 24">
     <p:bg>
       <p:bgPr>
         <a:solidFill>
@@ -17941,7 +22406,7 @@
                 <a:ea typeface="Courier New" pitchFamily="34" charset="-122"/>
                 <a:cs typeface="Courier New" pitchFamily="34" charset="-120"/>
               </a:rPr>
-              <a:t>21</a:t>
+              <a:t>24</a:t>
             </a:r>
             <a:endParaRPr lang="en-US" sz="800" dirty="0"/>
           </a:p>

--- a/7. Oportunidades_Soluciones.pptx
+++ b/7. Oportunidades_Soluciones.pptx
@@ -1396,2118 +1396,6 @@
     </a:lvl9pPr>
   </p:notesStyle>
 </p:notesMaster>
-</file>
-
-<file path=ppt/notesSlides/notesSlide1.xml><?xml version="1.0" encoding="utf-8"?>
-<p:notes xmlns:a="http://schemas.openxmlformats.org/drawingml/2006/main" xmlns:r="http://schemas.openxmlformats.org/officeDocument/2006/relationships" xmlns:p="http://schemas.openxmlformats.org/presentationml/2006/main">
-  <p:cSld>
-    <p:spTree>
-      <p:nvGrpSpPr>
-        <p:cNvPr id="1" name=""/>
-        <p:cNvGrpSpPr/>
-        <p:nvPr/>
-      </p:nvGrpSpPr>
-      <p:grpSpPr>
-        <a:xfrm>
-          <a:off x="0" y="0"/>
-          <a:ext cx="0" cy="0"/>
-          <a:chOff x="0" y="0"/>
-          <a:chExt cx="0" cy="0"/>
-        </a:xfrm>
-      </p:grpSpPr>
-      <p:sp>
-        <p:nvSpPr>
-          <p:cNvPr id="2" name="Slide Image Placeholder 1"/>
-          <p:cNvSpPr>
-            <a:spLocks noGrp="1" noRot="1" noChangeAspect="1"/>
-          </p:cNvSpPr>
-          <p:nvPr>
-            <p:ph type="sldImg"/>
-          </p:nvPr>
-        </p:nvSpPr>
-        <p:spPr/>
-      </p:sp>
-      <p:sp>
-        <p:nvSpPr>
-          <p:cNvPr id="3" name="Notes Placeholder 2"/>
-          <p:cNvSpPr>
-            <a:spLocks noGrp="1"/>
-          </p:cNvSpPr>
-          <p:nvPr>
-            <p:ph type="body" idx="1"/>
-          </p:nvPr>
-        </p:nvSpPr>
-        <p:spPr/>
-        <p:txBody>
-          <a:bodyPr/>
-          <a:lstStyle/>
-          <a:p>
-            <a:r>
-              <a:rPr lang="en-US" dirty="0"/>
-              <a:t>Hilo de la clase: primero entendemos el contexto (AS-IS y brechas), luego armamos posibles soluciones, y al final aprendemos a decidir entre ellas con un método defendible. Todo con un mismo ejemplo: RedExpress.</a:t>
-            </a:r>
-            <a:endParaRPr lang="en-US" dirty="0"/>
-          </a:p>
-        </p:txBody>
-      </p:sp>
-      <p:sp>
-        <p:nvSpPr>
-          <p:cNvPr id="4" name="Slide Number Placeholder 3"/>
-          <p:cNvSpPr>
-            <a:spLocks noGrp="1"/>
-          </p:cNvSpPr>
-          <p:nvPr>
-            <p:ph type="sldNum" sz="quarter" idx="10"/>
-          </p:nvPr>
-        </p:nvSpPr>
-        <p:spPr/>
-        <p:txBody>
-          <a:bodyPr/>
-          <a:lstStyle/>
-          <a:p>
-            <a:fld id="{F7021451-1387-4CA6-816F-3879F97B5CBC}" type="slidenum">
-              <a:rPr lang="en-US"/>
-              <a:t>1</a:t>
-            </a:fld>
-            <a:endParaRPr lang="en-US"/>
-          </a:p>
-        </p:txBody>
-      </p:sp>
-    </p:spTree>
-    <p:extLst>
-      <p:ext uri="{BB962C8B-B14F-4D97-AF65-F5344CB8AC3E}">
-        <p14:creationId xmlns:p14="http://schemas.microsoft.com/office/powerpoint/2010/main" val="1024086991"/>
-      </p:ext>
-    </p:extLst>
-  </p:cSld>
-  <p:clrMapOvr>
-    <a:masterClrMapping/>
-  </p:clrMapOvr>
-</p:notes>
-</file>
-
-<file path=ppt/notesSlides/notesSlide10.xml><?xml version="1.0" encoding="utf-8"?>
-<p:notes xmlns:a="http://schemas.openxmlformats.org/drawingml/2006/main" xmlns:r="http://schemas.openxmlformats.org/officeDocument/2006/relationships" xmlns:p="http://schemas.openxmlformats.org/presentationml/2006/main">
-  <p:cSld>
-    <p:spTree>
-      <p:nvGrpSpPr>
-        <p:cNvPr id="1" name=""/>
-        <p:cNvGrpSpPr/>
-        <p:nvPr/>
-      </p:nvGrpSpPr>
-      <p:grpSpPr>
-        <a:xfrm>
-          <a:off x="0" y="0"/>
-          <a:ext cx="0" cy="0"/>
-          <a:chOff x="0" y="0"/>
-          <a:chExt cx="0" cy="0"/>
-        </a:xfrm>
-      </p:grpSpPr>
-      <p:sp>
-        <p:nvSpPr>
-          <p:cNvPr id="2" name="Slide Image Placeholder 1"/>
-          <p:cNvSpPr>
-            <a:spLocks noGrp="1" noRot="1" noChangeAspect="1"/>
-          </p:cNvSpPr>
-          <p:nvPr>
-            <p:ph type="sldImg"/>
-          </p:nvPr>
-        </p:nvSpPr>
-        <p:spPr/>
-      </p:sp>
-      <p:sp>
-        <p:nvSpPr>
-          <p:cNvPr id="3" name="Notes Placeholder 2"/>
-          <p:cNvSpPr>
-            <a:spLocks noGrp="1"/>
-          </p:cNvSpPr>
-          <p:nvPr>
-            <p:ph type="body" idx="1"/>
-          </p:nvPr>
-        </p:nvSpPr>
-        <p:spPr/>
-        <p:txBody>
-          <a:bodyPr/>
-          <a:lstStyle/>
-          <a:p>
-            <a:r>
-              <a:rPr lang="en-US" dirty="0"/>
-              <a:t>Es el marco de decisión de ocho pasos del Módulo 8 (Gobierno de Arquitectura). Aquí se practica; en el Taller 9 se registra el resultado como ADR.</a:t>
-            </a:r>
-            <a:endParaRPr lang="en-US" dirty="0"/>
-          </a:p>
-        </p:txBody>
-      </p:sp>
-      <p:sp>
-        <p:nvSpPr>
-          <p:cNvPr id="4" name="Slide Number Placeholder 3"/>
-          <p:cNvSpPr>
-            <a:spLocks noGrp="1"/>
-          </p:cNvSpPr>
-          <p:nvPr>
-            <p:ph type="sldNum" sz="quarter" idx="10"/>
-          </p:nvPr>
-        </p:nvSpPr>
-        <p:spPr/>
-        <p:txBody>
-          <a:bodyPr/>
-          <a:lstStyle/>
-          <a:p>
-            <a:fld id="{F7021451-1387-4CA6-816F-3879F97B5CBC}" type="slidenum">
-              <a:rPr lang="en-US"/>
-              <a:t>10</a:t>
-            </a:fld>
-            <a:endParaRPr lang="en-US"/>
-          </a:p>
-        </p:txBody>
-      </p:sp>
-    </p:spTree>
-    <p:extLst>
-      <p:ext uri="{BB962C8B-B14F-4D97-AF65-F5344CB8AC3E}">
-        <p14:creationId xmlns:p14="http://schemas.microsoft.com/office/powerpoint/2010/main" val="1024086991"/>
-      </p:ext>
-    </p:extLst>
-  </p:cSld>
-  <p:clrMapOvr>
-    <a:masterClrMapping/>
-  </p:clrMapOvr>
-</p:notes>
-</file>
-
-<file path=ppt/notesSlides/notesSlide11.xml><?xml version="1.0" encoding="utf-8"?>
-<p:notes xmlns:a="http://schemas.openxmlformats.org/drawingml/2006/main" xmlns:r="http://schemas.openxmlformats.org/officeDocument/2006/relationships" xmlns:p="http://schemas.openxmlformats.org/presentationml/2006/main">
-  <p:cSld>
-    <p:spTree>
-      <p:nvGrpSpPr>
-        <p:cNvPr id="1" name=""/>
-        <p:cNvGrpSpPr/>
-        <p:nvPr/>
-      </p:nvGrpSpPr>
-      <p:grpSpPr>
-        <a:xfrm>
-          <a:off x="0" y="0"/>
-          <a:ext cx="0" cy="0"/>
-          <a:chOff x="0" y="0"/>
-          <a:chExt cx="0" cy="0"/>
-        </a:xfrm>
-      </p:grpSpPr>
-      <p:sp>
-        <p:nvSpPr>
-          <p:cNvPr id="2" name="Slide Image Placeholder 1"/>
-          <p:cNvSpPr>
-            <a:spLocks noGrp="1" noRot="1" noChangeAspect="1"/>
-          </p:cNvSpPr>
-          <p:nvPr>
-            <p:ph type="sldImg"/>
-          </p:nvPr>
-        </p:nvSpPr>
-        <p:spPr/>
-      </p:sp>
-      <p:sp>
-        <p:nvSpPr>
-          <p:cNvPr id="3" name="Notes Placeholder 2"/>
-          <p:cNvSpPr>
-            <a:spLocks noGrp="1"/>
-          </p:cNvSpPr>
-          <p:nvPr>
-            <p:ph type="body" idx="1"/>
-          </p:nvPr>
-        </p:nvSpPr>
-        <p:spPr/>
-        <p:txBody>
-          <a:bodyPr/>
-          <a:lstStyle/>
-          <a:p>
-            <a:r>
-              <a:rPr lang="en-US" dirty="0"/>
-              <a:t>Regla práctica: si su enunciado contiene el nombre de una tecnología o la palabra 'necesitamos', reescríbalo. Fechas, dólares y volúmenes son supuestos del ejemplo.</a:t>
-            </a:r>
-            <a:endParaRPr lang="en-US" dirty="0"/>
-          </a:p>
-        </p:txBody>
-      </p:sp>
-      <p:sp>
-        <p:nvSpPr>
-          <p:cNvPr id="4" name="Slide Number Placeholder 3"/>
-          <p:cNvSpPr>
-            <a:spLocks noGrp="1"/>
-          </p:cNvSpPr>
-          <p:nvPr>
-            <p:ph type="sldNum" sz="quarter" idx="10"/>
-          </p:nvPr>
-        </p:nvSpPr>
-        <p:spPr/>
-        <p:txBody>
-          <a:bodyPr/>
-          <a:lstStyle/>
-          <a:p>
-            <a:fld id="{F7021451-1387-4CA6-816F-3879F97B5CBC}" type="slidenum">
-              <a:rPr lang="en-US"/>
-              <a:t>11</a:t>
-            </a:fld>
-            <a:endParaRPr lang="en-US"/>
-          </a:p>
-        </p:txBody>
-      </p:sp>
-    </p:spTree>
-    <p:extLst>
-      <p:ext uri="{BB962C8B-B14F-4D97-AF65-F5344CB8AC3E}">
-        <p14:creationId xmlns:p14="http://schemas.microsoft.com/office/powerpoint/2010/main" val="1024086991"/>
-      </p:ext>
-    </p:extLst>
-  </p:cSld>
-  <p:clrMapOvr>
-    <a:masterClrMapping/>
-  </p:clrMapOvr>
-</p:notes>
-</file>
-
-<file path=ppt/notesSlides/notesSlide12.xml><?xml version="1.0" encoding="utf-8"?>
-<p:notes xmlns:a="http://schemas.openxmlformats.org/drawingml/2006/main" xmlns:r="http://schemas.openxmlformats.org/officeDocument/2006/relationships" xmlns:p="http://schemas.openxmlformats.org/presentationml/2006/main">
-  <p:cSld>
-    <p:spTree>
-      <p:nvGrpSpPr>
-        <p:cNvPr id="1" name=""/>
-        <p:cNvGrpSpPr/>
-        <p:nvPr/>
-      </p:nvGrpSpPr>
-      <p:grpSpPr>
-        <a:xfrm>
-          <a:off x="0" y="0"/>
-          <a:ext cx="0" cy="0"/>
-          <a:chOff x="0" y="0"/>
-          <a:chExt cx="0" cy="0"/>
-        </a:xfrm>
-      </p:grpSpPr>
-      <p:sp>
-        <p:nvSpPr>
-          <p:cNvPr id="2" name="Slide Image Placeholder 1"/>
-          <p:cNvSpPr>
-            <a:spLocks noGrp="1" noRot="1" noChangeAspect="1"/>
-          </p:cNvSpPr>
-          <p:nvPr>
-            <p:ph type="sldImg"/>
-          </p:nvPr>
-        </p:nvSpPr>
-        <p:spPr/>
-      </p:sp>
-      <p:sp>
-        <p:nvSpPr>
-          <p:cNvPr id="3" name="Notes Placeholder 2"/>
-          <p:cNvSpPr>
-            <a:spLocks noGrp="1"/>
-          </p:cNvSpPr>
-          <p:nvPr>
-            <p:ph type="body" idx="1"/>
-          </p:nvPr>
-        </p:nvSpPr>
-        <p:spPr/>
-        <p:txBody>
-          <a:bodyPr/>
-          <a:lstStyle/>
-          <a:p>
-            <a:r>
-              <a:rPr lang="en-US" dirty="0"/>
-              <a:t>Cada criterio lleva una escala explícita para que dos personas puntúen igual. 5 siempre es lo más favorable (más barato, más simple, más rápido). Rangos intermedios de costo: 4 = 100-500, 3 = 500-800, 2 = 800-1.200. Tiempo: 4 = 2-3 sem., 3 = 4-6, 2 = 7-10.</a:t>
-            </a:r>
-            <a:endParaRPr lang="en-US" dirty="0"/>
-          </a:p>
-        </p:txBody>
-      </p:sp>
-      <p:sp>
-        <p:nvSpPr>
-          <p:cNvPr id="4" name="Slide Number Placeholder 3"/>
-          <p:cNvSpPr>
-            <a:spLocks noGrp="1"/>
-          </p:cNvSpPr>
-          <p:nvPr>
-            <p:ph type="sldNum" sz="quarter" idx="10"/>
-          </p:nvPr>
-        </p:nvSpPr>
-        <p:spPr/>
-        <p:txBody>
-          <a:bodyPr/>
-          <a:lstStyle/>
-          <a:p>
-            <a:fld id="{F7021451-1387-4CA6-816F-3879F97B5CBC}" type="slidenum">
-              <a:rPr lang="en-US"/>
-              <a:t>12</a:t>
-            </a:fld>
-            <a:endParaRPr lang="en-US"/>
-          </a:p>
-        </p:txBody>
-      </p:sp>
-    </p:spTree>
-    <p:extLst>
-      <p:ext uri="{BB962C8B-B14F-4D97-AF65-F5344CB8AC3E}">
-        <p14:creationId xmlns:p14="http://schemas.microsoft.com/office/powerpoint/2010/main" val="1024086991"/>
-      </p:ext>
-    </p:extLst>
-  </p:cSld>
-  <p:clrMapOvr>
-    <a:masterClrMapping/>
-  </p:clrMapOvr>
-</p:notes>
-</file>
-
-<file path=ppt/notesSlides/notesSlide13.xml><?xml version="1.0" encoding="utf-8"?>
-<p:notes xmlns:a="http://schemas.openxmlformats.org/drawingml/2006/main" xmlns:r="http://schemas.openxmlformats.org/officeDocument/2006/relationships" xmlns:p="http://schemas.openxmlformats.org/presentationml/2006/main">
-  <p:cSld>
-    <p:spTree>
-      <p:nvGrpSpPr>
-        <p:cNvPr id="1" name=""/>
-        <p:cNvGrpSpPr/>
-        <p:nvPr/>
-      </p:nvGrpSpPr>
-      <p:grpSpPr>
-        <a:xfrm>
-          <a:off x="0" y="0"/>
-          <a:ext cx="0" cy="0"/>
-          <a:chOff x="0" y="0"/>
-          <a:chExt cx="0" cy="0"/>
-        </a:xfrm>
-      </p:grpSpPr>
-      <p:sp>
-        <p:nvSpPr>
-          <p:cNvPr id="2" name="Slide Image Placeholder 1"/>
-          <p:cNvSpPr>
-            <a:spLocks noGrp="1" noRot="1" noChangeAspect="1"/>
-          </p:cNvSpPr>
-          <p:nvPr>
-            <p:ph type="sldImg"/>
-          </p:nvPr>
-        </p:nvSpPr>
-        <p:spPr/>
-      </p:sp>
-      <p:sp>
-        <p:nvSpPr>
-          <p:cNvPr id="3" name="Notes Placeholder 2"/>
-          <p:cNvSpPr>
-            <a:spLocks noGrp="1"/>
-          </p:cNvSpPr>
-          <p:nvPr>
-            <p:ph type="body" idx="1"/>
-          </p:nvPr>
-        </p:nvSpPr>
-        <p:spPr/>
-        <p:txBody>
-          <a:bodyPr/>
-          <a:lstStyle/>
-          <a:p>
-            <a:r>
-              <a:rPr lang="en-US" dirty="0"/>
-              <a:t>Se consulta a quien sabe (aporta datos) y a quien le afecta (aporta el umbral de lo tolerable). Anotar quién dijo qué permite defender cada puntaje.</a:t>
-            </a:r>
-            <a:endParaRPr lang="en-US" dirty="0"/>
-          </a:p>
-        </p:txBody>
-      </p:sp>
-      <p:sp>
-        <p:nvSpPr>
-          <p:cNvPr id="4" name="Slide Number Placeholder 3"/>
-          <p:cNvSpPr>
-            <a:spLocks noGrp="1"/>
-          </p:cNvSpPr>
-          <p:nvPr>
-            <p:ph type="sldNum" sz="quarter" idx="10"/>
-          </p:nvPr>
-        </p:nvSpPr>
-        <p:spPr/>
-        <p:txBody>
-          <a:bodyPr/>
-          <a:lstStyle/>
-          <a:p>
-            <a:fld id="{F7021451-1387-4CA6-816F-3879F97B5CBC}" type="slidenum">
-              <a:rPr lang="en-US"/>
-              <a:t>13</a:t>
-            </a:fld>
-            <a:endParaRPr lang="en-US"/>
-          </a:p>
-        </p:txBody>
-      </p:sp>
-    </p:spTree>
-    <p:extLst>
-      <p:ext uri="{BB962C8B-B14F-4D97-AF65-F5344CB8AC3E}">
-        <p14:creationId xmlns:p14="http://schemas.microsoft.com/office/powerpoint/2010/main" val="1024086991"/>
-      </p:ext>
-    </p:extLst>
-  </p:cSld>
-  <p:clrMapOvr>
-    <a:masterClrMapping/>
-  </p:clrMapOvr>
-</p:notes>
-</file>
-
-<file path=ppt/notesSlides/notesSlide14.xml><?xml version="1.0" encoding="utf-8"?>
-<p:notes xmlns:a="http://schemas.openxmlformats.org/drawingml/2006/main" xmlns:r="http://schemas.openxmlformats.org/officeDocument/2006/relationships" xmlns:p="http://schemas.openxmlformats.org/presentationml/2006/main">
-  <p:cSld>
-    <p:spTree>
-      <p:nvGrpSpPr>
-        <p:cNvPr id="1" name=""/>
-        <p:cNvGrpSpPr/>
-        <p:nvPr/>
-      </p:nvGrpSpPr>
-      <p:grpSpPr>
-        <a:xfrm>
-          <a:off x="0" y="0"/>
-          <a:ext cx="0" cy="0"/>
-          <a:chOff x="0" y="0"/>
-          <a:chExt cx="0" cy="0"/>
-        </a:xfrm>
-      </p:grpSpPr>
-      <p:sp>
-        <p:nvSpPr>
-          <p:cNvPr id="2" name="Slide Image Placeholder 1"/>
-          <p:cNvSpPr>
-            <a:spLocks noGrp="1" noRot="1" noChangeAspect="1"/>
-          </p:cNvSpPr>
-          <p:nvPr>
-            <p:ph type="sldImg"/>
-          </p:nvPr>
-        </p:nvSpPr>
-        <p:spPr/>
-      </p:sp>
-      <p:sp>
-        <p:nvSpPr>
-          <p:cNvPr id="3" name="Notes Placeholder 2"/>
-          <p:cNvSpPr>
-            <a:spLocks noGrp="1"/>
-          </p:cNvSpPr>
-          <p:nvPr>
-            <p:ph type="body" idx="1"/>
-          </p:nvPr>
-        </p:nvSpPr>
-        <p:spPr/>
-        <p:txBody>
-          <a:bodyPr/>
-          <a:lstStyle/>
-          <a:p>
-            <a:r>
-              <a:rPr lang="en-US" dirty="0"/>
-              <a:t>Escala 1-5, donde 5 siempre es lo más favorable. Fíjese en C: saca 5 en costo, complejidad y tiempo, pero 1 en disponibilidad, que es justo lo que el problema exige.</a:t>
-            </a:r>
-            <a:endParaRPr lang="en-US" dirty="0"/>
-          </a:p>
-        </p:txBody>
-      </p:sp>
-      <p:sp>
-        <p:nvSpPr>
-          <p:cNvPr id="4" name="Slide Number Placeholder 3"/>
-          <p:cNvSpPr>
-            <a:spLocks noGrp="1"/>
-          </p:cNvSpPr>
-          <p:nvPr>
-            <p:ph type="sldNum" sz="quarter" idx="10"/>
-          </p:nvPr>
-        </p:nvSpPr>
-        <p:spPr/>
-        <p:txBody>
-          <a:bodyPr/>
-          <a:lstStyle/>
-          <a:p>
-            <a:fld id="{F7021451-1387-4CA6-816F-3879F97B5CBC}" type="slidenum">
-              <a:rPr lang="en-US"/>
-              <a:t>14</a:t>
-            </a:fld>
-            <a:endParaRPr lang="en-US"/>
-          </a:p>
-        </p:txBody>
-      </p:sp>
-    </p:spTree>
-    <p:extLst>
-      <p:ext uri="{BB962C8B-B14F-4D97-AF65-F5344CB8AC3E}">
-        <p14:creationId xmlns:p14="http://schemas.microsoft.com/office/powerpoint/2010/main" val="1024086991"/>
-      </p:ext>
-    </p:extLst>
-  </p:cSld>
-  <p:clrMapOvr>
-    <a:masterClrMapping/>
-  </p:clrMapOvr>
-</p:notes>
-</file>
-
-<file path=ppt/notesSlides/notesSlide15.xml><?xml version="1.0" encoding="utf-8"?>
-<p:notes xmlns:a="http://schemas.openxmlformats.org/drawingml/2006/main" xmlns:r="http://schemas.openxmlformats.org/officeDocument/2006/relationships" xmlns:p="http://schemas.openxmlformats.org/presentationml/2006/main">
-  <p:cSld>
-    <p:spTree>
-      <p:nvGrpSpPr>
-        <p:cNvPr id="1" name=""/>
-        <p:cNvGrpSpPr/>
-        <p:nvPr/>
-      </p:nvGrpSpPr>
-      <p:grpSpPr>
-        <a:xfrm>
-          <a:off x="0" y="0"/>
-          <a:ext cx="0" cy="0"/>
-          <a:chOff x="0" y="0"/>
-          <a:chExt cx="0" cy="0"/>
-        </a:xfrm>
-      </p:grpSpPr>
-      <p:sp>
-        <p:nvSpPr>
-          <p:cNvPr id="2" name="Slide Image Placeholder 1"/>
-          <p:cNvSpPr>
-            <a:spLocks noGrp="1" noRot="1" noChangeAspect="1"/>
-          </p:cNvSpPr>
-          <p:nvPr>
-            <p:ph type="sldImg"/>
-          </p:nvPr>
-        </p:nvSpPr>
-        <p:spPr/>
-      </p:sp>
-      <p:sp>
-        <p:nvSpPr>
-          <p:cNvPr id="3" name="Notes Placeholder 2"/>
-          <p:cNvSpPr>
-            <a:spLocks noGrp="1"/>
-          </p:cNvSpPr>
-          <p:nvPr>
-            <p:ph type="body" idx="1"/>
-          </p:nvPr>
-        </p:nvSpPr>
-        <p:spPr/>
-        <p:txBody>
-          <a:bodyPr/>
-          <a:lstStyle/>
-          <a:p>
-            <a:r>
-              <a:rPr lang="en-US" dirty="0"/>
-              <a:t>Cálculo: puntaje × peso de cada criterio, sumado. Los pesos suman 100 % (0,35 + 0,25 + 0,20 + 0,20).</a:t>
-            </a:r>
-            <a:endParaRPr lang="en-US" dirty="0"/>
-          </a:p>
-        </p:txBody>
-      </p:sp>
-      <p:sp>
-        <p:nvSpPr>
-          <p:cNvPr id="4" name="Slide Number Placeholder 3"/>
-          <p:cNvSpPr>
-            <a:spLocks noGrp="1"/>
-          </p:cNvSpPr>
-          <p:nvPr>
-            <p:ph type="sldNum" sz="quarter" idx="10"/>
-          </p:nvPr>
-        </p:nvSpPr>
-        <p:spPr/>
-        <p:txBody>
-          <a:bodyPr/>
-          <a:lstStyle/>
-          <a:p>
-            <a:fld id="{F7021451-1387-4CA6-816F-3879F97B5CBC}" type="slidenum">
-              <a:rPr lang="en-US"/>
-              <a:t>15</a:t>
-            </a:fld>
-            <a:endParaRPr lang="en-US"/>
-          </a:p>
-        </p:txBody>
-      </p:sp>
-    </p:spTree>
-    <p:extLst>
-      <p:ext uri="{BB962C8B-B14F-4D97-AF65-F5344CB8AC3E}">
-        <p14:creationId xmlns:p14="http://schemas.microsoft.com/office/powerpoint/2010/main" val="1024086991"/>
-      </p:ext>
-    </p:extLst>
-  </p:cSld>
-  <p:clrMapOvr>
-    <a:masterClrMapping/>
-  </p:clrMapOvr>
-</p:notes>
-</file>
-
-<file path=ppt/notesSlides/notesSlide16.xml><?xml version="1.0" encoding="utf-8"?>
-<p:notes xmlns:a="http://schemas.openxmlformats.org/drawingml/2006/main" xmlns:r="http://schemas.openxmlformats.org/officeDocument/2006/relationships" xmlns:p="http://schemas.openxmlformats.org/presentationml/2006/main">
-  <p:cSld>
-    <p:spTree>
-      <p:nvGrpSpPr>
-        <p:cNvPr id="1" name=""/>
-        <p:cNvGrpSpPr/>
-        <p:nvPr/>
-      </p:nvGrpSpPr>
-      <p:grpSpPr>
-        <a:xfrm>
-          <a:off x="0" y="0"/>
-          <a:ext cx="0" cy="0"/>
-          <a:chOff x="0" y="0"/>
-          <a:chExt cx="0" cy="0"/>
-        </a:xfrm>
-      </p:grpSpPr>
-      <p:sp>
-        <p:nvSpPr>
-          <p:cNvPr id="2" name="Slide Image Placeholder 1"/>
-          <p:cNvSpPr>
-            <a:spLocks noGrp="1" noRot="1" noChangeAspect="1"/>
-          </p:cNvSpPr>
-          <p:nvPr>
-            <p:ph type="sldImg"/>
-          </p:nvPr>
-        </p:nvSpPr>
-        <p:spPr/>
-      </p:sp>
-      <p:sp>
-        <p:nvSpPr>
-          <p:cNvPr id="3" name="Notes Placeholder 2"/>
-          <p:cNvSpPr>
-            <a:spLocks noGrp="1"/>
-          </p:cNvSpPr>
-          <p:nvPr>
-            <p:ph type="body" idx="1"/>
-          </p:nvPr>
-        </p:nvSpPr>
-        <p:spPr/>
-        <p:txBody>
-          <a:bodyPr/>
-          <a:lstStyle/>
-          <a:p>
-            <a:r>
-              <a:rPr lang="en-US" dirty="0"/>
-              <a:t>Esta es la lámina que más se olvida. La matriz no decide por usted: le muestra qué pasa con distintos supuestos. Demostrar en vivo con la página visualizacion-opportunities-solutions.html del repo.</a:t>
-            </a:r>
-            <a:endParaRPr lang="en-US" dirty="0"/>
-          </a:p>
-        </p:txBody>
-      </p:sp>
-      <p:sp>
-        <p:nvSpPr>
-          <p:cNvPr id="4" name="Slide Number Placeholder 3"/>
-          <p:cNvSpPr>
-            <a:spLocks noGrp="1"/>
-          </p:cNvSpPr>
-          <p:nvPr>
-            <p:ph type="sldNum" sz="quarter" idx="10"/>
-          </p:nvPr>
-        </p:nvSpPr>
-        <p:spPr/>
-        <p:txBody>
-          <a:bodyPr/>
-          <a:lstStyle/>
-          <a:p>
-            <a:fld id="{F7021451-1387-4CA6-816F-3879F97B5CBC}" type="slidenum">
-              <a:rPr lang="en-US"/>
-              <a:t>16</a:t>
-            </a:fld>
-            <a:endParaRPr lang="en-US"/>
-          </a:p>
-        </p:txBody>
-      </p:sp>
-    </p:spTree>
-    <p:extLst>
-      <p:ext uri="{BB962C8B-B14F-4D97-AF65-F5344CB8AC3E}">
-        <p14:creationId xmlns:p14="http://schemas.microsoft.com/office/powerpoint/2010/main" val="1024086991"/>
-      </p:ext>
-    </p:extLst>
-  </p:cSld>
-  <p:clrMapOvr>
-    <a:masterClrMapping/>
-  </p:clrMapOvr>
-</p:notes>
-</file>
-
-<file path=ppt/notesSlides/notesSlide17.xml><?xml version="1.0" encoding="utf-8"?>
-<p:notes xmlns:a="http://schemas.openxmlformats.org/drawingml/2006/main" xmlns:r="http://schemas.openxmlformats.org/officeDocument/2006/relationships" xmlns:p="http://schemas.openxmlformats.org/presentationml/2006/main">
-  <p:cSld>
-    <p:spTree>
-      <p:nvGrpSpPr>
-        <p:cNvPr id="1" name=""/>
-        <p:cNvGrpSpPr/>
-        <p:nvPr/>
-      </p:nvGrpSpPr>
-      <p:grpSpPr>
-        <a:xfrm>
-          <a:off x="0" y="0"/>
-          <a:ext cx="0" cy="0"/>
-          <a:chOff x="0" y="0"/>
-          <a:chExt cx="0" cy="0"/>
-        </a:xfrm>
-      </p:grpSpPr>
-      <p:sp>
-        <p:nvSpPr>
-          <p:cNvPr id="2" name="Slide Image Placeholder 1"/>
-          <p:cNvSpPr>
-            <a:spLocks noGrp="1" noRot="1" noChangeAspect="1"/>
-          </p:cNvSpPr>
-          <p:nvPr>
-            <p:ph type="sldImg"/>
-          </p:nvPr>
-        </p:nvSpPr>
-        <p:spPr/>
-      </p:sp>
-      <p:sp>
-        <p:nvSpPr>
-          <p:cNvPr id="3" name="Notes Placeholder 2"/>
-          <p:cNvSpPr>
-            <a:spLocks noGrp="1"/>
-          </p:cNvSpPr>
-          <p:nvPr>
-            <p:ph type="body" idx="1"/>
-          </p:nvPr>
-        </p:nvSpPr>
-        <p:spPr/>
-        <p:txBody>
-          <a:bodyPr/>
-          <a:lstStyle/>
-          <a:p>
-            <a:r>
-              <a:rPr lang="en-US" dirty="0"/>
-              <a:t>La IA es muy buena ampliando opciones y generando la pregunta incómoda; es poco confiable dando cifras. Por eso cada afirmación suya se verifica o se recalcula.</a:t>
-            </a:r>
-            <a:endParaRPr lang="en-US" dirty="0"/>
-          </a:p>
-        </p:txBody>
-      </p:sp>
-      <p:sp>
-        <p:nvSpPr>
-          <p:cNvPr id="4" name="Slide Number Placeholder 3"/>
-          <p:cNvSpPr>
-            <a:spLocks noGrp="1"/>
-          </p:cNvSpPr>
-          <p:nvPr>
-            <p:ph type="sldNum" sz="quarter" idx="10"/>
-          </p:nvPr>
-        </p:nvSpPr>
-        <p:spPr/>
-        <p:txBody>
-          <a:bodyPr/>
-          <a:lstStyle/>
-          <a:p>
-            <a:fld id="{F7021451-1387-4CA6-816F-3879F97B5CBC}" type="slidenum">
-              <a:rPr lang="en-US"/>
-              <a:t>17</a:t>
-            </a:fld>
-            <a:endParaRPr lang="en-US"/>
-          </a:p>
-        </p:txBody>
-      </p:sp>
-    </p:spTree>
-    <p:extLst>
-      <p:ext uri="{BB962C8B-B14F-4D97-AF65-F5344CB8AC3E}">
-        <p14:creationId xmlns:p14="http://schemas.microsoft.com/office/powerpoint/2010/main" val="1024086991"/>
-      </p:ext>
-    </p:extLst>
-  </p:cSld>
-  <p:clrMapOvr>
-    <a:masterClrMapping/>
-  </p:clrMapOvr>
-</p:notes>
-</file>
-
-<file path=ppt/notesSlides/notesSlide18.xml><?xml version="1.0" encoding="utf-8"?>
-<p:notes xmlns:a="http://schemas.openxmlformats.org/drawingml/2006/main" xmlns:r="http://schemas.openxmlformats.org/officeDocument/2006/relationships" xmlns:p="http://schemas.openxmlformats.org/presentationml/2006/main">
-  <p:cSld>
-    <p:spTree>
-      <p:nvGrpSpPr>
-        <p:cNvPr id="1" name=""/>
-        <p:cNvGrpSpPr/>
-        <p:nvPr/>
-      </p:nvGrpSpPr>
-      <p:grpSpPr>
-        <a:xfrm>
-          <a:off x="0" y="0"/>
-          <a:ext cx="0" cy="0"/>
-          <a:chOff x="0" y="0"/>
-          <a:chExt cx="0" cy="0"/>
-        </a:xfrm>
-      </p:grpSpPr>
-      <p:sp>
-        <p:nvSpPr>
-          <p:cNvPr id="2" name="Slide Image Placeholder 1"/>
-          <p:cNvSpPr>
-            <a:spLocks noGrp="1" noRot="1" noChangeAspect="1"/>
-          </p:cNvSpPr>
-          <p:nvPr>
-            <p:ph type="sldImg"/>
-          </p:nvPr>
-        </p:nvSpPr>
-        <p:spPr/>
-      </p:sp>
-      <p:sp>
-        <p:nvSpPr>
-          <p:cNvPr id="3" name="Notes Placeholder 2"/>
-          <p:cNvSpPr>
-            <a:spLocks noGrp="1"/>
-          </p:cNvSpPr>
-          <p:nvPr>
-            <p:ph type="body" idx="1"/>
-          </p:nvPr>
-        </p:nvSpPr>
-        <p:spPr/>
-        <p:txBody>
-          <a:bodyPr/>
-          <a:lstStyle/>
-          <a:p>
-            <a:r>
-              <a:rPr lang="en-US" dirty="0"/>
-              <a:t>Resto del peso repartido en partes iguales entre los otros tres criterios. Comprobación: con 62,5 % ambos suman 3,875.</a:t>
-            </a:r>
-            <a:endParaRPr lang="en-US" dirty="0"/>
-          </a:p>
-        </p:txBody>
-      </p:sp>
-      <p:sp>
-        <p:nvSpPr>
-          <p:cNvPr id="4" name="Slide Number Placeholder 3"/>
-          <p:cNvSpPr>
-            <a:spLocks noGrp="1"/>
-          </p:cNvSpPr>
-          <p:nvPr>
-            <p:ph type="sldNum" sz="quarter" idx="10"/>
-          </p:nvPr>
-        </p:nvSpPr>
-        <p:spPr/>
-        <p:txBody>
-          <a:bodyPr/>
-          <a:lstStyle/>
-          <a:p>
-            <a:fld id="{F7021451-1387-4CA6-816F-3879F97B5CBC}" type="slidenum">
-              <a:rPr lang="en-US"/>
-              <a:t>18</a:t>
-            </a:fld>
-            <a:endParaRPr lang="en-US"/>
-          </a:p>
-        </p:txBody>
-      </p:sp>
-    </p:spTree>
-    <p:extLst>
-      <p:ext uri="{BB962C8B-B14F-4D97-AF65-F5344CB8AC3E}">
-        <p14:creationId xmlns:p14="http://schemas.microsoft.com/office/powerpoint/2010/main" val="1024086991"/>
-      </p:ext>
-    </p:extLst>
-  </p:cSld>
-  <p:clrMapOvr>
-    <a:masterClrMapping/>
-  </p:clrMapOvr>
-</p:notes>
-</file>
-
-<file path=ppt/notesSlides/notesSlide19.xml><?xml version="1.0" encoding="utf-8"?>
-<p:notes xmlns:a="http://schemas.openxmlformats.org/drawingml/2006/main" xmlns:r="http://schemas.openxmlformats.org/officeDocument/2006/relationships" xmlns:p="http://schemas.openxmlformats.org/presentationml/2006/main">
-  <p:cSld>
-    <p:spTree>
-      <p:nvGrpSpPr>
-        <p:cNvPr id="1" name=""/>
-        <p:cNvGrpSpPr/>
-        <p:nvPr/>
-      </p:nvGrpSpPr>
-      <p:grpSpPr>
-        <a:xfrm>
-          <a:off x="0" y="0"/>
-          <a:ext cx="0" cy="0"/>
-          <a:chOff x="0" y="0"/>
-          <a:chExt cx="0" cy="0"/>
-        </a:xfrm>
-      </p:grpSpPr>
-      <p:sp>
-        <p:nvSpPr>
-          <p:cNvPr id="2" name="Slide Image Placeholder 1"/>
-          <p:cNvSpPr>
-            <a:spLocks noGrp="1" noRot="1" noChangeAspect="1"/>
-          </p:cNvSpPr>
-          <p:nvPr>
-            <p:ph type="sldImg"/>
-          </p:nvPr>
-        </p:nvSpPr>
-        <p:spPr/>
-      </p:sp>
-      <p:sp>
-        <p:nvSpPr>
-          <p:cNvPr id="3" name="Notes Placeholder 2"/>
-          <p:cNvSpPr>
-            <a:spLocks noGrp="1"/>
-          </p:cNvSpPr>
-          <p:nvPr>
-            <p:ph type="body" idx="1"/>
-          </p:nvPr>
-        </p:nvSpPr>
-        <p:spPr/>
-        <p:txBody>
-          <a:bodyPr/>
-          <a:lstStyle/>
-          <a:p>
-            <a:r>
-              <a:rPr lang="en-US" dirty="0"/>
-              <a:t>Las reglas 3 y 4 son las que más se incumplen. La tríada letal y el patrón agéntico ya se vieron en el Taller 5 y en la guía de ArchiMate.</a:t>
-            </a:r>
-            <a:endParaRPr lang="en-US" dirty="0"/>
-          </a:p>
-        </p:txBody>
-      </p:sp>
-      <p:sp>
-        <p:nvSpPr>
-          <p:cNvPr id="4" name="Slide Number Placeholder 3"/>
-          <p:cNvSpPr>
-            <a:spLocks noGrp="1"/>
-          </p:cNvSpPr>
-          <p:nvPr>
-            <p:ph type="sldNum" sz="quarter" idx="10"/>
-          </p:nvPr>
-        </p:nvSpPr>
-        <p:spPr/>
-        <p:txBody>
-          <a:bodyPr/>
-          <a:lstStyle/>
-          <a:p>
-            <a:fld id="{F7021451-1387-4CA6-816F-3879F97B5CBC}" type="slidenum">
-              <a:rPr lang="en-US"/>
-              <a:t>19</a:t>
-            </a:fld>
-            <a:endParaRPr lang="en-US"/>
-          </a:p>
-        </p:txBody>
-      </p:sp>
-    </p:spTree>
-    <p:extLst>
-      <p:ext uri="{BB962C8B-B14F-4D97-AF65-F5344CB8AC3E}">
-        <p14:creationId xmlns:p14="http://schemas.microsoft.com/office/powerpoint/2010/main" val="1024086991"/>
-      </p:ext>
-    </p:extLst>
-  </p:cSld>
-  <p:clrMapOvr>
-    <a:masterClrMapping/>
-  </p:clrMapOvr>
-</p:notes>
-</file>
-
-<file path=ppt/notesSlides/notesSlide2.xml><?xml version="1.0" encoding="utf-8"?>
-<p:notes xmlns:a="http://schemas.openxmlformats.org/drawingml/2006/main" xmlns:r="http://schemas.openxmlformats.org/officeDocument/2006/relationships" xmlns:p="http://schemas.openxmlformats.org/presentationml/2006/main">
-  <p:cSld>
-    <p:spTree>
-      <p:nvGrpSpPr>
-        <p:cNvPr id="1" name=""/>
-        <p:cNvGrpSpPr/>
-        <p:nvPr/>
-      </p:nvGrpSpPr>
-      <p:grpSpPr>
-        <a:xfrm>
-          <a:off x="0" y="0"/>
-          <a:ext cx="0" cy="0"/>
-          <a:chOff x="0" y="0"/>
-          <a:chExt cx="0" cy="0"/>
-        </a:xfrm>
-      </p:grpSpPr>
-      <p:sp>
-        <p:nvSpPr>
-          <p:cNvPr id="2" name="Slide Image Placeholder 1"/>
-          <p:cNvSpPr>
-            <a:spLocks noGrp="1" noRot="1" noChangeAspect="1"/>
-          </p:cNvSpPr>
-          <p:nvPr>
-            <p:ph type="sldImg"/>
-          </p:nvPr>
-        </p:nvSpPr>
-        <p:spPr/>
-      </p:sp>
-      <p:sp>
-        <p:nvSpPr>
-          <p:cNvPr id="3" name="Notes Placeholder 2"/>
-          <p:cNvSpPr>
-            <a:spLocks noGrp="1"/>
-          </p:cNvSpPr>
-          <p:nvPr>
-            <p:ph type="body" idx="1"/>
-          </p:nvPr>
-        </p:nvSpPr>
-        <p:spPr/>
-        <p:txBody>
-          <a:bodyPr/>
-          <a:lstStyle/>
-          <a:p>
-            <a:r>
-              <a:rPr lang="en-US" dirty="0"/>
-              <a:t>El ejemplo continuo de toda la clase es RedExpress (Talleres 3 y 4). En su proyecto real suman también las brechas de seguridad (Taller 5) y de cumplimiento (Taller 6).</a:t>
-            </a:r>
-            <a:endParaRPr lang="en-US" dirty="0"/>
-          </a:p>
-        </p:txBody>
-      </p:sp>
-      <p:sp>
-        <p:nvSpPr>
-          <p:cNvPr id="4" name="Slide Number Placeholder 3"/>
-          <p:cNvSpPr>
-            <a:spLocks noGrp="1"/>
-          </p:cNvSpPr>
-          <p:nvPr>
-            <p:ph type="sldNum" sz="quarter" idx="10"/>
-          </p:nvPr>
-        </p:nvSpPr>
-        <p:spPr/>
-        <p:txBody>
-          <a:bodyPr/>
-          <a:lstStyle/>
-          <a:p>
-            <a:fld id="{F7021451-1387-4CA6-816F-3879F97B5CBC}" type="slidenum">
-              <a:rPr lang="en-US"/>
-              <a:t>2</a:t>
-            </a:fld>
-            <a:endParaRPr lang="en-US"/>
-          </a:p>
-        </p:txBody>
-      </p:sp>
-    </p:spTree>
-    <p:extLst>
-      <p:ext uri="{BB962C8B-B14F-4D97-AF65-F5344CB8AC3E}">
-        <p14:creationId xmlns:p14="http://schemas.microsoft.com/office/powerpoint/2010/main" val="1024086991"/>
-      </p:ext>
-    </p:extLst>
-  </p:cSld>
-  <p:clrMapOvr>
-    <a:masterClrMapping/>
-  </p:clrMapOvr>
-</p:notes>
-</file>
-
-<file path=ppt/notesSlides/notesSlide20.xml><?xml version="1.0" encoding="utf-8"?>
-<p:notes xmlns:a="http://schemas.openxmlformats.org/drawingml/2006/main" xmlns:r="http://schemas.openxmlformats.org/officeDocument/2006/relationships" xmlns:p="http://schemas.openxmlformats.org/presentationml/2006/main">
-  <p:cSld>
-    <p:spTree>
-      <p:nvGrpSpPr>
-        <p:cNvPr id="1" name=""/>
-        <p:cNvGrpSpPr/>
-        <p:nvPr/>
-      </p:nvGrpSpPr>
-      <p:grpSpPr>
-        <a:xfrm>
-          <a:off x="0" y="0"/>
-          <a:ext cx="0" cy="0"/>
-          <a:chOff x="0" y="0"/>
-          <a:chExt cx="0" cy="0"/>
-        </a:xfrm>
-      </p:grpSpPr>
-      <p:sp>
-        <p:nvSpPr>
-          <p:cNvPr id="2" name="Slide Image Placeholder 1"/>
-          <p:cNvSpPr>
-            <a:spLocks noGrp="1" noRot="1" noChangeAspect="1"/>
-          </p:cNvSpPr>
-          <p:nvPr>
-            <p:ph type="sldImg"/>
-          </p:nvPr>
-        </p:nvSpPr>
-        <p:spPr/>
-      </p:sp>
-      <p:sp>
-        <p:nvSpPr>
-          <p:cNvPr id="3" name="Notes Placeholder 2"/>
-          <p:cNvSpPr>
-            <a:spLocks noGrp="1"/>
-          </p:cNvSpPr>
-          <p:nvPr>
-            <p:ph type="body" idx="1"/>
-          </p:nvPr>
-        </p:nvSpPr>
-        <p:spPr/>
-        <p:txBody>
-          <a:bodyPr/>
-          <a:lstStyle/>
-          <a:p>
-            <a:r>
-              <a:rPr lang="en-US" dirty="0"/>
-              <a:t>Una decisión sin fecha ni disparador de revisión se vuelve dogma. Y una ADR buena lleva las alternativas descartadas con su razón y también las consecuencias negativas.</a:t>
-            </a:r>
-            <a:endParaRPr lang="en-US" dirty="0"/>
-          </a:p>
-        </p:txBody>
-      </p:sp>
-      <p:sp>
-        <p:nvSpPr>
-          <p:cNvPr id="4" name="Slide Number Placeholder 3"/>
-          <p:cNvSpPr>
-            <a:spLocks noGrp="1"/>
-          </p:cNvSpPr>
-          <p:nvPr>
-            <p:ph type="sldNum" sz="quarter" idx="10"/>
-          </p:nvPr>
-        </p:nvSpPr>
-        <p:spPr/>
-        <p:txBody>
-          <a:bodyPr/>
-          <a:lstStyle/>
-          <a:p>
-            <a:fld id="{F7021451-1387-4CA6-816F-3879F97B5CBC}" type="slidenum">
-              <a:rPr lang="en-US"/>
-              <a:t>20</a:t>
-            </a:fld>
-            <a:endParaRPr lang="en-US"/>
-          </a:p>
-        </p:txBody>
-      </p:sp>
-    </p:spTree>
-    <p:extLst>
-      <p:ext uri="{BB962C8B-B14F-4D97-AF65-F5344CB8AC3E}">
-        <p14:creationId xmlns:p14="http://schemas.microsoft.com/office/powerpoint/2010/main" val="1024086991"/>
-      </p:ext>
-    </p:extLst>
-  </p:cSld>
-  <p:clrMapOvr>
-    <a:masterClrMapping/>
-  </p:clrMapOvr>
-</p:notes>
-</file>
-
-<file path=ppt/notesSlides/notesSlide21.xml><?xml version="1.0" encoding="utf-8"?>
-<p:notes xmlns:a="http://schemas.openxmlformats.org/drawingml/2006/main" xmlns:r="http://schemas.openxmlformats.org/officeDocument/2006/relationships" xmlns:p="http://schemas.openxmlformats.org/presentationml/2006/main">
-  <p:cSld>
-    <p:spTree>
-      <p:nvGrpSpPr>
-        <p:cNvPr id="1" name=""/>
-        <p:cNvGrpSpPr/>
-        <p:nvPr/>
-      </p:nvGrpSpPr>
-      <p:grpSpPr>
-        <a:xfrm>
-          <a:off x="0" y="0"/>
-          <a:ext cx="0" cy="0"/>
-          <a:chOff x="0" y="0"/>
-          <a:chExt cx="0" cy="0"/>
-        </a:xfrm>
-      </p:grpSpPr>
-      <p:sp>
-        <p:nvSpPr>
-          <p:cNvPr id="2" name="Slide Image Placeholder 1"/>
-          <p:cNvSpPr>
-            <a:spLocks noGrp="1" noRot="1" noChangeAspect="1"/>
-          </p:cNvSpPr>
-          <p:nvPr>
-            <p:ph type="sldImg"/>
-          </p:nvPr>
-        </p:nvSpPr>
-        <p:spPr/>
-      </p:sp>
-      <p:sp>
-        <p:nvSpPr>
-          <p:cNvPr id="3" name="Notes Placeholder 2"/>
-          <p:cNvSpPr>
-            <a:spLocks noGrp="1"/>
-          </p:cNvSpPr>
-          <p:nvPr>
-            <p:ph type="body" idx="1"/>
-          </p:nvPr>
-        </p:nvSpPr>
-        <p:spPr/>
-        <p:txBody>
-          <a:bodyPr/>
-          <a:lstStyle/>
-          <a:p>
-            <a:r>
-              <a:rPr lang="en-US" dirty="0"/>
-              <a:t>Las capacidades salen de los procesos clave de la ficha del cliente (Taller 0), nombradas con verbo + objeto y sin tecnología. Cada paquete de trabajo se convierte en una fase del roadmap del Taller 9.</a:t>
-            </a:r>
-            <a:endParaRPr lang="en-US" dirty="0"/>
-          </a:p>
-        </p:txBody>
-      </p:sp>
-      <p:sp>
-        <p:nvSpPr>
-          <p:cNvPr id="4" name="Slide Number Placeholder 3"/>
-          <p:cNvSpPr>
-            <a:spLocks noGrp="1"/>
-          </p:cNvSpPr>
-          <p:nvPr>
-            <p:ph type="sldNum" sz="quarter" idx="10"/>
-          </p:nvPr>
-        </p:nvSpPr>
-        <p:spPr/>
-        <p:txBody>
-          <a:bodyPr/>
-          <a:lstStyle/>
-          <a:p>
-            <a:fld id="{F7021451-1387-4CA6-816F-3879F97B5CBC}" type="slidenum">
-              <a:rPr lang="en-US"/>
-              <a:t>21</a:t>
-            </a:fld>
-            <a:endParaRPr lang="en-US"/>
-          </a:p>
-        </p:txBody>
-      </p:sp>
-    </p:spTree>
-    <p:extLst>
-      <p:ext uri="{BB962C8B-B14F-4D97-AF65-F5344CB8AC3E}">
-        <p14:creationId xmlns:p14="http://schemas.microsoft.com/office/powerpoint/2010/main" val="1024086991"/>
-      </p:ext>
-    </p:extLst>
-  </p:cSld>
-  <p:clrMapOvr>
-    <a:masterClrMapping/>
-  </p:clrMapOvr>
-</p:notes>
-</file>
-
-<file path=ppt/notesSlides/notesSlide22.xml><?xml version="1.0" encoding="utf-8"?>
-<p:notes xmlns:a="http://schemas.openxmlformats.org/drawingml/2006/main" xmlns:r="http://schemas.openxmlformats.org/officeDocument/2006/relationships" xmlns:p="http://schemas.openxmlformats.org/presentationml/2006/main">
-  <p:cSld>
-    <p:spTree>
-      <p:nvGrpSpPr>
-        <p:cNvPr id="1" name=""/>
-        <p:cNvGrpSpPr/>
-        <p:nvPr/>
-      </p:nvGrpSpPr>
-      <p:grpSpPr>
-        <a:xfrm>
-          <a:off x="0" y="0"/>
-          <a:ext cx="0" cy="0"/>
-          <a:chOff x="0" y="0"/>
-          <a:chExt cx="0" cy="0"/>
-        </a:xfrm>
-      </p:grpSpPr>
-      <p:sp>
-        <p:nvSpPr>
-          <p:cNvPr id="2" name="Slide Image Placeholder 1"/>
-          <p:cNvSpPr>
-            <a:spLocks noGrp="1" noRot="1" noChangeAspect="1"/>
-          </p:cNvSpPr>
-          <p:nvPr>
-            <p:ph type="sldImg"/>
-          </p:nvPr>
-        </p:nvSpPr>
-        <p:spPr/>
-      </p:sp>
-      <p:sp>
-        <p:nvSpPr>
-          <p:cNvPr id="3" name="Notes Placeholder 2"/>
-          <p:cNvSpPr>
-            <a:spLocks noGrp="1"/>
-          </p:cNvSpPr>
-          <p:nvPr>
-            <p:ph type="body" idx="1"/>
-          </p:nvPr>
-        </p:nvSpPr>
-        <p:spPr/>
-        <p:txBody>
-          <a:bodyPr/>
-          <a:lstStyle/>
-          <a:p>
-            <a:r>
-              <a:rPr lang="en-US" dirty="0"/>
-              <a:t>Nunca documentar solo beneficios: sin los riesgos, el comité aprueba sin conocer las dependencias reales y las descubre tarde.</a:t>
-            </a:r>
-            <a:endParaRPr lang="en-US" dirty="0"/>
-          </a:p>
-        </p:txBody>
-      </p:sp>
-      <p:sp>
-        <p:nvSpPr>
-          <p:cNvPr id="4" name="Slide Number Placeholder 3"/>
-          <p:cNvSpPr>
-            <a:spLocks noGrp="1"/>
-          </p:cNvSpPr>
-          <p:nvPr>
-            <p:ph type="sldNum" sz="quarter" idx="10"/>
-          </p:nvPr>
-        </p:nvSpPr>
-        <p:spPr/>
-        <p:txBody>
-          <a:bodyPr/>
-          <a:lstStyle/>
-          <a:p>
-            <a:fld id="{F7021451-1387-4CA6-816F-3879F97B5CBC}" type="slidenum">
-              <a:rPr lang="en-US"/>
-              <a:t>22</a:t>
-            </a:fld>
-            <a:endParaRPr lang="en-US"/>
-          </a:p>
-        </p:txBody>
-      </p:sp>
-    </p:spTree>
-    <p:extLst>
-      <p:ext uri="{BB962C8B-B14F-4D97-AF65-F5344CB8AC3E}">
-        <p14:creationId xmlns:p14="http://schemas.microsoft.com/office/powerpoint/2010/main" val="1024086991"/>
-      </p:ext>
-    </p:extLst>
-  </p:cSld>
-  <p:clrMapOvr>
-    <a:masterClrMapping/>
-  </p:clrMapOvr>
-</p:notes>
-</file>
-
-<file path=ppt/notesSlides/notesSlide23.xml><?xml version="1.0" encoding="utf-8"?>
-<p:notes xmlns:a="http://schemas.openxmlformats.org/drawingml/2006/main" xmlns:r="http://schemas.openxmlformats.org/officeDocument/2006/relationships" xmlns:p="http://schemas.openxmlformats.org/presentationml/2006/main">
-  <p:cSld>
-    <p:spTree>
-      <p:nvGrpSpPr>
-        <p:cNvPr id="1" name=""/>
-        <p:cNvGrpSpPr/>
-        <p:nvPr/>
-      </p:nvGrpSpPr>
-      <p:grpSpPr>
-        <a:xfrm>
-          <a:off x="0" y="0"/>
-          <a:ext cx="0" cy="0"/>
-          <a:chOff x="0" y="0"/>
-          <a:chExt cx="0" cy="0"/>
-        </a:xfrm>
-      </p:grpSpPr>
-      <p:sp>
-        <p:nvSpPr>
-          <p:cNvPr id="2" name="Slide Image Placeholder 1"/>
-          <p:cNvSpPr>
-            <a:spLocks noGrp="1" noRot="1" noChangeAspect="1"/>
-          </p:cNvSpPr>
-          <p:nvPr>
-            <p:ph type="sldImg"/>
-          </p:nvPr>
-        </p:nvSpPr>
-        <p:spPr/>
-      </p:sp>
-      <p:sp>
-        <p:nvSpPr>
-          <p:cNvPr id="3" name="Notes Placeholder 2"/>
-          <p:cNvSpPr>
-            <a:spLocks noGrp="1"/>
-          </p:cNvSpPr>
-          <p:nvPr>
-            <p:ph type="body" idx="1"/>
-          </p:nvPr>
-        </p:nvSpPr>
-        <p:spPr/>
-        <p:txBody>
-          <a:bodyPr/>
-          <a:lstStyle/>
-          <a:p>
-            <a:r>
-              <a:rPr lang="en-US" dirty="0"/>
-              <a:t>Propuesta de tiempos (45 minutos); ajústelos a la sesión. Plantillas en el repo del Taller 7: plantilla_matriz_decision.md y plantilla_mejora_arquitectura.md.</a:t>
-            </a:r>
-            <a:endParaRPr lang="en-US" dirty="0"/>
-          </a:p>
-        </p:txBody>
-      </p:sp>
-      <p:sp>
-        <p:nvSpPr>
-          <p:cNvPr id="4" name="Slide Number Placeholder 3"/>
-          <p:cNvSpPr>
-            <a:spLocks noGrp="1"/>
-          </p:cNvSpPr>
-          <p:nvPr>
-            <p:ph type="sldNum" sz="quarter" idx="10"/>
-          </p:nvPr>
-        </p:nvSpPr>
-        <p:spPr/>
-        <p:txBody>
-          <a:bodyPr/>
-          <a:lstStyle/>
-          <a:p>
-            <a:fld id="{F7021451-1387-4CA6-816F-3879F97B5CBC}" type="slidenum">
-              <a:rPr lang="en-US"/>
-              <a:t>23</a:t>
-            </a:fld>
-            <a:endParaRPr lang="en-US"/>
-          </a:p>
-        </p:txBody>
-      </p:sp>
-    </p:spTree>
-    <p:extLst>
-      <p:ext uri="{BB962C8B-B14F-4D97-AF65-F5344CB8AC3E}">
-        <p14:creationId xmlns:p14="http://schemas.microsoft.com/office/powerpoint/2010/main" val="1024086991"/>
-      </p:ext>
-    </p:extLst>
-  </p:cSld>
-  <p:clrMapOvr>
-    <a:masterClrMapping/>
-  </p:clrMapOvr>
-</p:notes>
-</file>
-
-<file path=ppt/notesSlides/notesSlide24.xml><?xml version="1.0" encoding="utf-8"?>
-<p:notes xmlns:a="http://schemas.openxmlformats.org/drawingml/2006/main" xmlns:r="http://schemas.openxmlformats.org/officeDocument/2006/relationships" xmlns:p="http://schemas.openxmlformats.org/presentationml/2006/main">
-  <p:cSld>
-    <p:spTree>
-      <p:nvGrpSpPr>
-        <p:cNvPr id="1" name=""/>
-        <p:cNvGrpSpPr/>
-        <p:nvPr/>
-      </p:nvGrpSpPr>
-      <p:grpSpPr>
-        <a:xfrm>
-          <a:off x="0" y="0"/>
-          <a:ext cx="0" cy="0"/>
-          <a:chOff x="0" y="0"/>
-          <a:chExt cx="0" cy="0"/>
-        </a:xfrm>
-      </p:grpSpPr>
-      <p:sp>
-        <p:nvSpPr>
-          <p:cNvPr id="2" name="Slide Image Placeholder 1"/>
-          <p:cNvSpPr>
-            <a:spLocks noGrp="1" noRot="1" noChangeAspect="1"/>
-          </p:cNvSpPr>
-          <p:nvPr>
-            <p:ph type="sldImg"/>
-          </p:nvPr>
-        </p:nvSpPr>
-        <p:spPr/>
-      </p:sp>
-      <p:sp>
-        <p:nvSpPr>
-          <p:cNvPr id="3" name="Notes Placeholder 2"/>
-          <p:cNvSpPr>
-            <a:spLocks noGrp="1"/>
-          </p:cNvSpPr>
-          <p:nvPr>
-            <p:ph type="body" idx="1"/>
-          </p:nvPr>
-        </p:nvSpPr>
-        <p:spPr/>
-        <p:txBody>
-          <a:bodyPr/>
-          <a:lstStyle/>
-          <a:p>
-            <a:r>
-              <a:rPr lang="en-US" dirty="0"/>
-              <a:t/>
-            </a:r>
-            <a:endParaRPr lang="en-US" dirty="0"/>
-          </a:p>
-        </p:txBody>
-      </p:sp>
-      <p:sp>
-        <p:nvSpPr>
-          <p:cNvPr id="4" name="Slide Number Placeholder 3"/>
-          <p:cNvSpPr>
-            <a:spLocks noGrp="1"/>
-          </p:cNvSpPr>
-          <p:nvPr>
-            <p:ph type="sldNum" sz="quarter" idx="10"/>
-          </p:nvPr>
-        </p:nvSpPr>
-        <p:spPr/>
-        <p:txBody>
-          <a:bodyPr/>
-          <a:lstStyle/>
-          <a:p>
-            <a:fld id="{F7021451-1387-4CA6-816F-3879F97B5CBC}" type="slidenum">
-              <a:rPr lang="en-US"/>
-              <a:t>24</a:t>
-            </a:fld>
-            <a:endParaRPr lang="en-US"/>
-          </a:p>
-        </p:txBody>
-      </p:sp>
-    </p:spTree>
-    <p:extLst>
-      <p:ext uri="{BB962C8B-B14F-4D97-AF65-F5344CB8AC3E}">
-        <p14:creationId xmlns:p14="http://schemas.microsoft.com/office/powerpoint/2010/main" val="1024086991"/>
-      </p:ext>
-    </p:extLst>
-  </p:cSld>
-  <p:clrMapOvr>
-    <a:masterClrMapping/>
-  </p:clrMapOvr>
-</p:notes>
-</file>
-
-<file path=ppt/notesSlides/notesSlide3.xml><?xml version="1.0" encoding="utf-8"?>
-<p:notes xmlns:a="http://schemas.openxmlformats.org/drawingml/2006/main" xmlns:r="http://schemas.openxmlformats.org/officeDocument/2006/relationships" xmlns:p="http://schemas.openxmlformats.org/presentationml/2006/main">
-  <p:cSld>
-    <p:spTree>
-      <p:nvGrpSpPr>
-        <p:cNvPr id="1" name=""/>
-        <p:cNvGrpSpPr/>
-        <p:nvPr/>
-      </p:nvGrpSpPr>
-      <p:grpSpPr>
-        <a:xfrm>
-          <a:off x="0" y="0"/>
-          <a:ext cx="0" cy="0"/>
-          <a:chOff x="0" y="0"/>
-          <a:chExt cx="0" cy="0"/>
-        </a:xfrm>
-      </p:grpSpPr>
-      <p:sp>
-        <p:nvSpPr>
-          <p:cNvPr id="2" name="Slide Image Placeholder 1"/>
-          <p:cNvSpPr>
-            <a:spLocks noGrp="1" noRot="1" noChangeAspect="1"/>
-          </p:cNvSpPr>
-          <p:nvPr>
-            <p:ph type="sldImg"/>
-          </p:nvPr>
-        </p:nvSpPr>
-        <p:spPr/>
-      </p:sp>
-      <p:sp>
-        <p:nvSpPr>
-          <p:cNvPr id="3" name="Notes Placeholder 2"/>
-          <p:cNvSpPr>
-            <a:spLocks noGrp="1"/>
-          </p:cNvSpPr>
-          <p:nvPr>
-            <p:ph type="body" idx="1"/>
-          </p:nvPr>
-        </p:nvSpPr>
-        <p:spPr/>
-        <p:txBody>
-          <a:bodyPr/>
-          <a:lstStyle/>
-          <a:p>
-            <a:r>
-              <a:rPr lang="en-US" dirty="0"/>
-              <a:t>No es un diagrama nuevo: es el C2/mapa de infraestructura resumido. El objetivo de esta lámina es recordar dónde estamos parados antes de proponer nada.</a:t>
-            </a:r>
-            <a:endParaRPr lang="en-US" dirty="0"/>
-          </a:p>
-        </p:txBody>
-      </p:sp>
-      <p:sp>
-        <p:nvSpPr>
-          <p:cNvPr id="4" name="Slide Number Placeholder 3"/>
-          <p:cNvSpPr>
-            <a:spLocks noGrp="1"/>
-          </p:cNvSpPr>
-          <p:nvPr>
-            <p:ph type="sldNum" sz="quarter" idx="10"/>
-          </p:nvPr>
-        </p:nvSpPr>
-        <p:spPr/>
-        <p:txBody>
-          <a:bodyPr/>
-          <a:lstStyle/>
-          <a:p>
-            <a:fld id="{F7021451-1387-4CA6-816F-3879F97B5CBC}" type="slidenum">
-              <a:rPr lang="en-US"/>
-              <a:t>3</a:t>
-            </a:fld>
-            <a:endParaRPr lang="en-US"/>
-          </a:p>
-        </p:txBody>
-      </p:sp>
-    </p:spTree>
-    <p:extLst>
-      <p:ext uri="{BB962C8B-B14F-4D97-AF65-F5344CB8AC3E}">
-        <p14:creationId xmlns:p14="http://schemas.microsoft.com/office/powerpoint/2010/main" val="1024086991"/>
-      </p:ext>
-    </p:extLst>
-  </p:cSld>
-  <p:clrMapOvr>
-    <a:masterClrMapping/>
-  </p:clrMapOvr>
-</p:notes>
-</file>
-
-<file path=ppt/notesSlides/notesSlide4.xml><?xml version="1.0" encoding="utf-8"?>
-<p:notes xmlns:a="http://schemas.openxmlformats.org/drawingml/2006/main" xmlns:r="http://schemas.openxmlformats.org/officeDocument/2006/relationships" xmlns:p="http://schemas.openxmlformats.org/presentationml/2006/main">
-  <p:cSld>
-    <p:spTree>
-      <p:nvGrpSpPr>
-        <p:cNvPr id="1" name=""/>
-        <p:cNvGrpSpPr/>
-        <p:nvPr/>
-      </p:nvGrpSpPr>
-      <p:grpSpPr>
-        <a:xfrm>
-          <a:off x="0" y="0"/>
-          <a:ext cx="0" cy="0"/>
-          <a:chOff x="0" y="0"/>
-          <a:chExt cx="0" cy="0"/>
-        </a:xfrm>
-      </p:grpSpPr>
-      <p:sp>
-        <p:nvSpPr>
-          <p:cNvPr id="2" name="Slide Image Placeholder 1"/>
-          <p:cNvSpPr>
-            <a:spLocks noGrp="1" noRot="1" noChangeAspect="1"/>
-          </p:cNvSpPr>
-          <p:nvPr>
-            <p:ph type="sldImg"/>
-          </p:nvPr>
-        </p:nvSpPr>
-        <p:spPr/>
-      </p:sp>
-      <p:sp>
-        <p:nvSpPr>
-          <p:cNvPr id="3" name="Notes Placeholder 2"/>
-          <p:cNvSpPr>
-            <a:spLocks noGrp="1"/>
-          </p:cNvSpPr>
-          <p:nvPr>
-            <p:ph type="body" idx="1"/>
-          </p:nvPr>
-        </p:nvSpPr>
-        <p:spPr/>
-        <p:txBody>
-          <a:bodyPr/>
-          <a:lstStyle/>
-          <a:p>
-            <a:r>
-              <a:rPr lang="en-US" dirty="0"/>
-              <a:t>Esta es la regla que sostiene todo lo demás: cada elemento del TO-BE debe poder rastrearse a una brecha de un entregable anterior.</a:t>
-            </a:r>
-            <a:endParaRPr lang="en-US" dirty="0"/>
-          </a:p>
-        </p:txBody>
-      </p:sp>
-      <p:sp>
-        <p:nvSpPr>
-          <p:cNvPr id="4" name="Slide Number Placeholder 3"/>
-          <p:cNvSpPr>
-            <a:spLocks noGrp="1"/>
-          </p:cNvSpPr>
-          <p:nvPr>
-            <p:ph type="sldNum" sz="quarter" idx="10"/>
-          </p:nvPr>
-        </p:nvSpPr>
-        <p:spPr/>
-        <p:txBody>
-          <a:bodyPr/>
-          <a:lstStyle/>
-          <a:p>
-            <a:fld id="{F7021451-1387-4CA6-816F-3879F97B5CBC}" type="slidenum">
-              <a:rPr lang="en-US"/>
-              <a:t>4</a:t>
-            </a:fld>
-            <a:endParaRPr lang="en-US"/>
-          </a:p>
-        </p:txBody>
-      </p:sp>
-    </p:spTree>
-    <p:extLst>
-      <p:ext uri="{BB962C8B-B14F-4D97-AF65-F5344CB8AC3E}">
-        <p14:creationId xmlns:p14="http://schemas.microsoft.com/office/powerpoint/2010/main" val="1024086991"/>
-      </p:ext>
-    </p:extLst>
-  </p:cSld>
-  <p:clrMapOvr>
-    <a:masterClrMapping/>
-  </p:clrMapOvr>
-</p:notes>
-</file>
-
-<file path=ppt/notesSlides/notesSlide5.xml><?xml version="1.0" encoding="utf-8"?>
-<p:notes xmlns:a="http://schemas.openxmlformats.org/drawingml/2006/main" xmlns:r="http://schemas.openxmlformats.org/officeDocument/2006/relationships" xmlns:p="http://schemas.openxmlformats.org/presentationml/2006/main">
-  <p:cSld>
-    <p:spTree>
-      <p:nvGrpSpPr>
-        <p:cNvPr id="1" name=""/>
-        <p:cNvGrpSpPr/>
-        <p:nvPr/>
-      </p:nvGrpSpPr>
-      <p:grpSpPr>
-        <a:xfrm>
-          <a:off x="0" y="0"/>
-          <a:ext cx="0" cy="0"/>
-          <a:chOff x="0" y="0"/>
-          <a:chExt cx="0" cy="0"/>
-        </a:xfrm>
-      </p:grpSpPr>
-      <p:sp>
-        <p:nvSpPr>
-          <p:cNvPr id="2" name="Slide Image Placeholder 1"/>
-          <p:cNvSpPr>
-            <a:spLocks noGrp="1" noRot="1" noChangeAspect="1"/>
-          </p:cNvSpPr>
-          <p:nvPr>
-            <p:ph type="sldImg"/>
-          </p:nvPr>
-        </p:nvSpPr>
-        <p:spPr/>
-      </p:sp>
-      <p:sp>
-        <p:nvSpPr>
-          <p:cNvPr id="3" name="Notes Placeholder 2"/>
-          <p:cNvSpPr>
-            <a:spLocks noGrp="1"/>
-          </p:cNvSpPr>
-          <p:nvPr>
-            <p:ph type="body" idx="1"/>
-          </p:nvPr>
-        </p:nvSpPr>
-        <p:spPr/>
-        <p:txBody>
-          <a:bodyPr/>
-          <a:lstStyle/>
-          <a:p>
-            <a:r>
-              <a:rPr lang="en-US" dirty="0"/>
-              <a:t>Las tres preguntas orientadoras son de la guía oficial de la actividad de mejora. En clase usamos solo brechas técnicas porque son las únicas completamente diagnosticadas; en el proyecto real se suman seguridad y normatividad.</a:t>
-            </a:r>
-            <a:endParaRPr lang="en-US" dirty="0"/>
-          </a:p>
-        </p:txBody>
-      </p:sp>
-      <p:sp>
-        <p:nvSpPr>
-          <p:cNvPr id="4" name="Slide Number Placeholder 3"/>
-          <p:cNvSpPr>
-            <a:spLocks noGrp="1"/>
-          </p:cNvSpPr>
-          <p:nvPr>
-            <p:ph type="sldNum" sz="quarter" idx="10"/>
-          </p:nvPr>
-        </p:nvSpPr>
-        <p:spPr/>
-        <p:txBody>
-          <a:bodyPr/>
-          <a:lstStyle/>
-          <a:p>
-            <a:fld id="{F7021451-1387-4CA6-816F-3879F97B5CBC}" type="slidenum">
-              <a:rPr lang="en-US"/>
-              <a:t>5</a:t>
-            </a:fld>
-            <a:endParaRPr lang="en-US"/>
-          </a:p>
-        </p:txBody>
-      </p:sp>
-    </p:spTree>
-    <p:extLst>
-      <p:ext uri="{BB962C8B-B14F-4D97-AF65-F5344CB8AC3E}">
-        <p14:creationId xmlns:p14="http://schemas.microsoft.com/office/powerpoint/2010/main" val="1024086991"/>
-      </p:ext>
-    </p:extLst>
-  </p:cSld>
-  <p:clrMapOvr>
-    <a:masterClrMapping/>
-  </p:clrMapOvr>
-</p:notes>
-</file>
-
-<file path=ppt/notesSlides/notesSlide6.xml><?xml version="1.0" encoding="utf-8"?>
-<p:notes xmlns:a="http://schemas.openxmlformats.org/drawingml/2006/main" xmlns:r="http://schemas.openxmlformats.org/officeDocument/2006/relationships" xmlns:p="http://schemas.openxmlformats.org/presentationml/2006/main">
-  <p:cSld>
-    <p:spTree>
-      <p:nvGrpSpPr>
-        <p:cNvPr id="1" name=""/>
-        <p:cNvGrpSpPr/>
-        <p:nvPr/>
-      </p:nvGrpSpPr>
-      <p:grpSpPr>
-        <a:xfrm>
-          <a:off x="0" y="0"/>
-          <a:ext cx="0" cy="0"/>
-          <a:chOff x="0" y="0"/>
-          <a:chExt cx="0" cy="0"/>
-        </a:xfrm>
-      </p:grpSpPr>
-      <p:sp>
-        <p:nvSpPr>
-          <p:cNvPr id="2" name="Slide Image Placeholder 1"/>
-          <p:cNvSpPr>
-            <a:spLocks noGrp="1" noRot="1" noChangeAspect="1"/>
-          </p:cNvSpPr>
-          <p:nvPr>
-            <p:ph type="sldImg"/>
-          </p:nvPr>
-        </p:nvSpPr>
-        <p:spPr/>
-      </p:sp>
-      <p:sp>
-        <p:nvSpPr>
-          <p:cNvPr id="3" name="Notes Placeholder 2"/>
-          <p:cNvSpPr>
-            <a:spLocks noGrp="1"/>
-          </p:cNvSpPr>
-          <p:nvPr>
-            <p:ph type="body" idx="1"/>
-          </p:nvPr>
-        </p:nvSpPr>
-        <p:spPr/>
-        <p:txBody>
-          <a:bodyPr/>
-          <a:lstStyle/>
-          <a:p>
-            <a:r>
-              <a:rPr lang="en-US" dirty="0"/>
-              <a:t>Regla: no se descarta nada todavía. Si alguna idea es un agente de IA (como el chatbot #7), no se modela como caja negra: se usa el patrón de sistemas agénticos de la guía ArchiMate.</a:t>
-            </a:r>
-            <a:endParaRPr lang="en-US" dirty="0"/>
-          </a:p>
-        </p:txBody>
-      </p:sp>
-      <p:sp>
-        <p:nvSpPr>
-          <p:cNvPr id="4" name="Slide Number Placeholder 3"/>
-          <p:cNvSpPr>
-            <a:spLocks noGrp="1"/>
-          </p:cNvSpPr>
-          <p:nvPr>
-            <p:ph type="sldNum" sz="quarter" idx="10"/>
-          </p:nvPr>
-        </p:nvSpPr>
-        <p:spPr/>
-        <p:txBody>
-          <a:bodyPr/>
-          <a:lstStyle/>
-          <a:p>
-            <a:fld id="{F7021451-1387-4CA6-816F-3879F97B5CBC}" type="slidenum">
-              <a:rPr lang="en-US"/>
-              <a:t>6</a:t>
-            </a:fld>
-            <a:endParaRPr lang="en-US"/>
-          </a:p>
-        </p:txBody>
-      </p:sp>
-    </p:spTree>
-    <p:extLst>
-      <p:ext uri="{BB962C8B-B14F-4D97-AF65-F5344CB8AC3E}">
-        <p14:creationId xmlns:p14="http://schemas.microsoft.com/office/powerpoint/2010/main" val="1024086991"/>
-      </p:ext>
-    </p:extLst>
-  </p:cSld>
-  <p:clrMapOvr>
-    <a:masterClrMapping/>
-  </p:clrMapOvr>
-</p:notes>
-</file>
-
-<file path=ppt/notesSlides/notesSlide7.xml><?xml version="1.0" encoding="utf-8"?>
-<p:notes xmlns:a="http://schemas.openxmlformats.org/drawingml/2006/main" xmlns:r="http://schemas.openxmlformats.org/officeDocument/2006/relationships" xmlns:p="http://schemas.openxmlformats.org/presentationml/2006/main">
-  <p:cSld>
-    <p:spTree>
-      <p:nvGrpSpPr>
-        <p:cNvPr id="1" name=""/>
-        <p:cNvGrpSpPr/>
-        <p:nvPr/>
-      </p:nvGrpSpPr>
-      <p:grpSpPr>
-        <a:xfrm>
-          <a:off x="0" y="0"/>
-          <a:ext cx="0" cy="0"/>
-          <a:chOff x="0" y="0"/>
-          <a:chExt cx="0" cy="0"/>
-        </a:xfrm>
-      </p:grpSpPr>
-      <p:sp>
-        <p:nvSpPr>
-          <p:cNvPr id="2" name="Slide Image Placeholder 1"/>
-          <p:cNvSpPr>
-            <a:spLocks noGrp="1" noRot="1" noChangeAspect="1"/>
-          </p:cNvSpPr>
-          <p:nvPr>
-            <p:ph type="sldImg"/>
-          </p:nvPr>
-        </p:nvSpPr>
-        <p:spPr/>
-      </p:sp>
-      <p:sp>
-        <p:nvSpPr>
-          <p:cNvPr id="3" name="Notes Placeholder 2"/>
-          <p:cNvSpPr>
-            <a:spLocks noGrp="1"/>
-          </p:cNvSpPr>
-          <p:nvPr>
-            <p:ph type="body" idx="1"/>
-          </p:nvPr>
-        </p:nvSpPr>
-        <p:spPr/>
-        <p:txBody>
-          <a:bodyPr/>
-          <a:lstStyle/>
-          <a:p>
-            <a:r>
-              <a:rPr lang="en-US" dirty="0"/>
-              <a:t>Priorizar cruza impacto y esfuerzo. Los quick wins van primero. Ahora tomamos la prioridad 1 (balanceador) y más adelante veremos cómo decidir cómo resolverla.</a:t>
-            </a:r>
-            <a:endParaRPr lang="en-US" dirty="0"/>
-          </a:p>
-        </p:txBody>
-      </p:sp>
-      <p:sp>
-        <p:nvSpPr>
-          <p:cNvPr id="4" name="Slide Number Placeholder 3"/>
-          <p:cNvSpPr>
-            <a:spLocks noGrp="1"/>
-          </p:cNvSpPr>
-          <p:nvPr>
-            <p:ph type="sldNum" sz="quarter" idx="10"/>
-          </p:nvPr>
-        </p:nvSpPr>
-        <p:spPr/>
-        <p:txBody>
-          <a:bodyPr/>
-          <a:lstStyle/>
-          <a:p>
-            <a:fld id="{F7021451-1387-4CA6-816F-3879F97B5CBC}" type="slidenum">
-              <a:rPr lang="en-US"/>
-              <a:t>7</a:t>
-            </a:fld>
-            <a:endParaRPr lang="en-US"/>
-          </a:p>
-        </p:txBody>
-      </p:sp>
-    </p:spTree>
-    <p:extLst>
-      <p:ext uri="{BB962C8B-B14F-4D97-AF65-F5344CB8AC3E}">
-        <p14:creationId xmlns:p14="http://schemas.microsoft.com/office/powerpoint/2010/main" val="1024086991"/>
-      </p:ext>
-    </p:extLst>
-  </p:cSld>
-  <p:clrMapOvr>
-    <a:masterClrMapping/>
-  </p:clrMapOvr>
-</p:notes>
-</file>
-
-<file path=ppt/notesSlides/notesSlide8.xml><?xml version="1.0" encoding="utf-8"?>
-<p:notes xmlns:a="http://schemas.openxmlformats.org/drawingml/2006/main" xmlns:r="http://schemas.openxmlformats.org/officeDocument/2006/relationships" xmlns:p="http://schemas.openxmlformats.org/presentationml/2006/main">
-  <p:cSld>
-    <p:spTree>
-      <p:nvGrpSpPr>
-        <p:cNvPr id="1" name=""/>
-        <p:cNvGrpSpPr/>
-        <p:nvPr/>
-      </p:nvGrpSpPr>
-      <p:grpSpPr>
-        <a:xfrm>
-          <a:off x="0" y="0"/>
-          <a:ext cx="0" cy="0"/>
-          <a:chOff x="0" y="0"/>
-          <a:chExt cx="0" cy="0"/>
-        </a:xfrm>
-      </p:grpSpPr>
-      <p:sp>
-        <p:nvSpPr>
-          <p:cNvPr id="2" name="Slide Image Placeholder 1"/>
-          <p:cNvSpPr>
-            <a:spLocks noGrp="1" noRot="1" noChangeAspect="1"/>
-          </p:cNvSpPr>
-          <p:nvPr>
-            <p:ph type="sldImg"/>
-          </p:nvPr>
-        </p:nvSpPr>
-        <p:spPr/>
-      </p:sp>
-      <p:sp>
-        <p:nvSpPr>
-          <p:cNvPr id="3" name="Notes Placeholder 2"/>
-          <p:cNvSpPr>
-            <a:spLocks noGrp="1"/>
-          </p:cNvSpPr>
-          <p:nvPr>
-            <p:ph type="body" idx="1"/>
-          </p:nvPr>
-        </p:nvSpPr>
-        <p:spPr/>
-        <p:txBody>
-          <a:bodyPr/>
-          <a:lstStyle/>
-          <a:p>
-            <a:r>
-              <a:rPr lang="en-US" dirty="0"/>
-              <a:t>El TO-BE de aplicaciones extiende el C2 del Taller 3 y el de tecnología extiende el mapa del Taller 4. Si alguna mitigación STRIDE del Taller 5 protege uno de estos componentes, se declara explícitamente.</a:t>
-            </a:r>
-            <a:endParaRPr lang="en-US" dirty="0"/>
-          </a:p>
-        </p:txBody>
-      </p:sp>
-      <p:sp>
-        <p:nvSpPr>
-          <p:cNvPr id="4" name="Slide Number Placeholder 3"/>
-          <p:cNvSpPr>
-            <a:spLocks noGrp="1"/>
-          </p:cNvSpPr>
-          <p:nvPr>
-            <p:ph type="sldNum" sz="quarter" idx="10"/>
-          </p:nvPr>
-        </p:nvSpPr>
-        <p:spPr/>
-        <p:txBody>
-          <a:bodyPr/>
-          <a:lstStyle/>
-          <a:p>
-            <a:fld id="{F7021451-1387-4CA6-816F-3879F97B5CBC}" type="slidenum">
-              <a:rPr lang="en-US"/>
-              <a:t>8</a:t>
-            </a:fld>
-            <a:endParaRPr lang="en-US"/>
-          </a:p>
-        </p:txBody>
-      </p:sp>
-    </p:spTree>
-    <p:extLst>
-      <p:ext uri="{BB962C8B-B14F-4D97-AF65-F5344CB8AC3E}">
-        <p14:creationId xmlns:p14="http://schemas.microsoft.com/office/powerpoint/2010/main" val="1024086991"/>
-      </p:ext>
-    </p:extLst>
-  </p:cSld>
-  <p:clrMapOvr>
-    <a:masterClrMapping/>
-  </p:clrMapOvr>
-</p:notes>
-</file>
-
-<file path=ppt/notesSlides/notesSlide9.xml><?xml version="1.0" encoding="utf-8"?>
-<p:notes xmlns:a="http://schemas.openxmlformats.org/drawingml/2006/main" xmlns:r="http://schemas.openxmlformats.org/officeDocument/2006/relationships" xmlns:p="http://schemas.openxmlformats.org/presentationml/2006/main">
-  <p:cSld>
-    <p:spTree>
-      <p:nvGrpSpPr>
-        <p:cNvPr id="1" name=""/>
-        <p:cNvGrpSpPr/>
-        <p:nvPr/>
-      </p:nvGrpSpPr>
-      <p:grpSpPr>
-        <a:xfrm>
-          <a:off x="0" y="0"/>
-          <a:ext cx="0" cy="0"/>
-          <a:chOff x="0" y="0"/>
-          <a:chExt cx="0" cy="0"/>
-        </a:xfrm>
-      </p:grpSpPr>
-      <p:sp>
-        <p:nvSpPr>
-          <p:cNvPr id="2" name="Slide Image Placeholder 1"/>
-          <p:cNvSpPr>
-            <a:spLocks noGrp="1" noRot="1" noChangeAspect="1"/>
-          </p:cNvSpPr>
-          <p:nvPr>
-            <p:ph type="sldImg"/>
-          </p:nvPr>
-        </p:nvSpPr>
-        <p:spPr/>
-      </p:sp>
-      <p:sp>
-        <p:nvSpPr>
-          <p:cNvPr id="3" name="Notes Placeholder 2"/>
-          <p:cNvSpPr>
-            <a:spLocks noGrp="1"/>
-          </p:cNvSpPr>
-          <p:nvPr>
-            <p:ph type="body" idx="1"/>
-          </p:nvPr>
-        </p:nvSpPr>
-        <p:spPr/>
-        <p:txBody>
-          <a:bodyPr/>
-          <a:lstStyle/>
-          <a:p>
-            <a:r>
-              <a:rPr lang="en-US" dirty="0"/>
-              <a:t>Los valores en dólares, semanas y envíos por hora de las siguientes láminas son supuestos del ejemplo. En el proyecto real se reemplazan con datos del cliente.</a:t>
-            </a:r>
-            <a:endParaRPr lang="en-US" dirty="0"/>
-          </a:p>
-        </p:txBody>
-      </p:sp>
-      <p:sp>
-        <p:nvSpPr>
-          <p:cNvPr id="4" name="Slide Number Placeholder 3"/>
-          <p:cNvSpPr>
-            <a:spLocks noGrp="1"/>
-          </p:cNvSpPr>
-          <p:nvPr>
-            <p:ph type="sldNum" sz="quarter" idx="10"/>
-          </p:nvPr>
-        </p:nvSpPr>
-        <p:spPr/>
-        <p:txBody>
-          <a:bodyPr/>
-          <a:lstStyle/>
-          <a:p>
-            <a:fld id="{F7021451-1387-4CA6-816F-3879F97B5CBC}" type="slidenum">
-              <a:rPr lang="en-US"/>
-              <a:t>9</a:t>
-            </a:fld>
-            <a:endParaRPr lang="en-US"/>
-          </a:p>
-        </p:txBody>
-      </p:sp>
-    </p:spTree>
-    <p:extLst>
-      <p:ext uri="{BB962C8B-B14F-4D97-AF65-F5344CB8AC3E}">
-        <p14:creationId xmlns:p14="http://schemas.microsoft.com/office/powerpoint/2010/main" val="1024086991"/>
-      </p:ext>
-    </p:extLst>
-  </p:cSld>
-  <p:clrMapOvr>
-    <a:masterClrMapping/>
-  </p:clrMapOvr>
-</p:notes>
 </file>
 
 <file path=ppt/slideLayouts/slideLayout1.xml><?xml version="1.0" encoding="utf-8"?>
@@ -9940,7 +7828,7 @@
                           <a:ea typeface="Calibri" pitchFamily="34" charset="-122"/>
                           <a:cs typeface="Calibri" pitchFamily="34" charset="-120"/>
                         </a:rPr>
-                        <a:t>4-6 semanas</a:t>
+                        <a:t>6 semanas (+2 de pruebas)</a:t>
                       </a:r>
                       <a:endParaRPr lang="en-US" sz="1200" dirty="0">
                         <a:latin typeface="Calibri" charset="0"/>
